--- a/wifi 6.pptx
+++ b/wifi 6.pptx
@@ -11,6 +11,7 @@
     <p:sldId id="259" r:id="rId5"/>
     <p:sldId id="260" r:id="rId6"/>
     <p:sldId id="261" r:id="rId7"/>
+    <p:sldId id="262" r:id="rId8"/>
   </p:sldIdLst>
   <p:sldSz cx="12192000" cy="6858000"/>
   <p:notesSz cx="6858000" cy="9144000"/>
@@ -109,6 +110,11 @@
       </a:defRPr>
     </a:lvl9pPr>
   </p:defaultTextStyle>
+  <p:extLst>
+    <p:ext uri="{EFAFB233-063F-42B5-8137-9DF3F51BA10A}">
+      <p15:sldGuideLst xmlns:p15="http://schemas.microsoft.com/office/powerpoint/2012/main"/>
+    </p:ext>
+  </p:extLst>
 </p:presentation>
 </file>
 
@@ -298,7 +304,7 @@
           <a:p>
             <a:fld id="{57D76C4A-E1F9-49C1-BCE4-2E358991CE58}" type="datetimeFigureOut">
               <a:rPr lang="hu-HU" smtClean="0"/>
-              <a:t>2025. 11. 04.</a:t>
+              <a:t>2025. 11. 25.</a:t>
             </a:fld>
             <a:endParaRPr lang="hu-HU"/>
           </a:p>
@@ -573,7 +579,7 @@
           <a:p>
             <a:fld id="{57D76C4A-E1F9-49C1-BCE4-2E358991CE58}" type="datetimeFigureOut">
               <a:rPr lang="hu-HU" smtClean="0"/>
-              <a:t>2025. 11. 04.</a:t>
+              <a:t>2025. 11. 25.</a:t>
             </a:fld>
             <a:endParaRPr lang="hu-HU"/>
           </a:p>
@@ -767,7 +773,7 @@
           <a:p>
             <a:fld id="{57D76C4A-E1F9-49C1-BCE4-2E358991CE58}" type="datetimeFigureOut">
               <a:rPr lang="hu-HU" smtClean="0"/>
-              <a:t>2025. 11. 04.</a:t>
+              <a:t>2025. 11. 25.</a:t>
             </a:fld>
             <a:endParaRPr lang="hu-HU"/>
           </a:p>
@@ -1040,7 +1046,7 @@
           <a:p>
             <a:fld id="{57D76C4A-E1F9-49C1-BCE4-2E358991CE58}" type="datetimeFigureOut">
               <a:rPr lang="hu-HU" smtClean="0"/>
-              <a:t>2025. 11. 04.</a:t>
+              <a:t>2025. 11. 25.</a:t>
             </a:fld>
             <a:endParaRPr lang="hu-HU"/>
           </a:p>
@@ -1381,7 +1387,7 @@
           <a:p>
             <a:fld id="{57D76C4A-E1F9-49C1-BCE4-2E358991CE58}" type="datetimeFigureOut">
               <a:rPr lang="hu-HU" smtClean="0"/>
-              <a:t>2025. 11. 04.</a:t>
+              <a:t>2025. 11. 25.</a:t>
             </a:fld>
             <a:endParaRPr lang="hu-HU"/>
           </a:p>
@@ -2004,7 +2010,7 @@
           <a:p>
             <a:fld id="{57D76C4A-E1F9-49C1-BCE4-2E358991CE58}" type="datetimeFigureOut">
               <a:rPr lang="hu-HU" smtClean="0"/>
-              <a:t>2025. 11. 04.</a:t>
+              <a:t>2025. 11. 25.</a:t>
             </a:fld>
             <a:endParaRPr lang="hu-HU"/>
           </a:p>
@@ -2864,7 +2870,7 @@
           <a:p>
             <a:fld id="{57D76C4A-E1F9-49C1-BCE4-2E358991CE58}" type="datetimeFigureOut">
               <a:rPr lang="hu-HU" smtClean="0"/>
-              <a:t>2025. 11. 04.</a:t>
+              <a:t>2025. 11. 25.</a:t>
             </a:fld>
             <a:endParaRPr lang="hu-HU"/>
           </a:p>
@@ -3034,7 +3040,7 @@
           <a:p>
             <a:fld id="{57D76C4A-E1F9-49C1-BCE4-2E358991CE58}" type="datetimeFigureOut">
               <a:rPr lang="hu-HU" smtClean="0"/>
-              <a:t>2025. 11. 04.</a:t>
+              <a:t>2025. 11. 25.</a:t>
             </a:fld>
             <a:endParaRPr lang="hu-HU"/>
           </a:p>
@@ -3214,7 +3220,7 @@
           <a:p>
             <a:fld id="{57D76C4A-E1F9-49C1-BCE4-2E358991CE58}" type="datetimeFigureOut">
               <a:rPr lang="hu-HU" smtClean="0"/>
-              <a:t>2025. 11. 04.</a:t>
+              <a:t>2025. 11. 25.</a:t>
             </a:fld>
             <a:endParaRPr lang="hu-HU"/>
           </a:p>
@@ -3384,7 +3390,7 @@
           <a:p>
             <a:fld id="{57D76C4A-E1F9-49C1-BCE4-2E358991CE58}" type="datetimeFigureOut">
               <a:rPr lang="hu-HU" smtClean="0"/>
-              <a:t>2025. 11. 04.</a:t>
+              <a:t>2025. 11. 25.</a:t>
             </a:fld>
             <a:endParaRPr lang="hu-HU"/>
           </a:p>
@@ -3631,7 +3637,7 @@
           <a:p>
             <a:fld id="{57D76C4A-E1F9-49C1-BCE4-2E358991CE58}" type="datetimeFigureOut">
               <a:rPr lang="hu-HU" smtClean="0"/>
-              <a:t>2025. 11. 04.</a:t>
+              <a:t>2025. 11. 25.</a:t>
             </a:fld>
             <a:endParaRPr lang="hu-HU"/>
           </a:p>
@@ -3923,7 +3929,7 @@
           <a:p>
             <a:fld id="{57D76C4A-E1F9-49C1-BCE4-2E358991CE58}" type="datetimeFigureOut">
               <a:rPr lang="hu-HU" smtClean="0"/>
-              <a:t>2025. 11. 04.</a:t>
+              <a:t>2025. 11. 25.</a:t>
             </a:fld>
             <a:endParaRPr lang="hu-HU"/>
           </a:p>
@@ -4367,7 +4373,7 @@
           <a:p>
             <a:fld id="{57D76C4A-E1F9-49C1-BCE4-2E358991CE58}" type="datetimeFigureOut">
               <a:rPr lang="hu-HU" smtClean="0"/>
-              <a:t>2025. 11. 04.</a:t>
+              <a:t>2025. 11. 25.</a:t>
             </a:fld>
             <a:endParaRPr lang="hu-HU"/>
           </a:p>
@@ -4485,7 +4491,7 @@
           <a:p>
             <a:fld id="{57D76C4A-E1F9-49C1-BCE4-2E358991CE58}" type="datetimeFigureOut">
               <a:rPr lang="hu-HU" smtClean="0"/>
-              <a:t>2025. 11. 04.</a:t>
+              <a:t>2025. 11. 25.</a:t>
             </a:fld>
             <a:endParaRPr lang="hu-HU"/>
           </a:p>
@@ -4580,7 +4586,7 @@
           <a:p>
             <a:fld id="{57D76C4A-E1F9-49C1-BCE4-2E358991CE58}" type="datetimeFigureOut">
               <a:rPr lang="hu-HU" smtClean="0"/>
-              <a:t>2025. 11. 04.</a:t>
+              <a:t>2025. 11. 25.</a:t>
             </a:fld>
             <a:endParaRPr lang="hu-HU"/>
           </a:p>
@@ -4859,7 +4865,7 @@
           <a:p>
             <a:fld id="{57D76C4A-E1F9-49C1-BCE4-2E358991CE58}" type="datetimeFigureOut">
               <a:rPr lang="hu-HU" smtClean="0"/>
-              <a:t>2025. 11. 04.</a:t>
+              <a:t>2025. 11. 25.</a:t>
             </a:fld>
             <a:endParaRPr lang="hu-HU"/>
           </a:p>
@@ -5134,7 +5140,7 @@
           <a:p>
             <a:fld id="{57D76C4A-E1F9-49C1-BCE4-2E358991CE58}" type="datetimeFigureOut">
               <a:rPr lang="hu-HU" smtClean="0"/>
-              <a:t>2025. 11. 04.</a:t>
+              <a:t>2025. 11. 25.</a:t>
             </a:fld>
             <a:endParaRPr lang="hu-HU"/>
           </a:p>
@@ -5563,7 +5569,7 @@
           <a:p>
             <a:fld id="{57D76C4A-E1F9-49C1-BCE4-2E358991CE58}" type="datetimeFigureOut">
               <a:rPr lang="hu-HU" smtClean="0"/>
-              <a:t>2025. 11. 04.</a:t>
+              <a:t>2025. 11. 25.</a:t>
             </a:fld>
             <a:endParaRPr lang="hu-HU"/>
           </a:p>
@@ -6574,13 +6580,13 @@
   <p:clrMapOvr>
     <a:masterClrMapping/>
   </p:clrMapOvr>
-  <mc:AlternateContent xmlns:mc="http://schemas.openxmlformats.org/markup-compatibility/2006">
-    <mc:Choice xmlns:p14="http://schemas.microsoft.com/office/powerpoint/2010/main" Requires="p14">
+  <mc:AlternateContent xmlns:mc="http://schemas.openxmlformats.org/markup-compatibility/2006" xmlns:p14="http://schemas.microsoft.com/office/powerpoint/2010/main">
+    <mc:Choice Requires="p14">
       <p:transition spd="slow" p14:dur="1500">
         <p:split orient="vert"/>
       </p:transition>
     </mc:Choice>
-    <mc:Fallback>
+    <mc:Fallback xmlns="">
       <p:transition spd="slow">
         <p:split orient="vert"/>
       </p:transition>
@@ -7204,12 +7210,18 @@
                         </a:spcAft>
                       </a:pPr>
                       <a:r>
-                        <a:rPr lang="hu-HU" sz="1400">
+                        <a:rPr lang="hu-HU" sz="1400" dirty="0" err="1">
                           <a:effectLst/>
                         </a:rPr>
-                        <a:t>Wi-Fi 4</a:t>
+                        <a:t>Wi</a:t>
                       </a:r>
-                      <a:endParaRPr lang="hu-HU" sz="1400">
+                      <a:r>
+                        <a:rPr lang="hu-HU" sz="1400" dirty="0">
+                          <a:effectLst/>
+                        </a:rPr>
+                        <a:t>-Fi 4</a:t>
+                      </a:r>
+                      <a:endParaRPr lang="hu-HU" sz="1400" dirty="0">
                         <a:effectLst/>
                         <a:latin typeface="Calibri" panose="020F0502020204030204" pitchFamily="34" charset="0"/>
                         <a:ea typeface="Calibri" panose="020F0502020204030204" pitchFamily="34" charset="0"/>
@@ -7368,12 +7380,24 @@
                         </a:spcAft>
                       </a:pPr>
                       <a:r>
-                        <a:rPr lang="hu-HU" sz="1400">
+                        <a:rPr lang="hu-HU" sz="1400" dirty="0">
                           <a:effectLst/>
                         </a:rPr>
-                        <a:t>3,5 Gb/s</a:t>
+                        <a:t>3,5 </a:t>
                       </a:r>
-                      <a:endParaRPr lang="hu-HU" sz="1400">
+                      <a:r>
+                        <a:rPr lang="hu-HU" sz="1400" dirty="0" err="1">
+                          <a:effectLst/>
+                        </a:rPr>
+                        <a:t>Gb</a:t>
+                      </a:r>
+                      <a:r>
+                        <a:rPr lang="hu-HU" sz="1400" dirty="0">
+                          <a:effectLst/>
+                        </a:rPr>
+                        <a:t>/s</a:t>
+                      </a:r>
+                      <a:endParaRPr lang="hu-HU" sz="1400" dirty="0">
                         <a:effectLst/>
                         <a:latin typeface="Calibri" panose="020F0502020204030204" pitchFamily="34" charset="0"/>
                         <a:ea typeface="Calibri" panose="020F0502020204030204" pitchFamily="34" charset="0"/>
@@ -7397,12 +7421,24 @@
                         </a:spcAft>
                       </a:pPr>
                       <a:r>
-                        <a:rPr lang="hu-HU" sz="1400">
+                        <a:rPr lang="hu-HU" sz="1400" dirty="0">
                           <a:effectLst/>
                         </a:rPr>
-                        <a:t>9,6 Gb/s</a:t>
+                        <a:t>9,6 </a:t>
                       </a:r>
-                      <a:endParaRPr lang="hu-HU" sz="1400">
+                      <a:r>
+                        <a:rPr lang="hu-HU" sz="1400" dirty="0" err="1">
+                          <a:effectLst/>
+                        </a:rPr>
+                        <a:t>Gb</a:t>
+                      </a:r>
+                      <a:r>
+                        <a:rPr lang="hu-HU" sz="1400" dirty="0">
+                          <a:effectLst/>
+                        </a:rPr>
+                        <a:t>/s</a:t>
+                      </a:r>
+                      <a:endParaRPr lang="hu-HU" sz="1400" dirty="0">
                         <a:effectLst/>
                         <a:latin typeface="Calibri" panose="020F0502020204030204" pitchFamily="34" charset="0"/>
                         <a:ea typeface="Calibri" panose="020F0502020204030204" pitchFamily="34" charset="0"/>
@@ -7433,12 +7469,12 @@
                         </a:spcAft>
                       </a:pPr>
                       <a:r>
-                        <a:rPr lang="hu-HU" sz="1400">
+                        <a:rPr lang="hu-HU" sz="1400" dirty="0">
                           <a:effectLst/>
                         </a:rPr>
                         <a:t>Frekvenciasáv</a:t>
                       </a:r>
-                      <a:endParaRPr lang="hu-HU" sz="1400">
+                      <a:endParaRPr lang="hu-HU" sz="1400" dirty="0">
                         <a:effectLst/>
                         <a:latin typeface="Calibri" panose="020F0502020204030204" pitchFamily="34" charset="0"/>
                         <a:ea typeface="Calibri" panose="020F0502020204030204" pitchFamily="34" charset="0"/>
@@ -7532,12 +7568,30 @@
                         </a:spcAft>
                       </a:pPr>
                       <a:r>
-                        <a:rPr lang="hu-HU" sz="1400">
+                        <a:rPr lang="hu-HU" sz="1400" dirty="0">
                           <a:effectLst/>
                         </a:rPr>
-                        <a:t>2,4 GHz és 5 GHz</a:t>
+                        <a:t>2,4 </a:t>
                       </a:r>
-                      <a:endParaRPr lang="hu-HU" sz="1400">
+                      <a:r>
+                        <a:rPr lang="hu-HU" sz="1400" dirty="0" err="1">
+                          <a:effectLst/>
+                        </a:rPr>
+                        <a:t>GHz</a:t>
+                      </a:r>
+                      <a:r>
+                        <a:rPr lang="hu-HU" sz="1400" dirty="0">
+                          <a:effectLst/>
+                        </a:rPr>
+                        <a:t> és 5 </a:t>
+                      </a:r>
+                      <a:r>
+                        <a:rPr lang="hu-HU" sz="1400" dirty="0" err="1">
+                          <a:effectLst/>
+                        </a:rPr>
+                        <a:t>GHz</a:t>
+                      </a:r>
+                      <a:endParaRPr lang="hu-HU" sz="1400" dirty="0">
                         <a:effectLst/>
                         <a:latin typeface="Calibri" panose="020F0502020204030204" pitchFamily="34" charset="0"/>
                         <a:ea typeface="Calibri" panose="020F0502020204030204" pitchFamily="34" charset="0"/>
@@ -7568,12 +7622,12 @@
                         </a:spcAft>
                       </a:pPr>
                       <a:r>
-                        <a:rPr lang="hu-HU" sz="1400">
+                        <a:rPr lang="hu-HU" sz="1400" dirty="0">
                           <a:effectLst/>
                         </a:rPr>
                         <a:t>Eszközök kezelése</a:t>
                       </a:r>
-                      <a:endParaRPr lang="hu-HU" sz="1400">
+                      <a:endParaRPr lang="hu-HU" sz="1400" dirty="0">
                         <a:effectLst/>
                         <a:latin typeface="Calibri" panose="020F0502020204030204" pitchFamily="34" charset="0"/>
                         <a:ea typeface="Calibri" panose="020F0502020204030204" pitchFamily="34" charset="0"/>
@@ -7691,12 +7745,12 @@
                         </a:spcAft>
                       </a:pPr>
                       <a:r>
-                        <a:rPr lang="hu-HU" sz="1400">
+                        <a:rPr lang="hu-HU" sz="1400" dirty="0">
                           <a:effectLst/>
                         </a:rPr>
                         <a:t>Energiahatékonyság</a:t>
                       </a:r>
-                      <a:endParaRPr lang="hu-HU" sz="1400">
+                      <a:endParaRPr lang="hu-HU" sz="1400" dirty="0">
                         <a:effectLst/>
                         <a:latin typeface="Calibri" panose="020F0502020204030204" pitchFamily="34" charset="0"/>
                         <a:ea typeface="Calibri" panose="020F0502020204030204" pitchFamily="34" charset="0"/>
@@ -7720,12 +7774,12 @@
                         </a:spcAft>
                       </a:pPr>
                       <a:r>
-                        <a:rPr lang="hu-HU" sz="1400">
+                        <a:rPr lang="hu-HU" sz="1400" dirty="0">
                           <a:effectLst/>
                         </a:rPr>
                         <a:t>Alacsony</a:t>
                       </a:r>
-                      <a:endParaRPr lang="hu-HU" sz="1400">
+                      <a:endParaRPr lang="hu-HU" sz="1400" dirty="0">
                         <a:effectLst/>
                         <a:latin typeface="Calibri" panose="020F0502020204030204" pitchFamily="34" charset="0"/>
                         <a:ea typeface="Calibri" panose="020F0502020204030204" pitchFamily="34" charset="0"/>
@@ -8418,13 +8472,13 @@
   <p:clrMapOvr>
     <a:masterClrMapping/>
   </p:clrMapOvr>
-  <mc:AlternateContent xmlns:mc="http://schemas.openxmlformats.org/markup-compatibility/2006">
-    <mc:Choice xmlns:p14="http://schemas.microsoft.com/office/powerpoint/2010/main" Requires="p14">
+  <mc:AlternateContent xmlns:mc="http://schemas.openxmlformats.org/markup-compatibility/2006" xmlns:p14="http://schemas.microsoft.com/office/powerpoint/2010/main">
+    <mc:Choice Requires="p14">
       <p:transition spd="slow">
         <p14:flash/>
       </p:transition>
     </mc:Choice>
-    <mc:Fallback>
+    <mc:Fallback xmlns="">
       <p:transition spd="slow">
         <p:fade/>
       </p:transition>
@@ -8981,7 +9035,7 @@
         </p:nvSpPr>
         <p:spPr>
           <a:xfrm>
-            <a:off x="515482" y="238962"/>
+            <a:off x="527357" y="250838"/>
             <a:ext cx="9404723" cy="1400530"/>
           </a:xfrm>
         </p:spPr>
@@ -9073,13 +9127,13 @@
   <p:clrMapOvr>
     <a:masterClrMapping/>
   </p:clrMapOvr>
-  <mc:AlternateContent xmlns:mc="http://schemas.openxmlformats.org/markup-compatibility/2006">
-    <mc:Choice xmlns:p15="http://schemas.microsoft.com/office/powerpoint/2012/main" Requires="p15">
+  <mc:AlternateContent xmlns:mc="http://schemas.openxmlformats.org/markup-compatibility/2006" xmlns:p15="http://schemas.microsoft.com/office/powerpoint/2012/main">
+    <mc:Choice Requires="p15">
       <p:transition xmlns:p14="http://schemas.microsoft.com/office/powerpoint/2010/main" spd="slow" p14:dur="2000">
         <p15:prstTrans prst="drape"/>
       </p:transition>
     </mc:Choice>
-    <mc:Fallback>
+    <mc:Fallback xmlns="">
       <p:transition spd="slow">
         <p:fade/>
       </p:transition>
@@ -10251,7 +10305,12 @@
             <p:ph type="title"/>
           </p:nvPr>
         </p:nvSpPr>
-        <p:spPr/>
+        <p:spPr>
+          <a:xfrm>
+            <a:off x="874220" y="369591"/>
+            <a:ext cx="9404723" cy="1400530"/>
+          </a:xfrm>
+        </p:spPr>
         <p:txBody>
           <a:bodyPr/>
           <a:lstStyle/>
@@ -10438,13 +10497,13 @@
   <p:clrMapOvr>
     <a:masterClrMapping/>
   </p:clrMapOvr>
-  <mc:AlternateContent xmlns:mc="http://schemas.openxmlformats.org/markup-compatibility/2006">
-    <mc:Choice xmlns:p15="http://schemas.microsoft.com/office/powerpoint/2012/main" Requires="p15">
+  <mc:AlternateContent xmlns:mc="http://schemas.openxmlformats.org/markup-compatibility/2006" xmlns:p15="http://schemas.microsoft.com/office/powerpoint/2012/main">
+    <mc:Choice Requires="p15">
       <p:transition xmlns:p14="http://schemas.microsoft.com/office/powerpoint/2010/main" spd="slow" p14:dur="2000">
         <p15:prstTrans prst="fracture"/>
       </p:transition>
     </mc:Choice>
-    <mc:Fallback>
+    <mc:Fallback xmlns="">
       <p:transition spd="slow">
         <p:fade/>
       </p:transition>
@@ -10796,6 +10855,202 @@
 </p:sld>
 </file>
 
+<file path=ppt/slides/slide7.xml><?xml version="1.0" encoding="utf-8"?>
+<p:sld xmlns:a="http://schemas.openxmlformats.org/drawingml/2006/main" xmlns:r="http://schemas.openxmlformats.org/officeDocument/2006/relationships" xmlns:p="http://schemas.openxmlformats.org/presentationml/2006/main">
+  <p:cSld>
+    <p:spTree>
+      <p:nvGrpSpPr>
+        <p:cNvPr id="1" name=""/>
+        <p:cNvGrpSpPr/>
+        <p:nvPr/>
+      </p:nvGrpSpPr>
+      <p:grpSpPr>
+        <a:xfrm>
+          <a:off x="0" y="0"/>
+          <a:ext cx="0" cy="0"/>
+          <a:chOff x="0" y="0"/>
+          <a:chExt cx="0" cy="0"/>
+        </a:xfrm>
+      </p:grpSpPr>
+      <p:sp>
+        <p:nvSpPr>
+          <p:cNvPr id="2" name="Cím 1">
+            <a:extLst>
+              <a:ext uri="{FF2B5EF4-FFF2-40B4-BE49-F238E27FC236}">
+                <a16:creationId xmlns:a16="http://schemas.microsoft.com/office/drawing/2014/main" id="{D442AD5E-87B5-4802-B27C-1B8D4363D7C7}"/>
+              </a:ext>
+            </a:extLst>
+          </p:cNvPr>
+          <p:cNvSpPr>
+            <a:spLocks noGrp="1"/>
+          </p:cNvSpPr>
+          <p:nvPr>
+            <p:ph type="title"/>
+          </p:nvPr>
+        </p:nvSpPr>
+        <p:spPr/>
+        <p:txBody>
+          <a:bodyPr/>
+          <a:lstStyle/>
+          <a:p>
+            <a:r>
+              <a:rPr lang="hu-HU" dirty="0"/>
+              <a:t>Köszönöm a figyelmet!</a:t>
+            </a:r>
+          </a:p>
+        </p:txBody>
+      </p:sp>
+    </p:spTree>
+    <p:extLst>
+      <p:ext uri="{BB962C8B-B14F-4D97-AF65-F5344CB8AC3E}">
+        <p14:creationId xmlns:p14="http://schemas.microsoft.com/office/powerpoint/2010/main" val="1213734605"/>
+      </p:ext>
+    </p:extLst>
+  </p:cSld>
+  <p:clrMapOvr>
+    <a:masterClrMapping/>
+  </p:clrMapOvr>
+  <p:transition spd="slow">
+    <p:push dir="u"/>
+  </p:transition>
+  <p:timing>
+    <p:tnLst>
+      <p:par>
+        <p:cTn id="1" dur="indefinite" restart="never" nodeType="tmRoot">
+          <p:childTnLst>
+            <p:seq concurrent="1" nextAc="seek">
+              <p:cTn id="2" dur="indefinite" nodeType="mainSeq">
+                <p:childTnLst>
+                  <p:par>
+                    <p:cTn id="3" fill="hold">
+                      <p:stCondLst>
+                        <p:cond delay="indefinite"/>
+                        <p:cond evt="onBegin" delay="0">
+                          <p:tn val="2"/>
+                        </p:cond>
+                      </p:stCondLst>
+                      <p:childTnLst>
+                        <p:par>
+                          <p:cTn id="4" fill="hold">
+                            <p:stCondLst>
+                              <p:cond delay="0"/>
+                            </p:stCondLst>
+                            <p:childTnLst>
+                              <p:par>
+                                <p:cTn id="5" presetID="42" presetClass="entr" presetSubtype="0" fill="hold" grpId="0" nodeType="afterEffect">
+                                  <p:stCondLst>
+                                    <p:cond delay="0"/>
+                                  </p:stCondLst>
+                                  <p:childTnLst>
+                                    <p:set>
+                                      <p:cBhvr>
+                                        <p:cTn id="6" dur="1" fill="hold">
+                                          <p:stCondLst>
+                                            <p:cond delay="0"/>
+                                          </p:stCondLst>
+                                        </p:cTn>
+                                        <p:tgtEl>
+                                          <p:spTgt spid="2"/>
+                                        </p:tgtEl>
+                                        <p:attrNameLst>
+                                          <p:attrName>style.visibility</p:attrName>
+                                        </p:attrNameLst>
+                                      </p:cBhvr>
+                                      <p:to>
+                                        <p:strVal val="visible"/>
+                                      </p:to>
+                                    </p:set>
+                                    <p:animEffect transition="in" filter="fade">
+                                      <p:cBhvr>
+                                        <p:cTn id="7" dur="1000"/>
+                                        <p:tgtEl>
+                                          <p:spTgt spid="2"/>
+                                        </p:tgtEl>
+                                      </p:cBhvr>
+                                    </p:animEffect>
+                                    <p:anim calcmode="lin" valueType="num">
+                                      <p:cBhvr>
+                                        <p:cTn id="8" dur="1000" fill="hold"/>
+                                        <p:tgtEl>
+                                          <p:spTgt spid="2"/>
+                                        </p:tgtEl>
+                                        <p:attrNameLst>
+                                          <p:attrName>ppt_x</p:attrName>
+                                        </p:attrNameLst>
+                                      </p:cBhvr>
+                                      <p:tavLst>
+                                        <p:tav tm="0">
+                                          <p:val>
+                                            <p:strVal val="#ppt_x"/>
+                                          </p:val>
+                                        </p:tav>
+                                        <p:tav tm="100000">
+                                          <p:val>
+                                            <p:strVal val="#ppt_x"/>
+                                          </p:val>
+                                        </p:tav>
+                                      </p:tavLst>
+                                    </p:anim>
+                                    <p:anim calcmode="lin" valueType="num">
+                                      <p:cBhvr>
+                                        <p:cTn id="9" dur="1000" fill="hold"/>
+                                        <p:tgtEl>
+                                          <p:spTgt spid="2"/>
+                                        </p:tgtEl>
+                                        <p:attrNameLst>
+                                          <p:attrName>ppt_y</p:attrName>
+                                        </p:attrNameLst>
+                                      </p:cBhvr>
+                                      <p:tavLst>
+                                        <p:tav tm="0">
+                                          <p:val>
+                                            <p:strVal val="#ppt_y+.1"/>
+                                          </p:val>
+                                        </p:tav>
+                                        <p:tav tm="100000">
+                                          <p:val>
+                                            <p:strVal val="#ppt_y"/>
+                                          </p:val>
+                                        </p:tav>
+                                      </p:tavLst>
+                                    </p:anim>
+                                  </p:childTnLst>
+                                </p:cTn>
+                              </p:par>
+                            </p:childTnLst>
+                          </p:cTn>
+                        </p:par>
+                      </p:childTnLst>
+                    </p:cTn>
+                  </p:par>
+                </p:childTnLst>
+              </p:cTn>
+              <p:prevCondLst>
+                <p:cond evt="onPrev" delay="0">
+                  <p:tgtEl>
+                    <p:sldTgt/>
+                  </p:tgtEl>
+                </p:cond>
+              </p:prevCondLst>
+              <p:nextCondLst>
+                <p:cond evt="onNext" delay="0">
+                  <p:tgtEl>
+                    <p:sldTgt/>
+                  </p:tgtEl>
+                </p:cond>
+              </p:nextCondLst>
+            </p:seq>
+          </p:childTnLst>
+        </p:cTn>
+      </p:par>
+    </p:tnLst>
+    <p:bldLst>
+      <p:bldP spid="2" grpId="0"/>
+    </p:bldLst>
+  </p:timing>
+</p:sld>
+</file>
+
 <file path=ppt/theme/theme1.xml><?xml version="1.0" encoding="utf-8"?>
 <a:theme xmlns:a="http://schemas.openxmlformats.org/drawingml/2006/main" name="Ion">
   <a:themeElements>

--- a/wifi 6.pptx
+++ b/wifi 6.pptx
@@ -2,7 +2,7 @@
 <file path=ppt/presentation.xml><?xml version="1.0" encoding="utf-8"?>
 <p:presentation xmlns:a="http://schemas.openxmlformats.org/drawingml/2006/main" xmlns:r="http://schemas.openxmlformats.org/officeDocument/2006/relationships" xmlns:p="http://schemas.openxmlformats.org/presentationml/2006/main" saveSubsetFonts="1">
   <p:sldMasterIdLst>
-    <p:sldMasterId id="2147483803" r:id="rId1"/>
+    <p:sldMasterId id="2147483941" r:id="rId1"/>
   </p:sldMasterIdLst>
   <p:sldIdLst>
     <p:sldId id="256" r:id="rId2"/>
@@ -147,15 +147,32 @@
         </p:nvSpPr>
         <p:spPr>
           <a:xfrm>
-            <a:off x="1154955" y="1447800"/>
-            <a:ext cx="8825658" cy="3329581"/>
+            <a:off x="1751012" y="609601"/>
+            <a:ext cx="8676222" cy="3200400"/>
           </a:xfrm>
         </p:spPr>
         <p:txBody>
-          <a:bodyPr anchor="b"/>
+          <a:bodyPr anchor="b">
+            <a:normAutofit/>
+          </a:bodyPr>
           <a:lstStyle>
-            <a:lvl1pPr>
-              <a:defRPr sz="7200"/>
+            <a:lvl1pPr algn="ctr">
+              <a:defRPr sz="4800">
+                <a:effectLst>
+                  <a:glow rad="38100">
+                    <a:schemeClr val="bg1">
+                      <a:lumMod val="65000"/>
+                      <a:lumOff val="35000"/>
+                      <a:alpha val="50000"/>
+                    </a:schemeClr>
+                  </a:glow>
+                  <a:outerShdw blurRad="28575" dist="31750" dir="13200000" algn="tl" rotWithShape="0">
+                    <a:srgbClr val="000000">
+                      <a:alpha val="25000"/>
+                    </a:srgbClr>
+                  </a:outerShdw>
+                </a:effectLst>
+              </a:defRPr>
             </a:lvl1pPr>
           </a:lstStyle>
           <a:p>
@@ -179,22 +196,32 @@
         </p:nvSpPr>
         <p:spPr>
           <a:xfrm>
-            <a:off x="1154955" y="4777380"/>
-            <a:ext cx="8825658" cy="861420"/>
+            <a:off x="1751012" y="3886200"/>
+            <a:ext cx="8676222" cy="1905000"/>
           </a:xfrm>
         </p:spPr>
         <p:txBody>
-          <a:bodyPr anchor="t"/>
+          <a:bodyPr anchor="t">
+            <a:normAutofit/>
+          </a:bodyPr>
           <a:lstStyle>
-            <a:lvl1pPr marL="0" indent="0" algn="l">
-              <a:buNone/>
-              <a:defRPr cap="all">
-                <a:solidFill>
-                  <a:schemeClr val="bg2">
-                    <a:lumMod val="40000"/>
-                    <a:lumOff val="60000"/>
-                  </a:schemeClr>
-                </a:solidFill>
+            <a:lvl1pPr marL="0" indent="0" algn="ctr">
+              <a:buNone/>
+              <a:defRPr sz="2100">
+                <a:gradFill flip="none" rotWithShape="1">
+                  <a:gsLst>
+                    <a:gs pos="0">
+                      <a:schemeClr val="tx1"/>
+                    </a:gs>
+                    <a:gs pos="100000">
+                      <a:schemeClr val="tx1">
+                        <a:lumMod val="75000"/>
+                      </a:schemeClr>
+                    </a:gs>
+                  </a:gsLst>
+                  <a:lin ang="5400000" scaled="0"/>
+                  <a:tileRect/>
+                </a:gradFill>
               </a:defRPr>
             </a:lvl1pPr>
             <a:lvl2pPr marL="457200" indent="0" algn="ctr">
@@ -304,7 +331,7 @@
           <a:p>
             <a:fld id="{57D76C4A-E1F9-49C1-BCE4-2E358991CE58}" type="datetimeFigureOut">
               <a:rPr lang="hu-HU" smtClean="0"/>
-              <a:t>2025. 11. 25.</a:t>
+              <a:t>2025. 12. 02.</a:t>
             </a:fld>
             <a:endParaRPr lang="hu-HU"/>
           </a:p>
@@ -355,7 +382,7 @@
     </p:spTree>
     <p:extLst>
       <p:ext uri="{BB962C8B-B14F-4D97-AF65-F5344CB8AC3E}">
-        <p14:creationId xmlns:p14="http://schemas.microsoft.com/office/powerpoint/2010/main" val="623005063"/>
+        <p14:creationId xmlns:p14="http://schemas.microsoft.com/office/powerpoint/2010/main" val="690702474"/>
       </p:ext>
     </p:extLst>
   </p:cSld>
@@ -394,8 +421,8 @@
         </p:nvSpPr>
         <p:spPr>
           <a:xfrm>
-            <a:off x="1154956" y="4800587"/>
-            <a:ext cx="8825657" cy="566738"/>
+            <a:off x="1141413" y="4732865"/>
+            <a:ext cx="9906000" cy="566738"/>
           </a:xfrm>
         </p:spPr>
         <p:txBody>
@@ -428,20 +455,36 @@
         </p:nvSpPr>
         <p:spPr>
           <a:xfrm>
-            <a:off x="1154955" y="685800"/>
-            <a:ext cx="8825658" cy="3640666"/>
+            <a:off x="1979612" y="932112"/>
+            <a:ext cx="8225944" cy="3164976"/>
           </a:xfrm>
           <a:prstGeom prst="roundRect">
             <a:avLst>
-              <a:gd name="adj" fmla="val 1858"/>
+              <a:gd name="adj" fmla="val 4380"/>
             </a:avLst>
           </a:prstGeom>
+          <a:ln w="38100">
+            <a:gradFill flip="none" rotWithShape="1">
+              <a:gsLst>
+                <a:gs pos="0">
+                  <a:schemeClr val="bg2"/>
+                </a:gs>
+                <a:gs pos="100000">
+                  <a:schemeClr val="bg2">
+                    <a:lumMod val="75000"/>
+                  </a:schemeClr>
+                </a:gs>
+              </a:gsLst>
+              <a:lin ang="5400000" scaled="0"/>
+              <a:tileRect/>
+            </a:gradFill>
+          </a:ln>
           <a:effectLst>
-            <a:outerShdw blurRad="50800" dist="50800" dir="5400000" algn="tl" rotWithShape="0">
+            <a:innerShdw blurRad="57150" dist="38100" dir="14460000">
               <a:srgbClr val="000000">
-                <a:alpha val="43000"/>
+                <a:alpha val="70000"/>
               </a:srgbClr>
-            </a:outerShdw>
+            </a:innerShdw>
           </a:effectLst>
         </p:spPr>
         <p:txBody>
@@ -507,8 +550,8 @@
         </p:nvSpPr>
         <p:spPr>
           <a:xfrm>
-            <a:off x="1154956" y="5367325"/>
-            <a:ext cx="8825656" cy="493712"/>
+            <a:off x="1141413" y="5299603"/>
+            <a:ext cx="9906000" cy="493712"/>
           </a:xfrm>
         </p:spPr>
         <p:txBody>
@@ -518,7 +561,7 @@
           <a:lstStyle>
             <a:lvl1pPr marL="0" indent="0">
               <a:buNone/>
-              <a:defRPr sz="1200"/>
+              <a:defRPr sz="1400"/>
             </a:lvl1pPr>
             <a:lvl2pPr marL="457200" indent="0">
               <a:buNone/>
@@ -579,7 +622,7 @@
           <a:p>
             <a:fld id="{57D76C4A-E1F9-49C1-BCE4-2E358991CE58}" type="datetimeFigureOut">
               <a:rPr lang="hu-HU" smtClean="0"/>
-              <a:t>2025. 11. 25.</a:t>
+              <a:t>2025. 12. 02.</a:t>
             </a:fld>
             <a:endParaRPr lang="hu-HU"/>
           </a:p>
@@ -630,7 +673,7 @@
     </p:spTree>
     <p:extLst>
       <p:ext uri="{BB962C8B-B14F-4D97-AF65-F5344CB8AC3E}">
-        <p14:creationId xmlns:p14="http://schemas.microsoft.com/office/powerpoint/2010/main" val="1112496127"/>
+        <p14:creationId xmlns:p14="http://schemas.microsoft.com/office/powerpoint/2010/main" val="888723307"/>
       </p:ext>
     </p:extLst>
   </p:cSld>
@@ -669,40 +712,8 @@
         </p:nvSpPr>
         <p:spPr>
           <a:xfrm>
-            <a:off x="1154954" y="1447800"/>
-            <a:ext cx="8825659" cy="1981200"/>
-          </a:xfrm>
-        </p:spPr>
-        <p:txBody>
-          <a:bodyPr/>
-          <a:lstStyle>
-            <a:lvl1pPr>
-              <a:defRPr sz="4800"/>
-            </a:lvl1pPr>
-          </a:lstStyle>
-          <a:p>
-            <a:r>
-              <a:rPr lang="hu-HU"/>
-              <a:t>Mintacím szerkesztése</a:t>
-            </a:r>
-            <a:endParaRPr lang="en-US" dirty="0"/>
-          </a:p>
-        </p:txBody>
-      </p:sp>
-      <p:sp>
-        <p:nvSpPr>
-          <p:cNvPr id="8" name="Text Placeholder 3"/>
-          <p:cNvSpPr>
-            <a:spLocks noGrp="1"/>
-          </p:cNvSpPr>
-          <p:nvPr>
-            <p:ph type="body" sz="half" idx="2"/>
-          </p:nvPr>
-        </p:nvSpPr>
-        <p:spPr>
-          <a:xfrm>
-            <a:off x="1154954" y="3657600"/>
-            <a:ext cx="8825659" cy="2362200"/>
+            <a:off x="1141412" y="609601"/>
+            <a:ext cx="9905999" cy="3124199"/>
           </a:xfrm>
         </p:spPr>
         <p:txBody>
@@ -710,41 +721,138 @@
             <a:normAutofit/>
           </a:bodyPr>
           <a:lstStyle>
-            <a:lvl1pPr marL="0" indent="0">
-              <a:buNone/>
-              <a:defRPr sz="1800"/>
+            <a:lvl1pPr algn="l">
+              <a:defRPr sz="3200" b="0" cap="all"/>
+            </a:lvl1pPr>
+          </a:lstStyle>
+          <a:p>
+            <a:r>
+              <a:rPr lang="hu-HU"/>
+              <a:t>Mintacím szerkesztése</a:t>
+            </a:r>
+            <a:endParaRPr lang="en-US" dirty="0"/>
+          </a:p>
+        </p:txBody>
+      </p:sp>
+      <p:sp>
+        <p:nvSpPr>
+          <p:cNvPr id="3" name="Text Placeholder 2"/>
+          <p:cNvSpPr>
+            <a:spLocks noGrp="1"/>
+          </p:cNvSpPr>
+          <p:nvPr>
+            <p:ph type="body" idx="1"/>
+          </p:nvPr>
+        </p:nvSpPr>
+        <p:spPr>
+          <a:xfrm>
+            <a:off x="1141411" y="4343400"/>
+            <a:ext cx="9906000" cy="1447800"/>
+          </a:xfrm>
+        </p:spPr>
+        <p:txBody>
+          <a:bodyPr anchor="ctr">
+            <a:normAutofit/>
+          </a:bodyPr>
+          <a:lstStyle>
+            <a:lvl1pPr marL="0" indent="0" algn="l">
+              <a:buNone/>
+              <a:defRPr sz="2000">
+                <a:gradFill flip="none" rotWithShape="1">
+                  <a:gsLst>
+                    <a:gs pos="0">
+                      <a:schemeClr val="tx1"/>
+                    </a:gs>
+                    <a:gs pos="100000">
+                      <a:schemeClr val="tx1">
+                        <a:lumMod val="75000"/>
+                      </a:schemeClr>
+                    </a:gs>
+                  </a:gsLst>
+                  <a:lin ang="5400000" scaled="0"/>
+                  <a:tileRect/>
+                </a:gradFill>
+              </a:defRPr>
             </a:lvl1pPr>
             <a:lvl2pPr marL="457200" indent="0">
               <a:buNone/>
-              <a:defRPr sz="1200"/>
+              <a:defRPr sz="1800">
+                <a:solidFill>
+                  <a:schemeClr val="tx1">
+                    <a:tint val="75000"/>
+                  </a:schemeClr>
+                </a:solidFill>
+              </a:defRPr>
             </a:lvl2pPr>
             <a:lvl3pPr marL="914400" indent="0">
               <a:buNone/>
-              <a:defRPr sz="1000"/>
+              <a:defRPr sz="1600">
+                <a:solidFill>
+                  <a:schemeClr val="tx1">
+                    <a:tint val="75000"/>
+                  </a:schemeClr>
+                </a:solidFill>
+              </a:defRPr>
             </a:lvl3pPr>
             <a:lvl4pPr marL="1371600" indent="0">
               <a:buNone/>
-              <a:defRPr sz="900"/>
+              <a:defRPr sz="1400">
+                <a:solidFill>
+                  <a:schemeClr val="tx1">
+                    <a:tint val="75000"/>
+                  </a:schemeClr>
+                </a:solidFill>
+              </a:defRPr>
             </a:lvl4pPr>
             <a:lvl5pPr marL="1828800" indent="0">
               <a:buNone/>
-              <a:defRPr sz="900"/>
+              <a:defRPr sz="1400">
+                <a:solidFill>
+                  <a:schemeClr val="tx1">
+                    <a:tint val="75000"/>
+                  </a:schemeClr>
+                </a:solidFill>
+              </a:defRPr>
             </a:lvl5pPr>
             <a:lvl6pPr marL="2286000" indent="0">
               <a:buNone/>
-              <a:defRPr sz="900"/>
+              <a:defRPr sz="1400">
+                <a:solidFill>
+                  <a:schemeClr val="tx1">
+                    <a:tint val="75000"/>
+                  </a:schemeClr>
+                </a:solidFill>
+              </a:defRPr>
             </a:lvl6pPr>
             <a:lvl7pPr marL="2743200" indent="0">
               <a:buNone/>
-              <a:defRPr sz="900"/>
+              <a:defRPr sz="1400">
+                <a:solidFill>
+                  <a:schemeClr val="tx1">
+                    <a:tint val="75000"/>
+                  </a:schemeClr>
+                </a:solidFill>
+              </a:defRPr>
             </a:lvl7pPr>
             <a:lvl8pPr marL="3200400" indent="0">
               <a:buNone/>
-              <a:defRPr sz="900"/>
+              <a:defRPr sz="1400">
+                <a:solidFill>
+                  <a:schemeClr val="tx1">
+                    <a:tint val="75000"/>
+                  </a:schemeClr>
+                </a:solidFill>
+              </a:defRPr>
             </a:lvl8pPr>
             <a:lvl9pPr marL="3657600" indent="0">
               <a:buNone/>
-              <a:defRPr sz="900"/>
+              <a:defRPr sz="1400">
+                <a:solidFill>
+                  <a:schemeClr val="tx1">
+                    <a:tint val="75000"/>
+                  </a:schemeClr>
+                </a:solidFill>
+              </a:defRPr>
             </a:lvl9pPr>
           </a:lstStyle>
           <a:p>
@@ -773,7 +881,7 @@
           <a:p>
             <a:fld id="{57D76C4A-E1F9-49C1-BCE4-2E358991CE58}" type="datetimeFigureOut">
               <a:rPr lang="hu-HU" smtClean="0"/>
-              <a:t>2025. 11. 25.</a:t>
+              <a:t>2025. 12. 02.</a:t>
             </a:fld>
             <a:endParaRPr lang="hu-HU"/>
           </a:p>
@@ -824,7 +932,7 @@
     </p:spTree>
     <p:extLst>
       <p:ext uri="{BB962C8B-B14F-4D97-AF65-F5344CB8AC3E}">
-        <p14:creationId xmlns:p14="http://schemas.microsoft.com/office/powerpoint/2010/main" val="756207382"/>
+        <p14:creationId xmlns:p14="http://schemas.microsoft.com/office/powerpoint/2010/main" val="4046966315"/>
       </p:ext>
     </p:extLst>
   </p:cSld>
@@ -853,129 +961,248 @@
       </p:grpSpPr>
       <p:sp>
         <p:nvSpPr>
-          <p:cNvPr id="2" name="Title 1"/>
-          <p:cNvSpPr>
-            <a:spLocks noGrp="1"/>
-          </p:cNvSpPr>
-          <p:nvPr>
-            <p:ph type="title"/>
-          </p:nvPr>
+          <p:cNvPr id="14" name="TextBox 13"/>
+          <p:cNvSpPr txBox="1"/>
+          <p:nvPr/>
         </p:nvSpPr>
         <p:spPr>
           <a:xfrm>
-            <a:off x="1574801" y="1447800"/>
-            <a:ext cx="7999315" cy="2323374"/>
+            <a:off x="836612" y="786824"/>
+            <a:ext cx="609600" cy="584776"/>
           </a:xfrm>
+          <a:prstGeom prst="rect">
+            <a:avLst/>
+          </a:prstGeom>
         </p:spPr>
         <p:txBody>
-          <a:bodyPr/>
+          <a:bodyPr vert="horz" lIns="91440" tIns="45720" rIns="91440" bIns="45720" rtlCol="0" anchor="ctr">
+            <a:noAutofit/>
+          </a:bodyPr>
           <a:lstStyle>
             <a:lvl1pPr>
-              <a:defRPr sz="4800"/>
+              <a:spcBef>
+                <a:spcPct val="0"/>
+              </a:spcBef>
+              <a:buNone/>
+              <a:defRPr sz="3200" b="0" cap="all">
+                <a:ln w="3175" cmpd="sng">
+                  <a:noFill/>
+                </a:ln>
+                <a:effectLst>
+                  <a:glow rad="38100">
+                    <a:schemeClr val="bg1">
+                      <a:lumMod val="65000"/>
+                      <a:lumOff val="35000"/>
+                      <a:alpha val="40000"/>
+                    </a:schemeClr>
+                  </a:glow>
+                  <a:outerShdw blurRad="28575" dist="38100" dir="14040000" algn="tl" rotWithShape="0">
+                    <a:srgbClr val="000000">
+                      <a:alpha val="25000"/>
+                    </a:srgbClr>
+                  </a:outerShdw>
+                </a:effectLst>
+              </a:defRPr>
             </a:lvl1pPr>
+            <a:lvl2pPr>
+              <a:defRPr>
+                <a:solidFill>
+                  <a:schemeClr val="tx2"/>
+                </a:solidFill>
+              </a:defRPr>
+            </a:lvl2pPr>
+            <a:lvl3pPr>
+              <a:defRPr>
+                <a:solidFill>
+                  <a:schemeClr val="tx2"/>
+                </a:solidFill>
+              </a:defRPr>
+            </a:lvl3pPr>
+            <a:lvl4pPr>
+              <a:defRPr>
+                <a:solidFill>
+                  <a:schemeClr val="tx2"/>
+                </a:solidFill>
+              </a:defRPr>
+            </a:lvl4pPr>
+            <a:lvl5pPr>
+              <a:defRPr>
+                <a:solidFill>
+                  <a:schemeClr val="tx2"/>
+                </a:solidFill>
+              </a:defRPr>
+            </a:lvl5pPr>
+            <a:lvl6pPr>
+              <a:defRPr>
+                <a:solidFill>
+                  <a:schemeClr val="tx2"/>
+                </a:solidFill>
+              </a:defRPr>
+            </a:lvl6pPr>
+            <a:lvl7pPr>
+              <a:defRPr>
+                <a:solidFill>
+                  <a:schemeClr val="tx2"/>
+                </a:solidFill>
+              </a:defRPr>
+            </a:lvl7pPr>
+            <a:lvl8pPr>
+              <a:defRPr>
+                <a:solidFill>
+                  <a:schemeClr val="tx2"/>
+                </a:solidFill>
+              </a:defRPr>
+            </a:lvl8pPr>
+            <a:lvl9pPr>
+              <a:defRPr>
+                <a:solidFill>
+                  <a:schemeClr val="tx2"/>
+                </a:solidFill>
+              </a:defRPr>
+            </a:lvl9pPr>
           </a:lstStyle>
           <a:p>
-            <a:r>
-              <a:rPr lang="hu-HU"/>
-              <a:t>Mintacím szerkesztése</a:t>
-            </a:r>
-            <a:endParaRPr lang="en-US" dirty="0"/>
-          </a:p>
-        </p:txBody>
-      </p:sp>
-      <p:sp>
-        <p:nvSpPr>
-          <p:cNvPr id="11" name="Text Placeholder 3"/>
-          <p:cNvSpPr>
-            <a:spLocks noGrp="1"/>
-          </p:cNvSpPr>
-          <p:nvPr>
-            <p:ph type="body" sz="half" idx="14"/>
-          </p:nvPr>
+            <a:pPr lvl="0"/>
+            <a:r>
+              <a:rPr lang="en-US" sz="8000" dirty="0">
+                <a:solidFill>
+                  <a:schemeClr val="accent1"/>
+                </a:solidFill>
+              </a:rPr>
+              <a:t>“</a:t>
+            </a:r>
+          </a:p>
+        </p:txBody>
+      </p:sp>
+      <p:sp>
+        <p:nvSpPr>
+          <p:cNvPr id="15" name="TextBox 14"/>
+          <p:cNvSpPr txBox="1"/>
+          <p:nvPr/>
         </p:nvSpPr>
         <p:spPr>
           <a:xfrm>
-            <a:off x="1930400" y="3771174"/>
-            <a:ext cx="7279649" cy="342174"/>
+            <a:off x="10437812" y="2743200"/>
+            <a:ext cx="609600" cy="584776"/>
           </a:xfrm>
+          <a:prstGeom prst="rect">
+            <a:avLst/>
+          </a:prstGeom>
         </p:spPr>
         <p:txBody>
-          <a:bodyPr vert="horz" lIns="91440" tIns="45720" rIns="91440" bIns="45720" rtlCol="0" anchor="t">
-            <a:normAutofit/>
+          <a:bodyPr vert="horz" lIns="91440" tIns="45720" rIns="91440" bIns="45720" rtlCol="0" anchor="ctr">
+            <a:noAutofit/>
           </a:bodyPr>
           <a:lstStyle>
-            <a:lvl1pPr marL="0" indent="0">
-              <a:buNone/>
-              <a:defRPr lang="en-US" sz="1400" b="0" i="0" kern="1200" cap="small" dirty="0">
-                <a:solidFill>
-                  <a:schemeClr val="bg2">
-                    <a:lumMod val="40000"/>
-                    <a:lumOff val="60000"/>
-                  </a:schemeClr>
-                </a:solidFill>
-                <a:latin typeface="+mj-lt"/>
-                <a:ea typeface="+mj-ea"/>
-                <a:cs typeface="+mj-cs"/>
+            <a:lvl1pPr>
+              <a:spcBef>
+                <a:spcPct val="0"/>
+              </a:spcBef>
+              <a:buNone/>
+              <a:defRPr sz="3200" b="0" cap="all">
+                <a:ln w="3175" cmpd="sng">
+                  <a:noFill/>
+                </a:ln>
+                <a:effectLst>
+                  <a:glow rad="38100">
+                    <a:schemeClr val="bg1">
+                      <a:lumMod val="65000"/>
+                      <a:lumOff val="35000"/>
+                      <a:alpha val="40000"/>
+                    </a:schemeClr>
+                  </a:glow>
+                  <a:outerShdw blurRad="28575" dist="38100" dir="14040000" algn="tl" rotWithShape="0">
+                    <a:srgbClr val="000000">
+                      <a:alpha val="25000"/>
+                    </a:srgbClr>
+                  </a:outerShdw>
+                </a:effectLst>
               </a:defRPr>
             </a:lvl1pPr>
-            <a:lvl2pPr marL="457200" indent="0">
-              <a:buNone/>
-              <a:defRPr sz="1200"/>
+            <a:lvl2pPr>
+              <a:defRPr>
+                <a:solidFill>
+                  <a:schemeClr val="tx2"/>
+                </a:solidFill>
+              </a:defRPr>
             </a:lvl2pPr>
-            <a:lvl3pPr marL="914400" indent="0">
-              <a:buNone/>
-              <a:defRPr sz="1000"/>
+            <a:lvl3pPr>
+              <a:defRPr>
+                <a:solidFill>
+                  <a:schemeClr val="tx2"/>
+                </a:solidFill>
+              </a:defRPr>
             </a:lvl3pPr>
-            <a:lvl4pPr marL="1371600" indent="0">
-              <a:buNone/>
-              <a:defRPr sz="900"/>
+            <a:lvl4pPr>
+              <a:defRPr>
+                <a:solidFill>
+                  <a:schemeClr val="tx2"/>
+                </a:solidFill>
+              </a:defRPr>
             </a:lvl4pPr>
-            <a:lvl5pPr marL="1828800" indent="0">
-              <a:buNone/>
-              <a:defRPr sz="900"/>
+            <a:lvl5pPr>
+              <a:defRPr>
+                <a:solidFill>
+                  <a:schemeClr val="tx2"/>
+                </a:solidFill>
+              </a:defRPr>
             </a:lvl5pPr>
-            <a:lvl6pPr marL="2286000" indent="0">
-              <a:buNone/>
-              <a:defRPr sz="900"/>
+            <a:lvl6pPr>
+              <a:defRPr>
+                <a:solidFill>
+                  <a:schemeClr val="tx2"/>
+                </a:solidFill>
+              </a:defRPr>
             </a:lvl6pPr>
-            <a:lvl7pPr marL="2743200" indent="0">
-              <a:buNone/>
-              <a:defRPr sz="900"/>
+            <a:lvl7pPr>
+              <a:defRPr>
+                <a:solidFill>
+                  <a:schemeClr val="tx2"/>
+                </a:solidFill>
+              </a:defRPr>
             </a:lvl7pPr>
-            <a:lvl8pPr marL="3200400" indent="0">
-              <a:buNone/>
-              <a:defRPr sz="900"/>
+            <a:lvl8pPr>
+              <a:defRPr>
+                <a:solidFill>
+                  <a:schemeClr val="tx2"/>
+                </a:solidFill>
+              </a:defRPr>
             </a:lvl8pPr>
-            <a:lvl9pPr marL="3657600" indent="0">
-              <a:buNone/>
-              <a:defRPr sz="900"/>
+            <a:lvl9pPr>
+              <a:defRPr>
+                <a:solidFill>
+                  <a:schemeClr val="tx2"/>
+                </a:solidFill>
+              </a:defRPr>
             </a:lvl9pPr>
           </a:lstStyle>
           <a:p>
-            <a:pPr marL="0" lvl="0" indent="0">
-              <a:buNone/>
-            </a:pPr>
-            <a:r>
-              <a:rPr lang="hu-HU"/>
-              <a:t>Mintaszöveg szerkesztése</a:t>
-            </a:r>
-          </a:p>
-        </p:txBody>
-      </p:sp>
-      <p:sp>
-        <p:nvSpPr>
-          <p:cNvPr id="10" name="Text Placeholder 3"/>
-          <p:cNvSpPr>
-            <a:spLocks noGrp="1"/>
-          </p:cNvSpPr>
-          <p:nvPr>
-            <p:ph type="body" sz="half" idx="2"/>
+            <a:pPr lvl="0" algn="r"/>
+            <a:r>
+              <a:rPr lang="en-US" sz="8000" dirty="0">
+                <a:solidFill>
+                  <a:schemeClr val="accent1"/>
+                </a:solidFill>
+              </a:rPr>
+              <a:t>”</a:t>
+            </a:r>
+          </a:p>
+        </p:txBody>
+      </p:sp>
+      <p:sp>
+        <p:nvSpPr>
+          <p:cNvPr id="2" name="Title 1"/>
+          <p:cNvSpPr>
+            <a:spLocks noGrp="1"/>
+          </p:cNvSpPr>
+          <p:nvPr>
+            <p:ph type="title"/>
           </p:nvPr>
         </p:nvSpPr>
         <p:spPr>
           <a:xfrm>
-            <a:off x="1154954" y="4350657"/>
-            <a:ext cx="8825659" cy="1676400"/>
+            <a:off x="1446213" y="609601"/>
+            <a:ext cx="9296398" cy="2743199"/>
           </a:xfrm>
         </p:spPr>
         <p:txBody>
@@ -983,42 +1210,67 @@
             <a:normAutofit/>
           </a:bodyPr>
           <a:lstStyle>
+            <a:lvl1pPr algn="l">
+              <a:defRPr sz="3200" b="0" cap="all">
+                <a:solidFill>
+                  <a:schemeClr val="tx1"/>
+                </a:solidFill>
+              </a:defRPr>
+            </a:lvl1pPr>
+          </a:lstStyle>
+          <a:p>
+            <a:r>
+              <a:rPr lang="hu-HU"/>
+              <a:t>Mintacím szerkesztése</a:t>
+            </a:r>
+            <a:endParaRPr lang="en-US" dirty="0"/>
+          </a:p>
+        </p:txBody>
+      </p:sp>
+      <p:sp>
+        <p:nvSpPr>
+          <p:cNvPr id="10" name="Text Placeholder 9"/>
+          <p:cNvSpPr>
+            <a:spLocks noGrp="1"/>
+          </p:cNvSpPr>
+          <p:nvPr>
+            <p:ph type="body" sz="quarter" idx="13"/>
+          </p:nvPr>
+        </p:nvSpPr>
+        <p:spPr>
+          <a:xfrm>
+            <a:off x="1674812" y="3352800"/>
+            <a:ext cx="8839202" cy="381000"/>
+          </a:xfrm>
+        </p:spPr>
+        <p:txBody>
+          <a:bodyPr anchor="ctr"/>
+          <a:lstStyle>
             <a:lvl1pPr marL="0" indent="0">
-              <a:buNone/>
-              <a:defRPr sz="1800"/>
+              <a:buFontTx/>
+              <a:buNone/>
+              <a:defRPr/>
             </a:lvl1pPr>
             <a:lvl2pPr marL="457200" indent="0">
-              <a:buNone/>
-              <a:defRPr sz="1200"/>
+              <a:buFontTx/>
+              <a:buNone/>
+              <a:defRPr/>
             </a:lvl2pPr>
             <a:lvl3pPr marL="914400" indent="0">
-              <a:buNone/>
-              <a:defRPr sz="1000"/>
+              <a:buFontTx/>
+              <a:buNone/>
+              <a:defRPr/>
             </a:lvl3pPr>
             <a:lvl4pPr marL="1371600" indent="0">
-              <a:buNone/>
-              <a:defRPr sz="900"/>
+              <a:buFontTx/>
+              <a:buNone/>
+              <a:defRPr/>
             </a:lvl4pPr>
             <a:lvl5pPr marL="1828800" indent="0">
-              <a:buNone/>
-              <a:defRPr sz="900"/>
+              <a:buFontTx/>
+              <a:buNone/>
+              <a:defRPr/>
             </a:lvl5pPr>
-            <a:lvl6pPr marL="2286000" indent="0">
-              <a:buNone/>
-              <a:defRPr sz="900"/>
-            </a:lvl6pPr>
-            <a:lvl7pPr marL="2743200" indent="0">
-              <a:buNone/>
-              <a:defRPr sz="900"/>
-            </a:lvl7pPr>
-            <a:lvl8pPr marL="3200400" indent="0">
-              <a:buNone/>
-              <a:defRPr sz="900"/>
-            </a:lvl8pPr>
-            <a:lvl9pPr marL="3657600" indent="0">
-              <a:buNone/>
-              <a:defRPr sz="900"/>
-            </a:lvl9pPr>
           </a:lstStyle>
           <a:p>
             <a:pPr lvl="0"/>
@@ -1031,6 +1283,58 @@
       </p:sp>
       <p:sp>
         <p:nvSpPr>
+          <p:cNvPr id="3" name="Text Placeholder 2"/>
+          <p:cNvSpPr>
+            <a:spLocks noGrp="1"/>
+          </p:cNvSpPr>
+          <p:nvPr>
+            <p:ph type="body" idx="1"/>
+          </p:nvPr>
+        </p:nvSpPr>
+        <p:spPr>
+          <a:xfrm>
+            <a:off x="1141411" y="4343400"/>
+            <a:ext cx="9906000" cy="1447800"/>
+          </a:xfrm>
+        </p:spPr>
+        <p:txBody>
+          <a:bodyPr vert="horz" lIns="91440" tIns="45720" rIns="91440" bIns="45720" rtlCol="0" anchor="ctr">
+            <a:normAutofit/>
+          </a:bodyPr>
+          <a:lstStyle>
+            <a:lvl1pPr>
+              <a:buNone/>
+              <a:defRPr lang="en-US" sz="2000">
+                <a:gradFill flip="none" rotWithShape="1">
+                  <a:gsLst>
+                    <a:gs pos="0">
+                      <a:schemeClr val="tx1"/>
+                    </a:gs>
+                    <a:gs pos="100000">
+                      <a:schemeClr val="tx1">
+                        <a:lumMod val="75000"/>
+                      </a:schemeClr>
+                    </a:gs>
+                  </a:gsLst>
+                  <a:lin ang="5400000" scaled="0"/>
+                  <a:tileRect/>
+                </a:gradFill>
+              </a:defRPr>
+            </a:lvl1pPr>
+          </a:lstStyle>
+          <a:p>
+            <a:pPr marL="0" lvl="0" indent="0">
+              <a:buNone/>
+            </a:pPr>
+            <a:r>
+              <a:rPr lang="hu-HU"/>
+              <a:t>Mintaszöveg szerkesztése</a:t>
+            </a:r>
+          </a:p>
+        </p:txBody>
+      </p:sp>
+      <p:sp>
+        <p:nvSpPr>
           <p:cNvPr id="4" name="Date Placeholder 3"/>
           <p:cNvSpPr>
             <a:spLocks noGrp="1"/>
@@ -1046,7 +1350,7 @@
           <a:p>
             <a:fld id="{57D76C4A-E1F9-49C1-BCE4-2E358991CE58}" type="datetimeFigureOut">
               <a:rPr lang="hu-HU" smtClean="0"/>
-              <a:t>2025. 11. 25.</a:t>
+              <a:t>2025. 12. 02.</a:t>
             </a:fld>
             <a:endParaRPr lang="hu-HU"/>
           </a:p>
@@ -1094,104 +1398,10 @@
           </a:p>
         </p:txBody>
       </p:sp>
-      <p:sp>
-        <p:nvSpPr>
-          <p:cNvPr id="12" name="TextBox 11"/>
-          <p:cNvSpPr txBox="1"/>
-          <p:nvPr/>
-        </p:nvSpPr>
-        <p:spPr>
-          <a:xfrm>
-            <a:off x="898295" y="971253"/>
-            <a:ext cx="801912" cy="1969770"/>
-          </a:xfrm>
-          <a:prstGeom prst="rect">
-            <a:avLst/>
-          </a:prstGeom>
-          <a:noFill/>
-        </p:spPr>
-        <p:txBody>
-          <a:bodyPr wrap="square" rtlCol="0">
-            <a:spAutoFit/>
-          </a:bodyPr>
-          <a:lstStyle>
-            <a:defPPr>
-              <a:defRPr lang="en-US"/>
-            </a:defPPr>
-            <a:lvl1pPr algn="r">
-              <a:defRPr sz="12200" b="0" i="0">
-                <a:solidFill>
-                  <a:schemeClr val="bg2">
-                    <a:lumMod val="40000"/>
-                    <a:lumOff val="60000"/>
-                  </a:schemeClr>
-                </a:solidFill>
-                <a:latin typeface="Arial"/>
-                <a:ea typeface="+mj-ea"/>
-                <a:cs typeface="+mj-cs"/>
-              </a:defRPr>
-            </a:lvl1pPr>
-          </a:lstStyle>
-          <a:p>
-            <a:pPr lvl="0"/>
-            <a:r>
-              <a:rPr lang="en-US" dirty="0"/>
-              <a:t>“</a:t>
-            </a:r>
-          </a:p>
-        </p:txBody>
-      </p:sp>
-      <p:sp>
-        <p:nvSpPr>
-          <p:cNvPr id="15" name="TextBox 14"/>
-          <p:cNvSpPr txBox="1"/>
-          <p:nvPr/>
-        </p:nvSpPr>
-        <p:spPr>
-          <a:xfrm>
-            <a:off x="9330490" y="2613787"/>
-            <a:ext cx="801912" cy="1969770"/>
-          </a:xfrm>
-          <a:prstGeom prst="rect">
-            <a:avLst/>
-          </a:prstGeom>
-          <a:noFill/>
-        </p:spPr>
-        <p:txBody>
-          <a:bodyPr wrap="square" rtlCol="0">
-            <a:spAutoFit/>
-          </a:bodyPr>
-          <a:lstStyle>
-            <a:defPPr>
-              <a:defRPr lang="en-US"/>
-            </a:defPPr>
-            <a:lvl1pPr algn="r">
-              <a:defRPr sz="12200" b="0" i="0">
-                <a:solidFill>
-                  <a:schemeClr val="bg2">
-                    <a:lumMod val="40000"/>
-                    <a:lumOff val="60000"/>
-                  </a:schemeClr>
-                </a:solidFill>
-                <a:latin typeface="Arial"/>
-                <a:ea typeface="+mj-ea"/>
-                <a:cs typeface="+mj-cs"/>
-              </a:defRPr>
-            </a:lvl1pPr>
-          </a:lstStyle>
-          <a:p>
-            <a:pPr lvl="0"/>
-            <a:r>
-              <a:rPr lang="en-US" dirty="0"/>
-              <a:t>”</a:t>
-            </a:r>
-          </a:p>
-        </p:txBody>
-      </p:sp>
     </p:spTree>
     <p:extLst>
       <p:ext uri="{BB962C8B-B14F-4D97-AF65-F5344CB8AC3E}">
-        <p14:creationId xmlns:p14="http://schemas.microsoft.com/office/powerpoint/2010/main" val="1685893"/>
+        <p14:creationId xmlns:p14="http://schemas.microsoft.com/office/powerpoint/2010/main" val="2648394766"/>
       </p:ext>
     </p:extLst>
   </p:cSld>
@@ -1230,15 +1440,17 @@
         </p:nvSpPr>
         <p:spPr>
           <a:xfrm>
-            <a:off x="1154954" y="3124201"/>
-            <a:ext cx="8825660" cy="1653180"/>
+            <a:off x="1141412" y="3308581"/>
+            <a:ext cx="9906000" cy="1468800"/>
           </a:xfrm>
         </p:spPr>
         <p:txBody>
-          <a:bodyPr anchor="b"/>
+          <a:bodyPr anchor="b">
+            <a:normAutofit/>
+          </a:bodyPr>
           <a:lstStyle>
             <a:lvl1pPr algn="l">
-              <a:defRPr sz="4000" b="0" cap="none"/>
+              <a:defRPr sz="3200" b="0" cap="all"/>
             </a:lvl1pPr>
           </a:lstStyle>
           <a:p>
@@ -1262,107 +1474,38 @@
         </p:nvSpPr>
         <p:spPr>
           <a:xfrm>
-            <a:off x="1154954" y="4777381"/>
-            <a:ext cx="8825659" cy="860400"/>
+            <a:off x="1141410" y="4777381"/>
+            <a:ext cx="9906001" cy="860400"/>
           </a:xfrm>
         </p:spPr>
         <p:txBody>
-          <a:bodyPr anchor="t"/>
+          <a:bodyPr vert="horz" lIns="91440" tIns="45720" rIns="91440" bIns="45720" rtlCol="0" anchor="t">
+            <a:normAutofit/>
+          </a:bodyPr>
           <a:lstStyle>
-            <a:lvl1pPr marL="0" indent="0" algn="l">
-              <a:buNone/>
-              <a:defRPr sz="2000" cap="none">
-                <a:solidFill>
-                  <a:schemeClr val="bg2">
-                    <a:lumMod val="40000"/>
-                    <a:lumOff val="60000"/>
-                  </a:schemeClr>
-                </a:solidFill>
+            <a:lvl1pPr>
+              <a:defRPr lang="en-US" sz="2000">
+                <a:gradFill flip="none" rotWithShape="1">
+                  <a:gsLst>
+                    <a:gs pos="0">
+                      <a:schemeClr val="tx1"/>
+                    </a:gs>
+                    <a:gs pos="100000">
+                      <a:schemeClr val="tx1">
+                        <a:lumMod val="75000"/>
+                      </a:schemeClr>
+                    </a:gs>
+                  </a:gsLst>
+                  <a:lin ang="5400000" scaled="0"/>
+                  <a:tileRect/>
+                </a:gradFill>
               </a:defRPr>
             </a:lvl1pPr>
-            <a:lvl2pPr marL="457200" indent="0">
-              <a:buNone/>
-              <a:defRPr sz="1800">
-                <a:solidFill>
-                  <a:schemeClr val="tx1">
-                    <a:tint val="75000"/>
-                  </a:schemeClr>
-                </a:solidFill>
-              </a:defRPr>
-            </a:lvl2pPr>
-            <a:lvl3pPr marL="914400" indent="0">
-              <a:buNone/>
-              <a:defRPr sz="1600">
-                <a:solidFill>
-                  <a:schemeClr val="tx1">
-                    <a:tint val="75000"/>
-                  </a:schemeClr>
-                </a:solidFill>
-              </a:defRPr>
-            </a:lvl3pPr>
-            <a:lvl4pPr marL="1371600" indent="0">
-              <a:buNone/>
-              <a:defRPr sz="1400">
-                <a:solidFill>
-                  <a:schemeClr val="tx1">
-                    <a:tint val="75000"/>
-                  </a:schemeClr>
-                </a:solidFill>
-              </a:defRPr>
-            </a:lvl4pPr>
-            <a:lvl5pPr marL="1828800" indent="0">
-              <a:buNone/>
-              <a:defRPr sz="1400">
-                <a:solidFill>
-                  <a:schemeClr val="tx1">
-                    <a:tint val="75000"/>
-                  </a:schemeClr>
-                </a:solidFill>
-              </a:defRPr>
-            </a:lvl5pPr>
-            <a:lvl6pPr marL="2286000" indent="0">
-              <a:buNone/>
-              <a:defRPr sz="1400">
-                <a:solidFill>
-                  <a:schemeClr val="tx1">
-                    <a:tint val="75000"/>
-                  </a:schemeClr>
-                </a:solidFill>
-              </a:defRPr>
-            </a:lvl6pPr>
-            <a:lvl7pPr marL="2743200" indent="0">
-              <a:buNone/>
-              <a:defRPr sz="1400">
-                <a:solidFill>
-                  <a:schemeClr val="tx1">
-                    <a:tint val="75000"/>
-                  </a:schemeClr>
-                </a:solidFill>
-              </a:defRPr>
-            </a:lvl7pPr>
-            <a:lvl8pPr marL="3200400" indent="0">
-              <a:buNone/>
-              <a:defRPr sz="1400">
-                <a:solidFill>
-                  <a:schemeClr val="tx1">
-                    <a:tint val="75000"/>
-                  </a:schemeClr>
-                </a:solidFill>
-              </a:defRPr>
-            </a:lvl8pPr>
-            <a:lvl9pPr marL="3657600" indent="0">
-              <a:buNone/>
-              <a:defRPr sz="1400">
-                <a:solidFill>
-                  <a:schemeClr val="tx1">
-                    <a:tint val="75000"/>
-                  </a:schemeClr>
-                </a:solidFill>
-              </a:defRPr>
-            </a:lvl9pPr>
           </a:lstStyle>
           <a:p>
-            <a:pPr lvl="0"/>
+            <a:pPr marL="0" lvl="0" indent="0">
+              <a:buNone/>
+            </a:pPr>
             <a:r>
               <a:rPr lang="hu-HU"/>
               <a:t>Mintaszöveg szerkesztése</a:t>
@@ -1387,7 +1530,7 @@
           <a:p>
             <a:fld id="{57D76C4A-E1F9-49C1-BCE4-2E358991CE58}" type="datetimeFigureOut">
               <a:rPr lang="hu-HU" smtClean="0"/>
-              <a:t>2025. 11. 25.</a:t>
+              <a:t>2025. 12. 02.</a:t>
             </a:fld>
             <a:endParaRPr lang="hu-HU"/>
           </a:p>
@@ -1438,7 +1581,7 @@
     </p:spTree>
     <p:extLst>
       <p:ext uri="{BB962C8B-B14F-4D97-AF65-F5344CB8AC3E}">
-        <p14:creationId xmlns:p14="http://schemas.microsoft.com/office/powerpoint/2010/main" val="2499308153"/>
+        <p14:creationId xmlns:p14="http://schemas.microsoft.com/office/powerpoint/2010/main" val="1540086932"/>
       </p:ext>
     </p:extLst>
   </p:cSld>
@@ -1450,7 +1593,7 @@
 
 <file path=ppt/slideLayouts/slideLayout14.xml><?xml version="1.0" encoding="utf-8"?>
 <p:sldLayout xmlns:a="http://schemas.openxmlformats.org/drawingml/2006/main" xmlns:r="http://schemas.openxmlformats.org/officeDocument/2006/relationships" xmlns:p="http://schemas.openxmlformats.org/presentationml/2006/main" preserve="1">
-  <p:cSld name="3 hasáb">
+  <p:cSld name="Névkártya idézettel">
     <p:spTree>
       <p:nvGrpSpPr>
         <p:cNvPr id="1" name=""/>
@@ -1467,99 +1610,349 @@
       </p:grpSpPr>
       <p:sp>
         <p:nvSpPr>
-          <p:cNvPr id="2" name="Title 1"/>
-          <p:cNvSpPr>
-            <a:spLocks noGrp="1"/>
-          </p:cNvSpPr>
-          <p:nvPr>
-            <p:ph type="title"/>
-          </p:nvPr>
-        </p:nvSpPr>
-        <p:spPr/>
-        <p:txBody>
-          <a:bodyPr/>
-          <a:lstStyle>
-            <a:lvl1pPr>
-              <a:defRPr sz="4200"/>
-            </a:lvl1pPr>
-          </a:lstStyle>
-          <a:p>
-            <a:r>
-              <a:rPr lang="hu-HU"/>
-              <a:t>Mintacím szerkesztése</a:t>
-            </a:r>
-            <a:endParaRPr lang="en-US" dirty="0"/>
-          </a:p>
-        </p:txBody>
-      </p:sp>
-      <p:sp>
-        <p:nvSpPr>
-          <p:cNvPr id="3" name="Text Placeholder 2"/>
-          <p:cNvSpPr>
-            <a:spLocks noGrp="1"/>
-          </p:cNvSpPr>
-          <p:nvPr>
-            <p:ph type="body" idx="1"/>
-          </p:nvPr>
+          <p:cNvPr id="14" name="TextBox 13"/>
+          <p:cNvSpPr txBox="1"/>
+          <p:nvPr/>
         </p:nvSpPr>
         <p:spPr>
           <a:xfrm>
-            <a:off x="632947" y="1981200"/>
-            <a:ext cx="2946866" cy="576262"/>
+            <a:off x="836612" y="786824"/>
+            <a:ext cx="609600" cy="584776"/>
           </a:xfrm>
+          <a:prstGeom prst="rect">
+            <a:avLst/>
+          </a:prstGeom>
         </p:spPr>
         <p:txBody>
-          <a:bodyPr anchor="b">
+          <a:bodyPr vert="horz" lIns="91440" tIns="45720" rIns="91440" bIns="45720" rtlCol="0" anchor="ctr">
             <a:noAutofit/>
           </a:bodyPr>
           <a:lstStyle>
-            <a:lvl1pPr marL="0" indent="0">
-              <a:buNone/>
-              <a:defRPr sz="2400" b="0">
-                <a:solidFill>
-                  <a:schemeClr val="bg2">
-                    <a:lumMod val="40000"/>
-                    <a:lumOff val="60000"/>
-                  </a:schemeClr>
-                </a:solidFill>
+            <a:lvl1pPr>
+              <a:spcBef>
+                <a:spcPct val="0"/>
+              </a:spcBef>
+              <a:buNone/>
+              <a:defRPr sz="3200" b="0" cap="all">
+                <a:ln w="3175" cmpd="sng">
+                  <a:noFill/>
+                </a:ln>
+                <a:effectLst>
+                  <a:glow rad="38100">
+                    <a:schemeClr val="bg1">
+                      <a:lumMod val="65000"/>
+                      <a:lumOff val="35000"/>
+                      <a:alpha val="40000"/>
+                    </a:schemeClr>
+                  </a:glow>
+                  <a:outerShdw blurRad="28575" dist="38100" dir="14040000" algn="tl" rotWithShape="0">
+                    <a:srgbClr val="000000">
+                      <a:alpha val="25000"/>
+                    </a:srgbClr>
+                  </a:outerShdw>
+                </a:effectLst>
               </a:defRPr>
             </a:lvl1pPr>
-            <a:lvl2pPr marL="457200" indent="0">
-              <a:buNone/>
-              <a:defRPr sz="2000" b="1"/>
+            <a:lvl2pPr>
+              <a:defRPr>
+                <a:solidFill>
+                  <a:schemeClr val="tx2"/>
+                </a:solidFill>
+              </a:defRPr>
             </a:lvl2pPr>
-            <a:lvl3pPr marL="914400" indent="0">
-              <a:buNone/>
-              <a:defRPr sz="1800" b="1"/>
+            <a:lvl3pPr>
+              <a:defRPr>
+                <a:solidFill>
+                  <a:schemeClr val="tx2"/>
+                </a:solidFill>
+              </a:defRPr>
             </a:lvl3pPr>
-            <a:lvl4pPr marL="1371600" indent="0">
-              <a:buNone/>
-              <a:defRPr sz="1600" b="1"/>
+            <a:lvl4pPr>
+              <a:defRPr>
+                <a:solidFill>
+                  <a:schemeClr val="tx2"/>
+                </a:solidFill>
+              </a:defRPr>
             </a:lvl4pPr>
-            <a:lvl5pPr marL="1828800" indent="0">
-              <a:buNone/>
-              <a:defRPr sz="1600" b="1"/>
+            <a:lvl5pPr>
+              <a:defRPr>
+                <a:solidFill>
+                  <a:schemeClr val="tx2"/>
+                </a:solidFill>
+              </a:defRPr>
             </a:lvl5pPr>
-            <a:lvl6pPr marL="2286000" indent="0">
-              <a:buNone/>
-              <a:defRPr sz="1600" b="1"/>
+            <a:lvl6pPr>
+              <a:defRPr>
+                <a:solidFill>
+                  <a:schemeClr val="tx2"/>
+                </a:solidFill>
+              </a:defRPr>
             </a:lvl6pPr>
-            <a:lvl7pPr marL="2743200" indent="0">
-              <a:buNone/>
-              <a:defRPr sz="1600" b="1"/>
+            <a:lvl7pPr>
+              <a:defRPr>
+                <a:solidFill>
+                  <a:schemeClr val="tx2"/>
+                </a:solidFill>
+              </a:defRPr>
             </a:lvl7pPr>
-            <a:lvl8pPr marL="3200400" indent="0">
-              <a:buNone/>
-              <a:defRPr sz="1600" b="1"/>
+            <a:lvl8pPr>
+              <a:defRPr>
+                <a:solidFill>
+                  <a:schemeClr val="tx2"/>
+                </a:solidFill>
+              </a:defRPr>
             </a:lvl8pPr>
-            <a:lvl9pPr marL="3657600" indent="0">
-              <a:buNone/>
-              <a:defRPr sz="1600" b="1"/>
+            <a:lvl9pPr>
+              <a:defRPr>
+                <a:solidFill>
+                  <a:schemeClr val="tx2"/>
+                </a:solidFill>
+              </a:defRPr>
             </a:lvl9pPr>
           </a:lstStyle>
           <a:p>
             <a:pPr lvl="0"/>
             <a:r>
+              <a:rPr lang="en-US" sz="8000" dirty="0">
+                <a:solidFill>
+                  <a:schemeClr val="accent1"/>
+                </a:solidFill>
+              </a:rPr>
+              <a:t>“</a:t>
+            </a:r>
+          </a:p>
+        </p:txBody>
+      </p:sp>
+      <p:sp>
+        <p:nvSpPr>
+          <p:cNvPr id="15" name="TextBox 14"/>
+          <p:cNvSpPr txBox="1"/>
+          <p:nvPr/>
+        </p:nvSpPr>
+        <p:spPr>
+          <a:xfrm>
+            <a:off x="10437812" y="2743200"/>
+            <a:ext cx="609600" cy="584776"/>
+          </a:xfrm>
+          <a:prstGeom prst="rect">
+            <a:avLst/>
+          </a:prstGeom>
+        </p:spPr>
+        <p:txBody>
+          <a:bodyPr vert="horz" lIns="91440" tIns="45720" rIns="91440" bIns="45720" rtlCol="0" anchor="ctr">
+            <a:noAutofit/>
+          </a:bodyPr>
+          <a:lstStyle>
+            <a:lvl1pPr>
+              <a:spcBef>
+                <a:spcPct val="0"/>
+              </a:spcBef>
+              <a:buNone/>
+              <a:defRPr sz="3200" b="0" cap="all">
+                <a:ln w="3175" cmpd="sng">
+                  <a:noFill/>
+                </a:ln>
+                <a:effectLst>
+                  <a:glow rad="38100">
+                    <a:schemeClr val="bg1">
+                      <a:lumMod val="65000"/>
+                      <a:lumOff val="35000"/>
+                      <a:alpha val="40000"/>
+                    </a:schemeClr>
+                  </a:glow>
+                  <a:outerShdw blurRad="28575" dist="38100" dir="14040000" algn="tl" rotWithShape="0">
+                    <a:srgbClr val="000000">
+                      <a:alpha val="25000"/>
+                    </a:srgbClr>
+                  </a:outerShdw>
+                </a:effectLst>
+              </a:defRPr>
+            </a:lvl1pPr>
+            <a:lvl2pPr>
+              <a:defRPr>
+                <a:solidFill>
+                  <a:schemeClr val="tx2"/>
+                </a:solidFill>
+              </a:defRPr>
+            </a:lvl2pPr>
+            <a:lvl3pPr>
+              <a:defRPr>
+                <a:solidFill>
+                  <a:schemeClr val="tx2"/>
+                </a:solidFill>
+              </a:defRPr>
+            </a:lvl3pPr>
+            <a:lvl4pPr>
+              <a:defRPr>
+                <a:solidFill>
+                  <a:schemeClr val="tx2"/>
+                </a:solidFill>
+              </a:defRPr>
+            </a:lvl4pPr>
+            <a:lvl5pPr>
+              <a:defRPr>
+                <a:solidFill>
+                  <a:schemeClr val="tx2"/>
+                </a:solidFill>
+              </a:defRPr>
+            </a:lvl5pPr>
+            <a:lvl6pPr>
+              <a:defRPr>
+                <a:solidFill>
+                  <a:schemeClr val="tx2"/>
+                </a:solidFill>
+              </a:defRPr>
+            </a:lvl6pPr>
+            <a:lvl7pPr>
+              <a:defRPr>
+                <a:solidFill>
+                  <a:schemeClr val="tx2"/>
+                </a:solidFill>
+              </a:defRPr>
+            </a:lvl7pPr>
+            <a:lvl8pPr>
+              <a:defRPr>
+                <a:solidFill>
+                  <a:schemeClr val="tx2"/>
+                </a:solidFill>
+              </a:defRPr>
+            </a:lvl8pPr>
+            <a:lvl9pPr>
+              <a:defRPr>
+                <a:solidFill>
+                  <a:schemeClr val="tx2"/>
+                </a:solidFill>
+              </a:defRPr>
+            </a:lvl9pPr>
+          </a:lstStyle>
+          <a:p>
+            <a:pPr lvl="0" algn="r"/>
+            <a:r>
+              <a:rPr lang="en-US" sz="8000" dirty="0">
+                <a:solidFill>
+                  <a:schemeClr val="accent1"/>
+                </a:solidFill>
+              </a:rPr>
+              <a:t>”</a:t>
+            </a:r>
+          </a:p>
+        </p:txBody>
+      </p:sp>
+      <p:sp>
+        <p:nvSpPr>
+          <p:cNvPr id="2" name="Title 1"/>
+          <p:cNvSpPr>
+            <a:spLocks noGrp="1"/>
+          </p:cNvSpPr>
+          <p:nvPr>
+            <p:ph type="title"/>
+          </p:nvPr>
+        </p:nvSpPr>
+        <p:spPr>
+          <a:xfrm>
+            <a:off x="1446213" y="609601"/>
+            <a:ext cx="9296398" cy="2743199"/>
+          </a:xfrm>
+        </p:spPr>
+        <p:txBody>
+          <a:bodyPr anchor="ctr">
+            <a:normAutofit/>
+          </a:bodyPr>
+          <a:lstStyle>
+            <a:lvl1pPr algn="l">
+              <a:defRPr sz="3200" b="0" cap="all">
+                <a:gradFill flip="none" rotWithShape="1">
+                  <a:gsLst>
+                    <a:gs pos="0">
+                      <a:schemeClr val="tx1"/>
+                    </a:gs>
+                    <a:gs pos="100000">
+                      <a:schemeClr val="tx1">
+                        <a:lumMod val="75000"/>
+                      </a:schemeClr>
+                    </a:gs>
+                  </a:gsLst>
+                  <a:lin ang="5400000" scaled="0"/>
+                  <a:tileRect/>
+                </a:gradFill>
+              </a:defRPr>
+            </a:lvl1pPr>
+          </a:lstStyle>
+          <a:p>
+            <a:r>
+              <a:rPr lang="hu-HU"/>
+              <a:t>Mintacím szerkesztése</a:t>
+            </a:r>
+            <a:endParaRPr lang="en-US" dirty="0"/>
+          </a:p>
+        </p:txBody>
+      </p:sp>
+      <p:sp>
+        <p:nvSpPr>
+          <p:cNvPr id="10" name="Text Placeholder 9"/>
+          <p:cNvSpPr>
+            <a:spLocks noGrp="1"/>
+          </p:cNvSpPr>
+          <p:nvPr>
+            <p:ph type="body" sz="quarter" idx="13"/>
+          </p:nvPr>
+        </p:nvSpPr>
+        <p:spPr>
+          <a:xfrm>
+            <a:off x="1141412" y="3886200"/>
+            <a:ext cx="9906000" cy="889000"/>
+          </a:xfrm>
+        </p:spPr>
+        <p:txBody>
+          <a:bodyPr vert="horz" lIns="91440" tIns="45720" rIns="91440" bIns="45720" rtlCol="0" anchor="b">
+            <a:normAutofit/>
+          </a:bodyPr>
+          <a:lstStyle>
+            <a:lvl1pPr>
+              <a:buNone/>
+              <a:defRPr lang="en-US" sz="2400" b="0" cap="all" dirty="0">
+                <a:ln w="3175" cmpd="sng">
+                  <a:noFill/>
+                </a:ln>
+                <a:gradFill flip="none" rotWithShape="1">
+                  <a:gsLst>
+                    <a:gs pos="0">
+                      <a:schemeClr val="tx1"/>
+                    </a:gs>
+                    <a:gs pos="100000">
+                      <a:schemeClr val="tx1">
+                        <a:lumMod val="75000"/>
+                      </a:schemeClr>
+                    </a:gs>
+                  </a:gsLst>
+                  <a:lin ang="5400000" scaled="0"/>
+                  <a:tileRect/>
+                </a:gradFill>
+                <a:effectLst>
+                  <a:glow rad="38100">
+                    <a:schemeClr val="bg1">
+                      <a:lumMod val="65000"/>
+                      <a:lumOff val="35000"/>
+                      <a:alpha val="40000"/>
+                    </a:schemeClr>
+                  </a:glow>
+                  <a:outerShdw blurRad="28575" dist="38100" dir="14040000" algn="tl" rotWithShape="0">
+                    <a:srgbClr val="000000">
+                      <a:alpha val="25000"/>
+                    </a:srgbClr>
+                  </a:outerShdw>
+                </a:effectLst>
+              </a:defRPr>
+            </a:lvl1pPr>
+          </a:lstStyle>
+          <a:p>
+            <a:pPr marL="0" lvl="0">
+              <a:spcBef>
+                <a:spcPct val="0"/>
+              </a:spcBef>
+              <a:buNone/>
+            </a:pPr>
+            <a:r>
               <a:rPr lang="hu-HU"/>
               <a:t>Mintaszöveg szerkesztése</a:t>
             </a:r>
@@ -1568,18 +1961,18 @@
       </p:sp>
       <p:sp>
         <p:nvSpPr>
-          <p:cNvPr id="16" name="Text Placeholder 3"/>
-          <p:cNvSpPr>
-            <a:spLocks noGrp="1"/>
-          </p:cNvSpPr>
-          <p:nvPr>
-            <p:ph type="body" sz="half" idx="15"/>
+          <p:cNvPr id="3" name="Text Placeholder 2"/>
+          <p:cNvSpPr>
+            <a:spLocks noGrp="1"/>
+          </p:cNvSpPr>
+          <p:nvPr>
+            <p:ph type="body" idx="1"/>
           </p:nvPr>
         </p:nvSpPr>
         <p:spPr>
           <a:xfrm>
-            <a:off x="652463" y="2667000"/>
-            <a:ext cx="2927350" cy="3589338"/>
+            <a:off x="1141411" y="4775200"/>
+            <a:ext cx="9906000" cy="1016000"/>
           </a:xfrm>
         </p:spPr>
         <p:txBody>
@@ -1587,115 +1980,104 @@
             <a:normAutofit/>
           </a:bodyPr>
           <a:lstStyle>
-            <a:lvl1pPr marL="0" indent="0">
-              <a:buNone/>
-              <a:defRPr sz="1400"/>
-            </a:lvl1pPr>
-            <a:lvl2pPr marL="457200" indent="0">
-              <a:buNone/>
-              <a:defRPr sz="1200"/>
-            </a:lvl2pPr>
-            <a:lvl3pPr marL="914400" indent="0">
-              <a:buNone/>
-              <a:defRPr sz="1000"/>
-            </a:lvl3pPr>
-            <a:lvl4pPr marL="1371600" indent="0">
-              <a:buNone/>
-              <a:defRPr sz="900"/>
-            </a:lvl4pPr>
-            <a:lvl5pPr marL="1828800" indent="0">
-              <a:buNone/>
-              <a:defRPr sz="900"/>
-            </a:lvl5pPr>
-            <a:lvl6pPr marL="2286000" indent="0">
-              <a:buNone/>
-              <a:defRPr sz="900"/>
-            </a:lvl6pPr>
-            <a:lvl7pPr marL="2743200" indent="0">
-              <a:buNone/>
-              <a:defRPr sz="900"/>
-            </a:lvl7pPr>
-            <a:lvl8pPr marL="3200400" indent="0">
-              <a:buNone/>
-              <a:defRPr sz="900"/>
-            </a:lvl8pPr>
-            <a:lvl9pPr marL="3657600" indent="0">
-              <a:buNone/>
-              <a:defRPr sz="900"/>
-            </a:lvl9pPr>
-          </a:lstStyle>
-          <a:p>
-            <a:pPr lvl="0"/>
-            <a:r>
-              <a:rPr lang="hu-HU"/>
-              <a:t>Mintaszöveg szerkesztése</a:t>
-            </a:r>
-          </a:p>
-        </p:txBody>
-      </p:sp>
-      <p:sp>
-        <p:nvSpPr>
-          <p:cNvPr id="5" name="Text Placeholder 4"/>
-          <p:cNvSpPr>
-            <a:spLocks noGrp="1"/>
-          </p:cNvSpPr>
-          <p:nvPr>
-            <p:ph type="body" sz="quarter" idx="3"/>
-          </p:nvPr>
-        </p:nvSpPr>
-        <p:spPr>
-          <a:xfrm>
-            <a:off x="3883659" y="1981200"/>
-            <a:ext cx="2936241" cy="576262"/>
-          </a:xfrm>
-        </p:spPr>
-        <p:txBody>
-          <a:bodyPr anchor="b">
-            <a:noAutofit/>
-          </a:bodyPr>
-          <a:lstStyle>
-            <a:lvl1pPr marL="0" indent="0">
-              <a:buNone/>
-              <a:defRPr sz="2400" b="0">
-                <a:solidFill>
-                  <a:schemeClr val="bg2">
-                    <a:lumMod val="40000"/>
-                    <a:lumOff val="60000"/>
-                  </a:schemeClr>
-                </a:solidFill>
+            <a:lvl1pPr marL="0" indent="0" algn="l">
+              <a:buNone/>
+              <a:defRPr sz="1800">
+                <a:gradFill flip="none" rotWithShape="1">
+                  <a:gsLst>
+                    <a:gs pos="0">
+                      <a:schemeClr val="tx1"/>
+                    </a:gs>
+                    <a:gs pos="100000">
+                      <a:schemeClr val="tx1">
+                        <a:lumMod val="75000"/>
+                      </a:schemeClr>
+                    </a:gs>
+                  </a:gsLst>
+                  <a:lin ang="5400000" scaled="0"/>
+                  <a:tileRect/>
+                </a:gradFill>
               </a:defRPr>
             </a:lvl1pPr>
             <a:lvl2pPr marL="457200" indent="0">
               <a:buNone/>
-              <a:defRPr sz="2000" b="1"/>
+              <a:defRPr sz="1800">
+                <a:solidFill>
+                  <a:schemeClr val="tx1">
+                    <a:tint val="75000"/>
+                  </a:schemeClr>
+                </a:solidFill>
+              </a:defRPr>
             </a:lvl2pPr>
             <a:lvl3pPr marL="914400" indent="0">
               <a:buNone/>
-              <a:defRPr sz="1800" b="1"/>
+              <a:defRPr sz="1600">
+                <a:solidFill>
+                  <a:schemeClr val="tx1">
+                    <a:tint val="75000"/>
+                  </a:schemeClr>
+                </a:solidFill>
+              </a:defRPr>
             </a:lvl3pPr>
             <a:lvl4pPr marL="1371600" indent="0">
               <a:buNone/>
-              <a:defRPr sz="1600" b="1"/>
+              <a:defRPr sz="1400">
+                <a:solidFill>
+                  <a:schemeClr val="tx1">
+                    <a:tint val="75000"/>
+                  </a:schemeClr>
+                </a:solidFill>
+              </a:defRPr>
             </a:lvl4pPr>
             <a:lvl5pPr marL="1828800" indent="0">
               <a:buNone/>
-              <a:defRPr sz="1600" b="1"/>
+              <a:defRPr sz="1400">
+                <a:solidFill>
+                  <a:schemeClr val="tx1">
+                    <a:tint val="75000"/>
+                  </a:schemeClr>
+                </a:solidFill>
+              </a:defRPr>
             </a:lvl5pPr>
             <a:lvl6pPr marL="2286000" indent="0">
               <a:buNone/>
-              <a:defRPr sz="1600" b="1"/>
+              <a:defRPr sz="1400">
+                <a:solidFill>
+                  <a:schemeClr val="tx1">
+                    <a:tint val="75000"/>
+                  </a:schemeClr>
+                </a:solidFill>
+              </a:defRPr>
             </a:lvl6pPr>
             <a:lvl7pPr marL="2743200" indent="0">
               <a:buNone/>
-              <a:defRPr sz="1600" b="1"/>
+              <a:defRPr sz="1400">
+                <a:solidFill>
+                  <a:schemeClr val="tx1">
+                    <a:tint val="75000"/>
+                  </a:schemeClr>
+                </a:solidFill>
+              </a:defRPr>
             </a:lvl7pPr>
             <a:lvl8pPr marL="3200400" indent="0">
               <a:buNone/>
-              <a:defRPr sz="1600" b="1"/>
+              <a:defRPr sz="1400">
+                <a:solidFill>
+                  <a:schemeClr val="tx1">
+                    <a:tint val="75000"/>
+                  </a:schemeClr>
+                </a:solidFill>
+              </a:defRPr>
             </a:lvl8pPr>
             <a:lvl9pPr marL="3657600" indent="0">
               <a:buNone/>
-              <a:defRPr sz="1600" b="1"/>
+              <a:defRPr sz="1400">
+                <a:solidFill>
+                  <a:schemeClr val="tx1">
+                    <a:tint val="75000"/>
+                  </a:schemeClr>
+                </a:solidFill>
+              </a:defRPr>
             </a:lvl9pPr>
           </a:lstStyle>
           <a:p>
@@ -1709,293 +2091,7 @@
       </p:sp>
       <p:sp>
         <p:nvSpPr>
-          <p:cNvPr id="19" name="Text Placeholder 3"/>
-          <p:cNvSpPr>
-            <a:spLocks noGrp="1"/>
-          </p:cNvSpPr>
-          <p:nvPr>
-            <p:ph type="body" sz="half" idx="16"/>
-          </p:nvPr>
-        </p:nvSpPr>
-        <p:spPr>
-          <a:xfrm>
-            <a:off x="3873106" y="2667000"/>
-            <a:ext cx="2946794" cy="3589338"/>
-          </a:xfrm>
-        </p:spPr>
-        <p:txBody>
-          <a:bodyPr anchor="t">
-            <a:normAutofit/>
-          </a:bodyPr>
-          <a:lstStyle>
-            <a:lvl1pPr marL="0" indent="0">
-              <a:buNone/>
-              <a:defRPr sz="1400"/>
-            </a:lvl1pPr>
-            <a:lvl2pPr marL="457200" indent="0">
-              <a:buNone/>
-              <a:defRPr sz="1200"/>
-            </a:lvl2pPr>
-            <a:lvl3pPr marL="914400" indent="0">
-              <a:buNone/>
-              <a:defRPr sz="1000"/>
-            </a:lvl3pPr>
-            <a:lvl4pPr marL="1371600" indent="0">
-              <a:buNone/>
-              <a:defRPr sz="900"/>
-            </a:lvl4pPr>
-            <a:lvl5pPr marL="1828800" indent="0">
-              <a:buNone/>
-              <a:defRPr sz="900"/>
-            </a:lvl5pPr>
-            <a:lvl6pPr marL="2286000" indent="0">
-              <a:buNone/>
-              <a:defRPr sz="900"/>
-            </a:lvl6pPr>
-            <a:lvl7pPr marL="2743200" indent="0">
-              <a:buNone/>
-              <a:defRPr sz="900"/>
-            </a:lvl7pPr>
-            <a:lvl8pPr marL="3200400" indent="0">
-              <a:buNone/>
-              <a:defRPr sz="900"/>
-            </a:lvl8pPr>
-            <a:lvl9pPr marL="3657600" indent="0">
-              <a:buNone/>
-              <a:defRPr sz="900"/>
-            </a:lvl9pPr>
-          </a:lstStyle>
-          <a:p>
-            <a:pPr lvl="0"/>
-            <a:r>
-              <a:rPr lang="hu-HU"/>
-              <a:t>Mintaszöveg szerkesztése</a:t>
-            </a:r>
-          </a:p>
-        </p:txBody>
-      </p:sp>
-      <p:sp>
-        <p:nvSpPr>
-          <p:cNvPr id="14" name="Text Placeholder 4"/>
-          <p:cNvSpPr>
-            <a:spLocks noGrp="1"/>
-          </p:cNvSpPr>
-          <p:nvPr>
-            <p:ph type="body" sz="quarter" idx="13"/>
-          </p:nvPr>
-        </p:nvSpPr>
-        <p:spPr>
-          <a:xfrm>
-            <a:off x="7124700" y="1981200"/>
-            <a:ext cx="2932113" cy="576262"/>
-          </a:xfrm>
-        </p:spPr>
-        <p:txBody>
-          <a:bodyPr anchor="b">
-            <a:noAutofit/>
-          </a:bodyPr>
-          <a:lstStyle>
-            <a:lvl1pPr marL="0" indent="0">
-              <a:buNone/>
-              <a:defRPr sz="2400" b="0">
-                <a:solidFill>
-                  <a:schemeClr val="bg2">
-                    <a:lumMod val="40000"/>
-                    <a:lumOff val="60000"/>
-                  </a:schemeClr>
-                </a:solidFill>
-              </a:defRPr>
-            </a:lvl1pPr>
-            <a:lvl2pPr marL="457200" indent="0">
-              <a:buNone/>
-              <a:defRPr sz="2000" b="1"/>
-            </a:lvl2pPr>
-            <a:lvl3pPr marL="914400" indent="0">
-              <a:buNone/>
-              <a:defRPr sz="1800" b="1"/>
-            </a:lvl3pPr>
-            <a:lvl4pPr marL="1371600" indent="0">
-              <a:buNone/>
-              <a:defRPr sz="1600" b="1"/>
-            </a:lvl4pPr>
-            <a:lvl5pPr marL="1828800" indent="0">
-              <a:buNone/>
-              <a:defRPr sz="1600" b="1"/>
-            </a:lvl5pPr>
-            <a:lvl6pPr marL="2286000" indent="0">
-              <a:buNone/>
-              <a:defRPr sz="1600" b="1"/>
-            </a:lvl6pPr>
-            <a:lvl7pPr marL="2743200" indent="0">
-              <a:buNone/>
-              <a:defRPr sz="1600" b="1"/>
-            </a:lvl7pPr>
-            <a:lvl8pPr marL="3200400" indent="0">
-              <a:buNone/>
-              <a:defRPr sz="1600" b="1"/>
-            </a:lvl8pPr>
-            <a:lvl9pPr marL="3657600" indent="0">
-              <a:buNone/>
-              <a:defRPr sz="1600" b="1"/>
-            </a:lvl9pPr>
-          </a:lstStyle>
-          <a:p>
-            <a:pPr lvl="0"/>
-            <a:r>
-              <a:rPr lang="hu-HU"/>
-              <a:t>Mintaszöveg szerkesztése</a:t>
-            </a:r>
-          </a:p>
-        </p:txBody>
-      </p:sp>
-      <p:sp>
-        <p:nvSpPr>
-          <p:cNvPr id="20" name="Text Placeholder 3"/>
-          <p:cNvSpPr>
-            <a:spLocks noGrp="1"/>
-          </p:cNvSpPr>
-          <p:nvPr>
-            <p:ph type="body" sz="half" idx="17"/>
-          </p:nvPr>
-        </p:nvSpPr>
-        <p:spPr>
-          <a:xfrm>
-            <a:off x="7124700" y="2667000"/>
-            <a:ext cx="2932113" cy="3589338"/>
-          </a:xfrm>
-        </p:spPr>
-        <p:txBody>
-          <a:bodyPr anchor="t">
-            <a:normAutofit/>
-          </a:bodyPr>
-          <a:lstStyle>
-            <a:lvl1pPr marL="0" indent="0">
-              <a:buNone/>
-              <a:defRPr sz="1400"/>
-            </a:lvl1pPr>
-            <a:lvl2pPr marL="457200" indent="0">
-              <a:buNone/>
-              <a:defRPr sz="1200"/>
-            </a:lvl2pPr>
-            <a:lvl3pPr marL="914400" indent="0">
-              <a:buNone/>
-              <a:defRPr sz="1000"/>
-            </a:lvl3pPr>
-            <a:lvl4pPr marL="1371600" indent="0">
-              <a:buNone/>
-              <a:defRPr sz="900"/>
-            </a:lvl4pPr>
-            <a:lvl5pPr marL="1828800" indent="0">
-              <a:buNone/>
-              <a:defRPr sz="900"/>
-            </a:lvl5pPr>
-            <a:lvl6pPr marL="2286000" indent="0">
-              <a:buNone/>
-              <a:defRPr sz="900"/>
-            </a:lvl6pPr>
-            <a:lvl7pPr marL="2743200" indent="0">
-              <a:buNone/>
-              <a:defRPr sz="900"/>
-            </a:lvl7pPr>
-            <a:lvl8pPr marL="3200400" indent="0">
-              <a:buNone/>
-              <a:defRPr sz="900"/>
-            </a:lvl8pPr>
-            <a:lvl9pPr marL="3657600" indent="0">
-              <a:buNone/>
-              <a:defRPr sz="900"/>
-            </a:lvl9pPr>
-          </a:lstStyle>
-          <a:p>
-            <a:pPr lvl="0"/>
-            <a:r>
-              <a:rPr lang="hu-HU"/>
-              <a:t>Mintaszöveg szerkesztése</a:t>
-            </a:r>
-          </a:p>
-        </p:txBody>
-      </p:sp>
-      <p:cxnSp>
-        <p:nvCxnSpPr>
-          <p:cNvPr id="17" name="Straight Connector 16"/>
-          <p:cNvCxnSpPr/>
-          <p:nvPr/>
-        </p:nvCxnSpPr>
-        <p:spPr>
-          <a:xfrm>
-            <a:off x="3726142" y="2133600"/>
-            <a:ext cx="0" cy="3962400"/>
-          </a:xfrm>
-          <a:prstGeom prst="line">
-            <a:avLst/>
-          </a:prstGeom>
-          <a:ln w="12700" cmpd="sng">
-            <a:solidFill>
-              <a:schemeClr val="bg2">
-                <a:lumMod val="40000"/>
-                <a:lumOff val="60000"/>
-                <a:alpha val="40000"/>
-              </a:schemeClr>
-            </a:solidFill>
-          </a:ln>
-        </p:spPr>
-        <p:style>
-          <a:lnRef idx="2">
-            <a:schemeClr val="accent1"/>
-          </a:lnRef>
-          <a:fillRef idx="0">
-            <a:schemeClr val="accent1"/>
-          </a:fillRef>
-          <a:effectRef idx="1">
-            <a:schemeClr val="accent1"/>
-          </a:effectRef>
-          <a:fontRef idx="minor">
-            <a:schemeClr val="tx1"/>
-          </a:fontRef>
-        </p:style>
-      </p:cxnSp>
-      <p:cxnSp>
-        <p:nvCxnSpPr>
-          <p:cNvPr id="18" name="Straight Connector 17"/>
-          <p:cNvCxnSpPr/>
-          <p:nvPr/>
-        </p:nvCxnSpPr>
-        <p:spPr>
-          <a:xfrm>
-            <a:off x="6962227" y="2133600"/>
-            <a:ext cx="0" cy="3966882"/>
-          </a:xfrm>
-          <a:prstGeom prst="line">
-            <a:avLst/>
-          </a:prstGeom>
-          <a:ln w="12700" cmpd="sng">
-            <a:solidFill>
-              <a:schemeClr val="bg2">
-                <a:lumMod val="40000"/>
-                <a:lumOff val="60000"/>
-                <a:alpha val="40000"/>
-              </a:schemeClr>
-            </a:solidFill>
-          </a:ln>
-        </p:spPr>
-        <p:style>
-          <a:lnRef idx="2">
-            <a:schemeClr val="accent1"/>
-          </a:lnRef>
-          <a:fillRef idx="0">
-            <a:schemeClr val="accent1"/>
-          </a:fillRef>
-          <a:effectRef idx="1">
-            <a:schemeClr val="accent1"/>
-          </a:effectRef>
-          <a:fontRef idx="minor">
-            <a:schemeClr val="tx1"/>
-          </a:fontRef>
-        </p:style>
-      </p:cxnSp>
-      <p:sp>
-        <p:nvSpPr>
-          <p:cNvPr id="7" name="Date Placeholder 3"/>
+          <p:cNvPr id="4" name="Date Placeholder 3"/>
           <p:cNvSpPr>
             <a:spLocks noGrp="1"/>
           </p:cNvSpPr>
@@ -2010,7 +2106,7 @@
           <a:p>
             <a:fld id="{57D76C4A-E1F9-49C1-BCE4-2E358991CE58}" type="datetimeFigureOut">
               <a:rPr lang="hu-HU" smtClean="0"/>
-              <a:t>2025. 11. 25.</a:t>
+              <a:t>2025. 12. 02.</a:t>
             </a:fld>
             <a:endParaRPr lang="hu-HU"/>
           </a:p>
@@ -2018,7 +2114,7 @@
       </p:sp>
       <p:sp>
         <p:nvSpPr>
-          <p:cNvPr id="4" name="Footer Placeholder 4"/>
+          <p:cNvPr id="5" name="Footer Placeholder 4"/>
           <p:cNvSpPr>
             <a:spLocks noGrp="1"/>
           </p:cNvSpPr>
@@ -2061,7 +2157,7 @@
     </p:spTree>
     <p:extLst>
       <p:ext uri="{BB962C8B-B14F-4D97-AF65-F5344CB8AC3E}">
-        <p14:creationId xmlns:p14="http://schemas.microsoft.com/office/powerpoint/2010/main" val="1713744924"/>
+        <p14:creationId xmlns:p14="http://schemas.microsoft.com/office/powerpoint/2010/main" val="1334110946"/>
       </p:ext>
     </p:extLst>
   </p:cSld>
@@ -2073,7 +2169,7 @@
 
 <file path=ppt/slideLayouts/slideLayout15.xml><?xml version="1.0" encoding="utf-8"?>
 <p:sldLayout xmlns:a="http://schemas.openxmlformats.org/drawingml/2006/main" xmlns:r="http://schemas.openxmlformats.org/officeDocument/2006/relationships" xmlns:p="http://schemas.openxmlformats.org/presentationml/2006/main" preserve="1">
-  <p:cSld name="3 képhasáb">
+  <p:cSld name="Igaz vagy hamis">
     <p:spTree>
       <p:nvGrpSpPr>
         <p:cNvPr id="1" name=""/>
@@ -2098,15 +2194,23 @@
             <p:ph type="title"/>
           </p:nvPr>
         </p:nvSpPr>
-        <p:spPr/>
-        <p:txBody>
-          <a:bodyPr/>
+        <p:spPr>
+          <a:xfrm>
+            <a:off x="1141412" y="609601"/>
+            <a:ext cx="9905999" cy="2743199"/>
+          </a:xfrm>
+        </p:spPr>
+        <p:txBody>
+          <a:bodyPr vert="horz" lIns="91440" tIns="45720" rIns="91440" bIns="45720" rtlCol="0" anchor="ctr">
+            <a:normAutofit/>
+          </a:bodyPr>
           <a:lstStyle>
             <a:lvl1pPr>
-              <a:defRPr sz="4200"/>
+              <a:defRPr lang="en-US" b="0" dirty="0"/>
             </a:lvl1pPr>
           </a:lstStyle>
           <a:p>
+            <a:pPr marL="0" lvl="0"/>
             <a:r>
               <a:rPr lang="hu-HU"/>
               <a:t>Mintacím szerkesztése</a:t>
@@ -2117,71 +2221,69 @@
       </p:sp>
       <p:sp>
         <p:nvSpPr>
-          <p:cNvPr id="3" name="Text Placeholder 2"/>
-          <p:cNvSpPr>
-            <a:spLocks noGrp="1"/>
-          </p:cNvSpPr>
-          <p:nvPr>
-            <p:ph type="body" idx="1"/>
+          <p:cNvPr id="10" name="Text Placeholder 9"/>
+          <p:cNvSpPr>
+            <a:spLocks noGrp="1"/>
+          </p:cNvSpPr>
+          <p:nvPr>
+            <p:ph type="body" sz="quarter" idx="13"/>
           </p:nvPr>
         </p:nvSpPr>
         <p:spPr>
           <a:xfrm>
-            <a:off x="652463" y="4250949"/>
-            <a:ext cx="2940050" cy="576262"/>
+            <a:off x="1141412" y="3505200"/>
+            <a:ext cx="9906000" cy="838200"/>
           </a:xfrm>
         </p:spPr>
         <p:txBody>
-          <a:bodyPr anchor="b">
-            <a:noAutofit/>
+          <a:bodyPr vert="horz" lIns="91440" tIns="45720" rIns="91440" bIns="45720" rtlCol="0" anchor="b">
+            <a:normAutofit/>
           </a:bodyPr>
           <a:lstStyle>
-            <a:lvl1pPr marL="0" indent="0">
-              <a:buNone/>
-              <a:defRPr sz="2400" b="0">
-                <a:solidFill>
-                  <a:schemeClr val="bg2">
-                    <a:lumMod val="40000"/>
-                    <a:lumOff val="60000"/>
-                  </a:schemeClr>
-                </a:solidFill>
+            <a:lvl1pPr>
+              <a:buNone/>
+              <a:defRPr lang="en-US" sz="2800" b="0" cap="all" dirty="0">
+                <a:ln w="3175" cmpd="sng">
+                  <a:noFill/>
+                </a:ln>
+                <a:gradFill flip="none" rotWithShape="1">
+                  <a:gsLst>
+                    <a:gs pos="0">
+                      <a:schemeClr val="tx1"/>
+                    </a:gs>
+                    <a:gs pos="100000">
+                      <a:schemeClr val="tx1">
+                        <a:lumMod val="75000"/>
+                      </a:schemeClr>
+                    </a:gs>
+                  </a:gsLst>
+                  <a:lin ang="5400000" scaled="0"/>
+                  <a:tileRect/>
+                </a:gradFill>
+                <a:effectLst>
+                  <a:glow rad="38100">
+                    <a:schemeClr val="bg1">
+                      <a:lumMod val="65000"/>
+                      <a:lumOff val="35000"/>
+                      <a:alpha val="40000"/>
+                    </a:schemeClr>
+                  </a:glow>
+                  <a:outerShdw blurRad="28575" dist="38100" dir="14040000" algn="tl" rotWithShape="0">
+                    <a:srgbClr val="000000">
+                      <a:alpha val="25000"/>
+                    </a:srgbClr>
+                  </a:outerShdw>
+                </a:effectLst>
               </a:defRPr>
             </a:lvl1pPr>
-            <a:lvl2pPr marL="457200" indent="0">
-              <a:buNone/>
-              <a:defRPr sz="2000" b="1"/>
-            </a:lvl2pPr>
-            <a:lvl3pPr marL="914400" indent="0">
-              <a:buNone/>
-              <a:defRPr sz="1800" b="1"/>
-            </a:lvl3pPr>
-            <a:lvl4pPr marL="1371600" indent="0">
-              <a:buNone/>
-              <a:defRPr sz="1600" b="1"/>
-            </a:lvl4pPr>
-            <a:lvl5pPr marL="1828800" indent="0">
-              <a:buNone/>
-              <a:defRPr sz="1600" b="1"/>
-            </a:lvl5pPr>
-            <a:lvl6pPr marL="2286000" indent="0">
-              <a:buNone/>
-              <a:defRPr sz="1600" b="1"/>
-            </a:lvl6pPr>
-            <a:lvl7pPr marL="2743200" indent="0">
-              <a:buNone/>
-              <a:defRPr sz="1600" b="1"/>
-            </a:lvl7pPr>
-            <a:lvl8pPr marL="3200400" indent="0">
-              <a:buNone/>
-              <a:defRPr sz="1600" b="1"/>
-            </a:lvl8pPr>
-            <a:lvl9pPr marL="3657600" indent="0">
-              <a:buNone/>
-              <a:defRPr sz="1600" b="1"/>
-            </a:lvl9pPr>
           </a:lstStyle>
           <a:p>
-            <a:pPr lvl="0"/>
+            <a:pPr marL="0" lvl="0">
+              <a:spcBef>
+                <a:spcPct val="0"/>
+              </a:spcBef>
+              <a:buNone/>
+            </a:pPr>
             <a:r>
               <a:rPr lang="hu-HU"/>
               <a:t>Mintaszöveg szerkesztése</a:t>
@@ -2191,213 +2293,123 @@
       </p:sp>
       <p:sp>
         <p:nvSpPr>
-          <p:cNvPr id="29" name="Picture Placeholder 2"/>
-          <p:cNvSpPr>
-            <a:spLocks noGrp="1" noChangeAspect="1"/>
-          </p:cNvSpPr>
-          <p:nvPr>
-            <p:ph type="pic" idx="15"/>
+          <p:cNvPr id="3" name="Text Placeholder 2"/>
+          <p:cNvSpPr>
+            <a:spLocks noGrp="1"/>
+          </p:cNvSpPr>
+          <p:nvPr>
+            <p:ph type="body" idx="1"/>
           </p:nvPr>
         </p:nvSpPr>
         <p:spPr>
           <a:xfrm>
-            <a:off x="652463" y="2209800"/>
-            <a:ext cx="2940050" cy="1524000"/>
+            <a:off x="1141411" y="4343400"/>
+            <a:ext cx="9906000" cy="1447800"/>
           </a:xfrm>
-          <a:prstGeom prst="roundRect">
-            <a:avLst>
-              <a:gd name="adj" fmla="val 1858"/>
-            </a:avLst>
-          </a:prstGeom>
-          <a:effectLst>
-            <a:outerShdw blurRad="50800" dist="50800" dir="5400000" algn="tl" rotWithShape="0">
-              <a:srgbClr val="000000">
-                <a:alpha val="43000"/>
-              </a:srgbClr>
-            </a:outerShdw>
-          </a:effectLst>
         </p:spPr>
         <p:txBody>
           <a:bodyPr anchor="t">
             <a:normAutofit/>
           </a:bodyPr>
           <a:lstStyle>
-            <a:lvl1pPr marL="0" indent="0" algn="ctr">
-              <a:buNone/>
-              <a:defRPr sz="1600"/>
-            </a:lvl1pPr>
-            <a:lvl2pPr marL="457200" indent="0">
-              <a:buNone/>
-              <a:defRPr sz="1600"/>
-            </a:lvl2pPr>
-            <a:lvl3pPr marL="914400" indent="0">
-              <a:buNone/>
-              <a:defRPr sz="1600"/>
-            </a:lvl3pPr>
-            <a:lvl4pPr marL="1371600" indent="0">
-              <a:buNone/>
-              <a:defRPr sz="1600"/>
-            </a:lvl4pPr>
-            <a:lvl5pPr marL="1828800" indent="0">
-              <a:buNone/>
-              <a:defRPr sz="1600"/>
-            </a:lvl5pPr>
-            <a:lvl6pPr marL="2286000" indent="0">
-              <a:buNone/>
-              <a:defRPr sz="1600"/>
-            </a:lvl6pPr>
-            <a:lvl7pPr marL="2743200" indent="0">
-              <a:buNone/>
-              <a:defRPr sz="1600"/>
-            </a:lvl7pPr>
-            <a:lvl8pPr marL="3200400" indent="0">
-              <a:buNone/>
-              <a:defRPr sz="1600"/>
-            </a:lvl8pPr>
-            <a:lvl9pPr marL="3657600" indent="0">
-              <a:buNone/>
-              <a:defRPr sz="1600"/>
-            </a:lvl9pPr>
-          </a:lstStyle>
-          <a:p>
-            <a:r>
-              <a:rPr lang="hu-HU"/>
-              <a:t>Kép beszúrásához kattintson az ikonra</a:t>
-            </a:r>
-            <a:endParaRPr lang="en-US" dirty="0"/>
-          </a:p>
-        </p:txBody>
-      </p:sp>
-      <p:sp>
-        <p:nvSpPr>
-          <p:cNvPr id="22" name="Text Placeholder 3"/>
-          <p:cNvSpPr>
-            <a:spLocks noGrp="1"/>
-          </p:cNvSpPr>
-          <p:nvPr>
-            <p:ph type="body" sz="half" idx="18"/>
-          </p:nvPr>
-        </p:nvSpPr>
-        <p:spPr>
-          <a:xfrm>
-            <a:off x="652463" y="4827211"/>
-            <a:ext cx="2940050" cy="659189"/>
-          </a:xfrm>
-        </p:spPr>
-        <p:txBody>
-          <a:bodyPr anchor="t">
-            <a:normAutofit/>
-          </a:bodyPr>
-          <a:lstStyle>
-            <a:lvl1pPr marL="0" indent="0">
-              <a:buNone/>
-              <a:defRPr sz="1400"/>
-            </a:lvl1pPr>
-            <a:lvl2pPr marL="457200" indent="0">
-              <a:buNone/>
-              <a:defRPr sz="1200"/>
-            </a:lvl2pPr>
-            <a:lvl3pPr marL="914400" indent="0">
-              <a:buNone/>
-              <a:defRPr sz="1000"/>
-            </a:lvl3pPr>
-            <a:lvl4pPr marL="1371600" indent="0">
-              <a:buNone/>
-              <a:defRPr sz="900"/>
-            </a:lvl4pPr>
-            <a:lvl5pPr marL="1828800" indent="0">
-              <a:buNone/>
-              <a:defRPr sz="900"/>
-            </a:lvl5pPr>
-            <a:lvl6pPr marL="2286000" indent="0">
-              <a:buNone/>
-              <a:defRPr sz="900"/>
-            </a:lvl6pPr>
-            <a:lvl7pPr marL="2743200" indent="0">
-              <a:buNone/>
-              <a:defRPr sz="900"/>
-            </a:lvl7pPr>
-            <a:lvl8pPr marL="3200400" indent="0">
-              <a:buNone/>
-              <a:defRPr sz="900"/>
-            </a:lvl8pPr>
-            <a:lvl9pPr marL="3657600" indent="0">
-              <a:buNone/>
-              <a:defRPr sz="900"/>
-            </a:lvl9pPr>
-          </a:lstStyle>
-          <a:p>
-            <a:pPr lvl="0"/>
-            <a:r>
-              <a:rPr lang="hu-HU"/>
-              <a:t>Mintaszöveg szerkesztése</a:t>
-            </a:r>
-          </a:p>
-        </p:txBody>
-      </p:sp>
-      <p:sp>
-        <p:nvSpPr>
-          <p:cNvPr id="5" name="Text Placeholder 4"/>
-          <p:cNvSpPr>
-            <a:spLocks noGrp="1"/>
-          </p:cNvSpPr>
-          <p:nvPr>
-            <p:ph type="body" sz="quarter" idx="3"/>
-          </p:nvPr>
-        </p:nvSpPr>
-        <p:spPr>
-          <a:xfrm>
-            <a:off x="3889375" y="4250949"/>
-            <a:ext cx="2930525" cy="576262"/>
-          </a:xfrm>
-        </p:spPr>
-        <p:txBody>
-          <a:bodyPr anchor="b">
-            <a:noAutofit/>
-          </a:bodyPr>
-          <a:lstStyle>
-            <a:lvl1pPr marL="0" indent="0">
-              <a:buNone/>
-              <a:defRPr sz="2400" b="0">
-                <a:solidFill>
-                  <a:schemeClr val="bg2">
-                    <a:lumMod val="40000"/>
-                    <a:lumOff val="60000"/>
-                  </a:schemeClr>
-                </a:solidFill>
+            <a:lvl1pPr marL="0" indent="0" algn="l">
+              <a:buNone/>
+              <a:defRPr sz="1800">
+                <a:gradFill flip="none" rotWithShape="1">
+                  <a:gsLst>
+                    <a:gs pos="0">
+                      <a:schemeClr val="tx1"/>
+                    </a:gs>
+                    <a:gs pos="100000">
+                      <a:schemeClr val="tx1">
+                        <a:lumMod val="75000"/>
+                      </a:schemeClr>
+                    </a:gs>
+                  </a:gsLst>
+                  <a:lin ang="5400000" scaled="0"/>
+                  <a:tileRect/>
+                </a:gradFill>
               </a:defRPr>
             </a:lvl1pPr>
             <a:lvl2pPr marL="457200" indent="0">
               <a:buNone/>
-              <a:defRPr sz="2000" b="1"/>
+              <a:defRPr sz="1800">
+                <a:solidFill>
+                  <a:schemeClr val="tx1">
+                    <a:tint val="75000"/>
+                  </a:schemeClr>
+                </a:solidFill>
+              </a:defRPr>
             </a:lvl2pPr>
             <a:lvl3pPr marL="914400" indent="0">
               <a:buNone/>
-              <a:defRPr sz="1800" b="1"/>
+              <a:defRPr sz="1600">
+                <a:solidFill>
+                  <a:schemeClr val="tx1">
+                    <a:tint val="75000"/>
+                  </a:schemeClr>
+                </a:solidFill>
+              </a:defRPr>
             </a:lvl3pPr>
             <a:lvl4pPr marL="1371600" indent="0">
               <a:buNone/>
-              <a:defRPr sz="1600" b="1"/>
+              <a:defRPr sz="1400">
+                <a:solidFill>
+                  <a:schemeClr val="tx1">
+                    <a:tint val="75000"/>
+                  </a:schemeClr>
+                </a:solidFill>
+              </a:defRPr>
             </a:lvl4pPr>
             <a:lvl5pPr marL="1828800" indent="0">
               <a:buNone/>
-              <a:defRPr sz="1600" b="1"/>
+              <a:defRPr sz="1400">
+                <a:solidFill>
+                  <a:schemeClr val="tx1">
+                    <a:tint val="75000"/>
+                  </a:schemeClr>
+                </a:solidFill>
+              </a:defRPr>
             </a:lvl5pPr>
             <a:lvl6pPr marL="2286000" indent="0">
               <a:buNone/>
-              <a:defRPr sz="1600" b="1"/>
+              <a:defRPr sz="1400">
+                <a:solidFill>
+                  <a:schemeClr val="tx1">
+                    <a:tint val="75000"/>
+                  </a:schemeClr>
+                </a:solidFill>
+              </a:defRPr>
             </a:lvl6pPr>
             <a:lvl7pPr marL="2743200" indent="0">
               <a:buNone/>
-              <a:defRPr sz="1600" b="1"/>
+              <a:defRPr sz="1400">
+                <a:solidFill>
+                  <a:schemeClr val="tx1">
+                    <a:tint val="75000"/>
+                  </a:schemeClr>
+                </a:solidFill>
+              </a:defRPr>
             </a:lvl7pPr>
             <a:lvl8pPr marL="3200400" indent="0">
               <a:buNone/>
-              <a:defRPr sz="1600" b="1"/>
+              <a:defRPr sz="1400">
+                <a:solidFill>
+                  <a:schemeClr val="tx1">
+                    <a:tint val="75000"/>
+                  </a:schemeClr>
+                </a:solidFill>
+              </a:defRPr>
             </a:lvl8pPr>
             <a:lvl9pPr marL="3657600" indent="0">
               <a:buNone/>
-              <a:defRPr sz="1600" b="1"/>
+              <a:defRPr sz="1400">
+                <a:solidFill>
+                  <a:schemeClr val="tx1">
+                    <a:tint val="75000"/>
+                  </a:schemeClr>
+                </a:solidFill>
+              </a:defRPr>
             </a:lvl9pPr>
           </a:lstStyle>
           <a:p>
@@ -2411,451 +2423,7 @@
       </p:sp>
       <p:sp>
         <p:nvSpPr>
-          <p:cNvPr id="30" name="Picture Placeholder 2"/>
-          <p:cNvSpPr>
-            <a:spLocks noGrp="1" noChangeAspect="1"/>
-          </p:cNvSpPr>
-          <p:nvPr>
-            <p:ph type="pic" idx="21"/>
-          </p:nvPr>
-        </p:nvSpPr>
-        <p:spPr>
-          <a:xfrm>
-            <a:off x="3889374" y="2209800"/>
-            <a:ext cx="2930525" cy="1524000"/>
-          </a:xfrm>
-          <a:prstGeom prst="roundRect">
-            <a:avLst>
-              <a:gd name="adj" fmla="val 1858"/>
-            </a:avLst>
-          </a:prstGeom>
-          <a:effectLst>
-            <a:outerShdw blurRad="50800" dist="50800" dir="5400000" algn="tl" rotWithShape="0">
-              <a:srgbClr val="000000">
-                <a:alpha val="43000"/>
-              </a:srgbClr>
-            </a:outerShdw>
-          </a:effectLst>
-        </p:spPr>
-        <p:txBody>
-          <a:bodyPr anchor="t">
-            <a:normAutofit/>
-          </a:bodyPr>
-          <a:lstStyle>
-            <a:lvl1pPr marL="0" indent="0" algn="ctr">
-              <a:buNone/>
-              <a:defRPr sz="1600"/>
-            </a:lvl1pPr>
-            <a:lvl2pPr marL="457200" indent="0">
-              <a:buNone/>
-              <a:defRPr sz="1600"/>
-            </a:lvl2pPr>
-            <a:lvl3pPr marL="914400" indent="0">
-              <a:buNone/>
-              <a:defRPr sz="1600"/>
-            </a:lvl3pPr>
-            <a:lvl4pPr marL="1371600" indent="0">
-              <a:buNone/>
-              <a:defRPr sz="1600"/>
-            </a:lvl4pPr>
-            <a:lvl5pPr marL="1828800" indent="0">
-              <a:buNone/>
-              <a:defRPr sz="1600"/>
-            </a:lvl5pPr>
-            <a:lvl6pPr marL="2286000" indent="0">
-              <a:buNone/>
-              <a:defRPr sz="1600"/>
-            </a:lvl6pPr>
-            <a:lvl7pPr marL="2743200" indent="0">
-              <a:buNone/>
-              <a:defRPr sz="1600"/>
-            </a:lvl7pPr>
-            <a:lvl8pPr marL="3200400" indent="0">
-              <a:buNone/>
-              <a:defRPr sz="1600"/>
-            </a:lvl8pPr>
-            <a:lvl9pPr marL="3657600" indent="0">
-              <a:buNone/>
-              <a:defRPr sz="1600"/>
-            </a:lvl9pPr>
-          </a:lstStyle>
-          <a:p>
-            <a:r>
-              <a:rPr lang="hu-HU"/>
-              <a:t>Kép beszúrásához kattintson az ikonra</a:t>
-            </a:r>
-            <a:endParaRPr lang="en-US" dirty="0"/>
-          </a:p>
-        </p:txBody>
-      </p:sp>
-      <p:sp>
-        <p:nvSpPr>
-          <p:cNvPr id="23" name="Text Placeholder 3"/>
-          <p:cNvSpPr>
-            <a:spLocks noGrp="1"/>
-          </p:cNvSpPr>
-          <p:nvPr>
-            <p:ph type="body" sz="half" idx="19"/>
-          </p:nvPr>
-        </p:nvSpPr>
-        <p:spPr>
-          <a:xfrm>
-            <a:off x="3888022" y="4827210"/>
-            <a:ext cx="2934406" cy="659189"/>
-          </a:xfrm>
-        </p:spPr>
-        <p:txBody>
-          <a:bodyPr anchor="t">
-            <a:normAutofit/>
-          </a:bodyPr>
-          <a:lstStyle>
-            <a:lvl1pPr marL="0" indent="0">
-              <a:buNone/>
-              <a:defRPr sz="1400"/>
-            </a:lvl1pPr>
-            <a:lvl2pPr marL="457200" indent="0">
-              <a:buNone/>
-              <a:defRPr sz="1200"/>
-            </a:lvl2pPr>
-            <a:lvl3pPr marL="914400" indent="0">
-              <a:buNone/>
-              <a:defRPr sz="1000"/>
-            </a:lvl3pPr>
-            <a:lvl4pPr marL="1371600" indent="0">
-              <a:buNone/>
-              <a:defRPr sz="900"/>
-            </a:lvl4pPr>
-            <a:lvl5pPr marL="1828800" indent="0">
-              <a:buNone/>
-              <a:defRPr sz="900"/>
-            </a:lvl5pPr>
-            <a:lvl6pPr marL="2286000" indent="0">
-              <a:buNone/>
-              <a:defRPr sz="900"/>
-            </a:lvl6pPr>
-            <a:lvl7pPr marL="2743200" indent="0">
-              <a:buNone/>
-              <a:defRPr sz="900"/>
-            </a:lvl7pPr>
-            <a:lvl8pPr marL="3200400" indent="0">
-              <a:buNone/>
-              <a:defRPr sz="900"/>
-            </a:lvl8pPr>
-            <a:lvl9pPr marL="3657600" indent="0">
-              <a:buNone/>
-              <a:defRPr sz="900"/>
-            </a:lvl9pPr>
-          </a:lstStyle>
-          <a:p>
-            <a:pPr lvl="0"/>
-            <a:r>
-              <a:rPr lang="hu-HU"/>
-              <a:t>Mintaszöveg szerkesztése</a:t>
-            </a:r>
-          </a:p>
-        </p:txBody>
-      </p:sp>
-      <p:sp>
-        <p:nvSpPr>
-          <p:cNvPr id="14" name="Text Placeholder 4"/>
-          <p:cNvSpPr>
-            <a:spLocks noGrp="1"/>
-          </p:cNvSpPr>
-          <p:nvPr>
-            <p:ph type="body" sz="quarter" idx="13"/>
-          </p:nvPr>
-        </p:nvSpPr>
-        <p:spPr>
-          <a:xfrm>
-            <a:off x="7124700" y="4250949"/>
-            <a:ext cx="2932113" cy="576262"/>
-          </a:xfrm>
-        </p:spPr>
-        <p:txBody>
-          <a:bodyPr anchor="b">
-            <a:noAutofit/>
-          </a:bodyPr>
-          <a:lstStyle>
-            <a:lvl1pPr marL="0" indent="0">
-              <a:buNone/>
-              <a:defRPr sz="2400" b="0">
-                <a:solidFill>
-                  <a:schemeClr val="bg2">
-                    <a:lumMod val="40000"/>
-                    <a:lumOff val="60000"/>
-                  </a:schemeClr>
-                </a:solidFill>
-              </a:defRPr>
-            </a:lvl1pPr>
-            <a:lvl2pPr marL="457200" indent="0">
-              <a:buNone/>
-              <a:defRPr sz="2000" b="1"/>
-            </a:lvl2pPr>
-            <a:lvl3pPr marL="914400" indent="0">
-              <a:buNone/>
-              <a:defRPr sz="1800" b="1"/>
-            </a:lvl3pPr>
-            <a:lvl4pPr marL="1371600" indent="0">
-              <a:buNone/>
-              <a:defRPr sz="1600" b="1"/>
-            </a:lvl4pPr>
-            <a:lvl5pPr marL="1828800" indent="0">
-              <a:buNone/>
-              <a:defRPr sz="1600" b="1"/>
-            </a:lvl5pPr>
-            <a:lvl6pPr marL="2286000" indent="0">
-              <a:buNone/>
-              <a:defRPr sz="1600" b="1"/>
-            </a:lvl6pPr>
-            <a:lvl7pPr marL="2743200" indent="0">
-              <a:buNone/>
-              <a:defRPr sz="1600" b="1"/>
-            </a:lvl7pPr>
-            <a:lvl8pPr marL="3200400" indent="0">
-              <a:buNone/>
-              <a:defRPr sz="1600" b="1"/>
-            </a:lvl8pPr>
-            <a:lvl9pPr marL="3657600" indent="0">
-              <a:buNone/>
-              <a:defRPr sz="1600" b="1"/>
-            </a:lvl9pPr>
-          </a:lstStyle>
-          <a:p>
-            <a:pPr lvl="0"/>
-            <a:r>
-              <a:rPr lang="hu-HU"/>
-              <a:t>Mintaszöveg szerkesztése</a:t>
-            </a:r>
-          </a:p>
-        </p:txBody>
-      </p:sp>
-      <p:sp>
-        <p:nvSpPr>
-          <p:cNvPr id="31" name="Picture Placeholder 2"/>
-          <p:cNvSpPr>
-            <a:spLocks noGrp="1" noChangeAspect="1"/>
-          </p:cNvSpPr>
-          <p:nvPr>
-            <p:ph type="pic" idx="22"/>
-          </p:nvPr>
-        </p:nvSpPr>
-        <p:spPr>
-          <a:xfrm>
-            <a:off x="7124699" y="2209800"/>
-            <a:ext cx="2932113" cy="1524000"/>
-          </a:xfrm>
-          <a:prstGeom prst="roundRect">
-            <a:avLst>
-              <a:gd name="adj" fmla="val 1858"/>
-            </a:avLst>
-          </a:prstGeom>
-          <a:effectLst>
-            <a:outerShdw blurRad="50800" dist="50800" dir="5400000" algn="tl" rotWithShape="0">
-              <a:srgbClr val="000000">
-                <a:alpha val="43000"/>
-              </a:srgbClr>
-            </a:outerShdw>
-          </a:effectLst>
-        </p:spPr>
-        <p:txBody>
-          <a:bodyPr anchor="t">
-            <a:normAutofit/>
-          </a:bodyPr>
-          <a:lstStyle>
-            <a:lvl1pPr marL="0" indent="0" algn="ctr">
-              <a:buNone/>
-              <a:defRPr sz="1600"/>
-            </a:lvl1pPr>
-            <a:lvl2pPr marL="457200" indent="0">
-              <a:buNone/>
-              <a:defRPr sz="1600"/>
-            </a:lvl2pPr>
-            <a:lvl3pPr marL="914400" indent="0">
-              <a:buNone/>
-              <a:defRPr sz="1600"/>
-            </a:lvl3pPr>
-            <a:lvl4pPr marL="1371600" indent="0">
-              <a:buNone/>
-              <a:defRPr sz="1600"/>
-            </a:lvl4pPr>
-            <a:lvl5pPr marL="1828800" indent="0">
-              <a:buNone/>
-              <a:defRPr sz="1600"/>
-            </a:lvl5pPr>
-            <a:lvl6pPr marL="2286000" indent="0">
-              <a:buNone/>
-              <a:defRPr sz="1600"/>
-            </a:lvl6pPr>
-            <a:lvl7pPr marL="2743200" indent="0">
-              <a:buNone/>
-              <a:defRPr sz="1600"/>
-            </a:lvl7pPr>
-            <a:lvl8pPr marL="3200400" indent="0">
-              <a:buNone/>
-              <a:defRPr sz="1600"/>
-            </a:lvl8pPr>
-            <a:lvl9pPr marL="3657600" indent="0">
-              <a:buNone/>
-              <a:defRPr sz="1600"/>
-            </a:lvl9pPr>
-          </a:lstStyle>
-          <a:p>
-            <a:r>
-              <a:rPr lang="hu-HU"/>
-              <a:t>Kép beszúrásához kattintson az ikonra</a:t>
-            </a:r>
-            <a:endParaRPr lang="en-US" dirty="0"/>
-          </a:p>
-        </p:txBody>
-      </p:sp>
-      <p:sp>
-        <p:nvSpPr>
-          <p:cNvPr id="24" name="Text Placeholder 3"/>
-          <p:cNvSpPr>
-            <a:spLocks noGrp="1"/>
-          </p:cNvSpPr>
-          <p:nvPr>
-            <p:ph type="body" sz="half" idx="20"/>
-          </p:nvPr>
-        </p:nvSpPr>
-        <p:spPr>
-          <a:xfrm>
-            <a:off x="7124575" y="4827208"/>
-            <a:ext cx="2935997" cy="659189"/>
-          </a:xfrm>
-        </p:spPr>
-        <p:txBody>
-          <a:bodyPr anchor="t">
-            <a:normAutofit/>
-          </a:bodyPr>
-          <a:lstStyle>
-            <a:lvl1pPr marL="0" indent="0">
-              <a:buNone/>
-              <a:defRPr sz="1400"/>
-            </a:lvl1pPr>
-            <a:lvl2pPr marL="457200" indent="0">
-              <a:buNone/>
-              <a:defRPr sz="1200"/>
-            </a:lvl2pPr>
-            <a:lvl3pPr marL="914400" indent="0">
-              <a:buNone/>
-              <a:defRPr sz="1000"/>
-            </a:lvl3pPr>
-            <a:lvl4pPr marL="1371600" indent="0">
-              <a:buNone/>
-              <a:defRPr sz="900"/>
-            </a:lvl4pPr>
-            <a:lvl5pPr marL="1828800" indent="0">
-              <a:buNone/>
-              <a:defRPr sz="900"/>
-            </a:lvl5pPr>
-            <a:lvl6pPr marL="2286000" indent="0">
-              <a:buNone/>
-              <a:defRPr sz="900"/>
-            </a:lvl6pPr>
-            <a:lvl7pPr marL="2743200" indent="0">
-              <a:buNone/>
-              <a:defRPr sz="900"/>
-            </a:lvl7pPr>
-            <a:lvl8pPr marL="3200400" indent="0">
-              <a:buNone/>
-              <a:defRPr sz="900"/>
-            </a:lvl8pPr>
-            <a:lvl9pPr marL="3657600" indent="0">
-              <a:buNone/>
-              <a:defRPr sz="900"/>
-            </a:lvl9pPr>
-          </a:lstStyle>
-          <a:p>
-            <a:pPr lvl="0"/>
-            <a:r>
-              <a:rPr lang="hu-HU"/>
-              <a:t>Mintaszöveg szerkesztése</a:t>
-            </a:r>
-          </a:p>
-        </p:txBody>
-      </p:sp>
-      <p:cxnSp>
-        <p:nvCxnSpPr>
-          <p:cNvPr id="19" name="Straight Connector 18"/>
-          <p:cNvCxnSpPr/>
-          <p:nvPr/>
-        </p:nvCxnSpPr>
-        <p:spPr>
-          <a:xfrm>
-            <a:off x="3726142" y="2133600"/>
-            <a:ext cx="0" cy="3962400"/>
-          </a:xfrm>
-          <a:prstGeom prst="line">
-            <a:avLst/>
-          </a:prstGeom>
-          <a:ln w="12700" cmpd="sng">
-            <a:solidFill>
-              <a:schemeClr val="bg2">
-                <a:lumMod val="40000"/>
-                <a:lumOff val="60000"/>
-                <a:alpha val="40000"/>
-              </a:schemeClr>
-            </a:solidFill>
-          </a:ln>
-        </p:spPr>
-        <p:style>
-          <a:lnRef idx="2">
-            <a:schemeClr val="accent1"/>
-          </a:lnRef>
-          <a:fillRef idx="0">
-            <a:schemeClr val="accent1"/>
-          </a:fillRef>
-          <a:effectRef idx="1">
-            <a:schemeClr val="accent1"/>
-          </a:effectRef>
-          <a:fontRef idx="minor">
-            <a:schemeClr val="tx1"/>
-          </a:fontRef>
-        </p:style>
-      </p:cxnSp>
-      <p:cxnSp>
-        <p:nvCxnSpPr>
-          <p:cNvPr id="20" name="Straight Connector 19"/>
-          <p:cNvCxnSpPr/>
-          <p:nvPr/>
-        </p:nvCxnSpPr>
-        <p:spPr>
-          <a:xfrm>
-            <a:off x="6962227" y="2133600"/>
-            <a:ext cx="0" cy="3966882"/>
-          </a:xfrm>
-          <a:prstGeom prst="line">
-            <a:avLst/>
-          </a:prstGeom>
-          <a:ln w="12700" cmpd="sng">
-            <a:solidFill>
-              <a:schemeClr val="bg2">
-                <a:lumMod val="40000"/>
-                <a:lumOff val="60000"/>
-                <a:alpha val="40000"/>
-              </a:schemeClr>
-            </a:solidFill>
-          </a:ln>
-        </p:spPr>
-        <p:style>
-          <a:lnRef idx="2">
-            <a:schemeClr val="accent1"/>
-          </a:lnRef>
-          <a:fillRef idx="0">
-            <a:schemeClr val="accent1"/>
-          </a:fillRef>
-          <a:effectRef idx="1">
-            <a:schemeClr val="accent1"/>
-          </a:effectRef>
-          <a:fontRef idx="minor">
-            <a:schemeClr val="tx1"/>
-          </a:fontRef>
-        </p:style>
-      </p:cxnSp>
-      <p:sp>
-        <p:nvSpPr>
-          <p:cNvPr id="7" name="Date Placeholder 3"/>
+          <p:cNvPr id="4" name="Date Placeholder 3"/>
           <p:cNvSpPr>
             <a:spLocks noGrp="1"/>
           </p:cNvSpPr>
@@ -2870,7 +2438,7 @@
           <a:p>
             <a:fld id="{57D76C4A-E1F9-49C1-BCE4-2E358991CE58}" type="datetimeFigureOut">
               <a:rPr lang="hu-HU" smtClean="0"/>
-              <a:t>2025. 11. 25.</a:t>
+              <a:t>2025. 12. 02.</a:t>
             </a:fld>
             <a:endParaRPr lang="hu-HU"/>
           </a:p>
@@ -2878,7 +2446,7 @@
       </p:sp>
       <p:sp>
         <p:nvSpPr>
-          <p:cNvPr id="4" name="Footer Placeholder 4"/>
+          <p:cNvPr id="5" name="Footer Placeholder 4"/>
           <p:cNvSpPr>
             <a:spLocks noGrp="1"/>
           </p:cNvSpPr>
@@ -2921,7 +2489,7 @@
     </p:spTree>
     <p:extLst>
       <p:ext uri="{BB962C8B-B14F-4D97-AF65-F5344CB8AC3E}">
-        <p14:creationId xmlns:p14="http://schemas.microsoft.com/office/powerpoint/2010/main" val="2070782653"/>
+        <p14:creationId xmlns:p14="http://schemas.microsoft.com/office/powerpoint/2010/main" val="2375001683"/>
       </p:ext>
     </p:extLst>
   </p:cSld>
@@ -2950,7 +2518,7 @@
       </p:grpSpPr>
       <p:sp>
         <p:nvSpPr>
-          <p:cNvPr id="2" name="Title 1"/>
+          <p:cNvPr id="7" name="Title 1"/>
           <p:cNvSpPr>
             <a:spLocks noGrp="1"/>
           </p:cNvSpPr>
@@ -2958,7 +2526,12 @@
             <p:ph type="title"/>
           </p:nvPr>
         </p:nvSpPr>
-        <p:spPr/>
+        <p:spPr>
+          <a:xfrm>
+            <a:off x="1141413" y="609600"/>
+            <a:ext cx="9905998" cy="1905000"/>
+          </a:xfrm>
+        </p:spPr>
         <p:txBody>
           <a:bodyPr/>
           <a:lstStyle/>
@@ -2983,7 +2556,7 @@
         </p:nvSpPr>
         <p:spPr/>
         <p:txBody>
-          <a:bodyPr vert="eaVert" anchor="t" anchorCtr="0"/>
+          <a:bodyPr vert="eaVert" anchor="t"/>
           <a:lstStyle/>
           <a:p>
             <a:pPr lvl="0"/>
@@ -3040,7 +2613,7 @@
           <a:p>
             <a:fld id="{57D76C4A-E1F9-49C1-BCE4-2E358991CE58}" type="datetimeFigureOut">
               <a:rPr lang="hu-HU" smtClean="0"/>
-              <a:t>2025. 11. 25.</a:t>
+              <a:t>2025. 12. 02.</a:t>
             </a:fld>
             <a:endParaRPr lang="hu-HU"/>
           </a:p>
@@ -3091,7 +2664,7 @@
     </p:spTree>
     <p:extLst>
       <p:ext uri="{BB962C8B-B14F-4D97-AF65-F5344CB8AC3E}">
-        <p14:creationId xmlns:p14="http://schemas.microsoft.com/office/powerpoint/2010/main" val="1017990049"/>
+        <p14:creationId xmlns:p14="http://schemas.microsoft.com/office/powerpoint/2010/main" val="2854269012"/>
       </p:ext>
     </p:extLst>
   </p:cSld>
@@ -3130,12 +2703,12 @@
         </p:nvSpPr>
         <p:spPr>
           <a:xfrm>
-            <a:off x="8304212" y="430213"/>
-            <a:ext cx="1752601" cy="5826125"/>
+            <a:off x="8836898" y="609599"/>
+            <a:ext cx="2210514" cy="5181601"/>
           </a:xfrm>
         </p:spPr>
         <p:txBody>
-          <a:bodyPr vert="eaVert" anchor="b" anchorCtr="0"/>
+          <a:bodyPr vert="eaVert"/>
           <a:lstStyle/>
           <a:p>
             <a:r>
@@ -3158,12 +2731,12 @@
         </p:nvSpPr>
         <p:spPr>
           <a:xfrm>
-            <a:off x="652463" y="887414"/>
-            <a:ext cx="7423149" cy="5368924"/>
+            <a:off x="1141412" y="609600"/>
+            <a:ext cx="7543800" cy="5181600"/>
           </a:xfrm>
         </p:spPr>
         <p:txBody>
-          <a:bodyPr vert="eaVert"/>
+          <a:bodyPr vert="eaVert" anchor="t"/>
           <a:lstStyle/>
           <a:p>
             <a:pPr lvl="0"/>
@@ -3220,7 +2793,7 @@
           <a:p>
             <a:fld id="{57D76C4A-E1F9-49C1-BCE4-2E358991CE58}" type="datetimeFigureOut">
               <a:rPr lang="hu-HU" smtClean="0"/>
-              <a:t>2025. 11. 25.</a:t>
+              <a:t>2025. 12. 02.</a:t>
             </a:fld>
             <a:endParaRPr lang="hu-HU"/>
           </a:p>
@@ -3271,7 +2844,7 @@
     </p:spTree>
     <p:extLst>
       <p:ext uri="{BB962C8B-B14F-4D97-AF65-F5344CB8AC3E}">
-        <p14:creationId xmlns:p14="http://schemas.microsoft.com/office/powerpoint/2010/main" val="2015235154"/>
+        <p14:creationId xmlns:p14="http://schemas.microsoft.com/office/powerpoint/2010/main" val="269824512"/>
       </p:ext>
     </p:extLst>
   </p:cSld>
@@ -3333,64 +2906,64 @@
         </p:nvSpPr>
         <p:spPr/>
         <p:txBody>
+          <a:bodyPr anchor="ctr"/>
+          <a:lstStyle/>
+          <a:p>
+            <a:pPr lvl="0"/>
+            <a:r>
+              <a:rPr lang="hu-HU"/>
+              <a:t>Mintaszöveg szerkesztése</a:t>
+            </a:r>
+          </a:p>
+          <a:p>
+            <a:pPr lvl="1"/>
+            <a:r>
+              <a:rPr lang="hu-HU"/>
+              <a:t>Második szint</a:t>
+            </a:r>
+          </a:p>
+          <a:p>
+            <a:pPr lvl="2"/>
+            <a:r>
+              <a:rPr lang="hu-HU"/>
+              <a:t>Harmadik szint</a:t>
+            </a:r>
+          </a:p>
+          <a:p>
+            <a:pPr lvl="3"/>
+            <a:r>
+              <a:rPr lang="hu-HU"/>
+              <a:t>Negyedik szint</a:t>
+            </a:r>
+          </a:p>
+          <a:p>
+            <a:pPr lvl="4"/>
+            <a:r>
+              <a:rPr lang="hu-HU"/>
+              <a:t>Ötödik szint</a:t>
+            </a:r>
+            <a:endParaRPr lang="en-US" dirty="0"/>
+          </a:p>
+        </p:txBody>
+      </p:sp>
+      <p:sp>
+        <p:nvSpPr>
+          <p:cNvPr id="4" name="Date Placeholder 3"/>
+          <p:cNvSpPr>
+            <a:spLocks noGrp="1"/>
+          </p:cNvSpPr>
+          <p:nvPr>
+            <p:ph type="dt" sz="half" idx="10"/>
+          </p:nvPr>
+        </p:nvSpPr>
+        <p:spPr/>
+        <p:txBody>
           <a:bodyPr/>
           <a:lstStyle/>
           <a:p>
-            <a:pPr lvl="0"/>
-            <a:r>
-              <a:rPr lang="hu-HU"/>
-              <a:t>Mintaszöveg szerkesztése</a:t>
-            </a:r>
-          </a:p>
-          <a:p>
-            <a:pPr lvl="1"/>
-            <a:r>
-              <a:rPr lang="hu-HU"/>
-              <a:t>Második szint</a:t>
-            </a:r>
-          </a:p>
-          <a:p>
-            <a:pPr lvl="2"/>
-            <a:r>
-              <a:rPr lang="hu-HU"/>
-              <a:t>Harmadik szint</a:t>
-            </a:r>
-          </a:p>
-          <a:p>
-            <a:pPr lvl="3"/>
-            <a:r>
-              <a:rPr lang="hu-HU"/>
-              <a:t>Negyedik szint</a:t>
-            </a:r>
-          </a:p>
-          <a:p>
-            <a:pPr lvl="4"/>
-            <a:r>
-              <a:rPr lang="hu-HU"/>
-              <a:t>Ötödik szint</a:t>
-            </a:r>
-            <a:endParaRPr lang="en-US" dirty="0"/>
-          </a:p>
-        </p:txBody>
-      </p:sp>
-      <p:sp>
-        <p:nvSpPr>
-          <p:cNvPr id="7" name="Date Placeholder 3"/>
-          <p:cNvSpPr>
-            <a:spLocks noGrp="1"/>
-          </p:cNvSpPr>
-          <p:nvPr>
-            <p:ph type="dt" sz="half" idx="10"/>
-          </p:nvPr>
-        </p:nvSpPr>
-        <p:spPr/>
-        <p:txBody>
-          <a:bodyPr/>
-          <a:lstStyle/>
-          <a:p>
             <a:fld id="{57D76C4A-E1F9-49C1-BCE4-2E358991CE58}" type="datetimeFigureOut">
               <a:rPr lang="hu-HU" smtClean="0"/>
-              <a:t>2025. 11. 25.</a:t>
+              <a:t>2025. 12. 02.</a:t>
             </a:fld>
             <a:endParaRPr lang="hu-HU"/>
           </a:p>
@@ -3441,7 +3014,7 @@
     </p:spTree>
     <p:extLst>
       <p:ext uri="{BB962C8B-B14F-4D97-AF65-F5344CB8AC3E}">
-        <p14:creationId xmlns:p14="http://schemas.microsoft.com/office/powerpoint/2010/main" val="1597839343"/>
+        <p14:creationId xmlns:p14="http://schemas.microsoft.com/office/powerpoint/2010/main" val="2722148692"/>
       </p:ext>
     </p:extLst>
   </p:cSld>
@@ -3480,15 +3053,15 @@
         </p:nvSpPr>
         <p:spPr>
           <a:xfrm>
-            <a:off x="1154956" y="2861733"/>
-            <a:ext cx="8825657" cy="1915647"/>
+            <a:off x="1751013" y="3308581"/>
+            <a:ext cx="8686800" cy="1468800"/>
           </a:xfrm>
         </p:spPr>
         <p:txBody>
           <a:bodyPr anchor="b"/>
           <a:lstStyle>
-            <a:lvl1pPr algn="l">
-              <a:defRPr sz="4000" b="0" cap="none"/>
+            <a:lvl1pPr algn="r">
+              <a:defRPr sz="4000" b="0" cap="all"/>
             </a:lvl1pPr>
           </a:lstStyle>
           <a:p>
@@ -3512,22 +3085,32 @@
         </p:nvSpPr>
         <p:spPr>
           <a:xfrm>
-            <a:off x="1154955" y="4777381"/>
-            <a:ext cx="8825658" cy="860400"/>
+            <a:off x="1751011" y="4777381"/>
+            <a:ext cx="8686801" cy="860400"/>
           </a:xfrm>
         </p:spPr>
         <p:txBody>
-          <a:bodyPr anchor="t"/>
+          <a:bodyPr anchor="t">
+            <a:normAutofit/>
+          </a:bodyPr>
           <a:lstStyle>
-            <a:lvl1pPr marL="0" indent="0" algn="l">
-              <a:buNone/>
-              <a:defRPr sz="2000" cap="all">
-                <a:solidFill>
-                  <a:schemeClr val="bg2">
-                    <a:lumMod val="40000"/>
-                    <a:lumOff val="60000"/>
-                  </a:schemeClr>
-                </a:solidFill>
+            <a:lvl1pPr marL="0" indent="0" algn="r">
+              <a:buNone/>
+              <a:defRPr sz="2000">
+                <a:gradFill flip="none" rotWithShape="1">
+                  <a:gsLst>
+                    <a:gs pos="0">
+                      <a:schemeClr val="tx1"/>
+                    </a:gs>
+                    <a:gs pos="100000">
+                      <a:schemeClr val="tx1">
+                        <a:lumMod val="75000"/>
+                      </a:schemeClr>
+                    </a:gs>
+                  </a:gsLst>
+                  <a:lin ang="5400000" scaled="0"/>
+                  <a:tileRect/>
+                </a:gradFill>
               </a:defRPr>
             </a:lvl1pPr>
             <a:lvl2pPr marL="457200" indent="0">
@@ -3637,7 +3220,7 @@
           <a:p>
             <a:fld id="{57D76C4A-E1F9-49C1-BCE4-2E358991CE58}" type="datetimeFigureOut">
               <a:rPr lang="hu-HU" smtClean="0"/>
-              <a:t>2025. 11. 25.</a:t>
+              <a:t>2025. 12. 02.</a:t>
             </a:fld>
             <a:endParaRPr lang="hu-HU"/>
           </a:p>
@@ -3688,7 +3271,7 @@
     </p:spTree>
     <p:extLst>
       <p:ext uri="{BB962C8B-B14F-4D97-AF65-F5344CB8AC3E}">
-        <p14:creationId xmlns:p14="http://schemas.microsoft.com/office/powerpoint/2010/main" val="183509902"/>
+        <p14:creationId xmlns:p14="http://schemas.microsoft.com/office/powerpoint/2010/main" val="2658480824"/>
       </p:ext>
     </p:extLst>
   </p:cSld>
@@ -3750,8 +3333,8 @@
         </p:nvSpPr>
         <p:spPr>
           <a:xfrm>
-            <a:off x="1103312" y="2060575"/>
-            <a:ext cx="4396339" cy="4195763"/>
+            <a:off x="1141412" y="2666999"/>
+            <a:ext cx="4876800" cy="3124201"/>
           </a:xfrm>
         </p:spPr>
         <p:txBody>
@@ -3837,8 +3420,8 @@
         </p:nvSpPr>
         <p:spPr>
           <a:xfrm>
-            <a:off x="5654493" y="2056092"/>
-            <a:ext cx="4396341" cy="4200245"/>
+            <a:off x="6170612" y="2667000"/>
+            <a:ext cx="4876800" cy="3124200"/>
           </a:xfrm>
         </p:spPr>
         <p:txBody>
@@ -3929,7 +3512,7 @@
           <a:p>
             <a:fld id="{57D76C4A-E1F9-49C1-BCE4-2E358991CE58}" type="datetimeFigureOut">
               <a:rPr lang="hu-HU" smtClean="0"/>
-              <a:t>2025. 11. 25.</a:t>
+              <a:t>2025. 12. 02.</a:t>
             </a:fld>
             <a:endParaRPr lang="hu-HU"/>
           </a:p>
@@ -3980,7 +3563,7 @@
     </p:spTree>
     <p:extLst>
       <p:ext uri="{BB962C8B-B14F-4D97-AF65-F5344CB8AC3E}">
-        <p14:creationId xmlns:p14="http://schemas.microsoft.com/office/powerpoint/2010/main" val="3291883389"/>
+        <p14:creationId xmlns:p14="http://schemas.microsoft.com/office/powerpoint/2010/main" val="750281179"/>
       </p:ext>
     </p:extLst>
   </p:cSld>
@@ -4046,8 +3629,8 @@
         </p:nvSpPr>
         <p:spPr>
           <a:xfrm>
-            <a:off x="1103313" y="1905000"/>
-            <a:ext cx="4396338" cy="576262"/>
+            <a:off x="1429280" y="2658533"/>
+            <a:ext cx="4588931" cy="576262"/>
           </a:xfrm>
         </p:spPr>
         <p:txBody>
@@ -4057,14 +3640,7 @@
           <a:lstStyle>
             <a:lvl1pPr marL="0" indent="0">
               <a:buNone/>
-              <a:defRPr sz="2400" b="0">
-                <a:solidFill>
-                  <a:schemeClr val="bg2">
-                    <a:lumMod val="40000"/>
-                    <a:lumOff val="60000"/>
-                  </a:schemeClr>
-                </a:solidFill>
-              </a:defRPr>
+              <a:defRPr sz="2800" b="0"/>
             </a:lvl1pPr>
             <a:lvl2pPr marL="457200" indent="0">
               <a:buNone/>
@@ -4120,12 +3696,12 @@
         </p:nvSpPr>
         <p:spPr>
           <a:xfrm>
-            <a:off x="1103312" y="2514600"/>
-            <a:ext cx="4396339" cy="3741738"/>
+            <a:off x="1141412" y="3243262"/>
+            <a:ext cx="4876800" cy="2547937"/>
           </a:xfrm>
         </p:spPr>
         <p:txBody>
-          <a:bodyPr>
+          <a:bodyPr anchor="t">
             <a:normAutofit/>
           </a:bodyPr>
           <a:lstStyle>
@@ -4207,8 +3783,8 @@
         </p:nvSpPr>
         <p:spPr>
           <a:xfrm>
-            <a:off x="5654495" y="1905000"/>
-            <a:ext cx="4396339" cy="576262"/>
+            <a:off x="6443133" y="2667000"/>
+            <a:ext cx="4604280" cy="576262"/>
           </a:xfrm>
         </p:spPr>
         <p:txBody>
@@ -4218,14 +3794,7 @@
           <a:lstStyle>
             <a:lvl1pPr marL="0" indent="0">
               <a:buNone/>
-              <a:defRPr sz="2400" b="0">
-                <a:solidFill>
-                  <a:schemeClr val="bg2">
-                    <a:lumMod val="40000"/>
-                    <a:lumOff val="60000"/>
-                  </a:schemeClr>
-                </a:solidFill>
-              </a:defRPr>
+              <a:defRPr sz="2800" b="0"/>
             </a:lvl1pPr>
             <a:lvl2pPr marL="457200" indent="0">
               <a:buNone/>
@@ -4281,12 +3850,12 @@
         </p:nvSpPr>
         <p:spPr>
           <a:xfrm>
-            <a:off x="5654495" y="2514600"/>
-            <a:ext cx="4396339" cy="3741738"/>
+            <a:off x="6170612" y="3243262"/>
+            <a:ext cx="4876801" cy="2547937"/>
           </a:xfrm>
         </p:spPr>
         <p:txBody>
-          <a:bodyPr>
+          <a:bodyPr anchor="t">
             <a:normAutofit/>
           </a:bodyPr>
           <a:lstStyle>
@@ -4373,7 +3942,7 @@
           <a:p>
             <a:fld id="{57D76C4A-E1F9-49C1-BCE4-2E358991CE58}" type="datetimeFigureOut">
               <a:rPr lang="hu-HU" smtClean="0"/>
-              <a:t>2025. 11. 25.</a:t>
+              <a:t>2025. 12. 02.</a:t>
             </a:fld>
             <a:endParaRPr lang="hu-HU"/>
           </a:p>
@@ -4424,7 +3993,7 @@
     </p:spTree>
     <p:extLst>
       <p:ext uri="{BB962C8B-B14F-4D97-AF65-F5344CB8AC3E}">
-        <p14:creationId xmlns:p14="http://schemas.microsoft.com/office/powerpoint/2010/main" val="1006434578"/>
+        <p14:creationId xmlns:p14="http://schemas.microsoft.com/office/powerpoint/2010/main" val="677386007"/>
       </p:ext>
     </p:extLst>
   </p:cSld>
@@ -4476,7 +4045,7 @@
       </p:sp>
       <p:sp>
         <p:nvSpPr>
-          <p:cNvPr id="7" name="Date Placeholder 2"/>
+          <p:cNvPr id="3" name="Date Placeholder 2"/>
           <p:cNvSpPr>
             <a:spLocks noGrp="1"/>
           </p:cNvSpPr>
@@ -4491,7 +4060,7 @@
           <a:p>
             <a:fld id="{57D76C4A-E1F9-49C1-BCE4-2E358991CE58}" type="datetimeFigureOut">
               <a:rPr lang="hu-HU" smtClean="0"/>
-              <a:t>2025. 11. 25.</a:t>
+              <a:t>2025. 12. 02.</a:t>
             </a:fld>
             <a:endParaRPr lang="hu-HU"/>
           </a:p>
@@ -4499,7 +4068,7 @@
       </p:sp>
       <p:sp>
         <p:nvSpPr>
-          <p:cNvPr id="5" name="Footer Placeholder 3"/>
+          <p:cNvPr id="4" name="Footer Placeholder 3"/>
           <p:cNvSpPr>
             <a:spLocks noGrp="1"/>
           </p:cNvSpPr>
@@ -4518,7 +4087,7 @@
       </p:sp>
       <p:sp>
         <p:nvSpPr>
-          <p:cNvPr id="6" name="Slide Number Placeholder 4"/>
+          <p:cNvPr id="5" name="Slide Number Placeholder 4"/>
           <p:cNvSpPr>
             <a:spLocks noGrp="1"/>
           </p:cNvSpPr>
@@ -4542,7 +4111,7 @@
     </p:spTree>
     <p:extLst>
       <p:ext uri="{BB962C8B-B14F-4D97-AF65-F5344CB8AC3E}">
-        <p14:creationId xmlns:p14="http://schemas.microsoft.com/office/powerpoint/2010/main" val="727983523"/>
+        <p14:creationId xmlns:p14="http://schemas.microsoft.com/office/powerpoint/2010/main" val="635880897"/>
       </p:ext>
     </p:extLst>
   </p:cSld>
@@ -4571,7 +4140,7 @@
       </p:grpSpPr>
       <p:sp>
         <p:nvSpPr>
-          <p:cNvPr id="7" name="Date Placeholder 1"/>
+          <p:cNvPr id="2" name="Date Placeholder 1"/>
           <p:cNvSpPr>
             <a:spLocks noGrp="1"/>
           </p:cNvSpPr>
@@ -4586,7 +4155,7 @@
           <a:p>
             <a:fld id="{57D76C4A-E1F9-49C1-BCE4-2E358991CE58}" type="datetimeFigureOut">
               <a:rPr lang="hu-HU" smtClean="0"/>
-              <a:t>2025. 11. 25.</a:t>
+              <a:t>2025. 12. 02.</a:t>
             </a:fld>
             <a:endParaRPr lang="hu-HU"/>
           </a:p>
@@ -4594,7 +4163,7 @@
       </p:sp>
       <p:sp>
         <p:nvSpPr>
-          <p:cNvPr id="5" name="Footer Placeholder 2"/>
+          <p:cNvPr id="3" name="Footer Placeholder 2"/>
           <p:cNvSpPr>
             <a:spLocks noGrp="1"/>
           </p:cNvSpPr>
@@ -4613,7 +4182,7 @@
       </p:sp>
       <p:sp>
         <p:nvSpPr>
-          <p:cNvPr id="6" name="Slide Number Placeholder 3"/>
+          <p:cNvPr id="4" name="Slide Number Placeholder 3"/>
           <p:cNvSpPr>
             <a:spLocks noGrp="1"/>
           </p:cNvSpPr>
@@ -4637,7 +4206,7 @@
     </p:spTree>
     <p:extLst>
       <p:ext uri="{BB962C8B-B14F-4D97-AF65-F5344CB8AC3E}">
-        <p14:creationId xmlns:p14="http://schemas.microsoft.com/office/powerpoint/2010/main" val="509105824"/>
+        <p14:creationId xmlns:p14="http://schemas.microsoft.com/office/powerpoint/2010/main" val="1231302280"/>
       </p:ext>
     </p:extLst>
   </p:cSld>
@@ -4676,12 +4245,14 @@
         </p:nvSpPr>
         <p:spPr>
           <a:xfrm>
-            <a:off x="1154953" y="1447800"/>
-            <a:ext cx="3401064" cy="1447800"/>
+            <a:off x="1141411" y="1600200"/>
+            <a:ext cx="3549121" cy="1371600"/>
           </a:xfrm>
         </p:spPr>
         <p:txBody>
-          <a:bodyPr anchor="b"/>
+          <a:bodyPr anchor="b">
+            <a:normAutofit/>
+          </a:bodyPr>
           <a:lstStyle>
             <a:lvl1pPr algn="l">
               <a:defRPr sz="2400" b="0"/>
@@ -4708,8 +4279,8 @@
         </p:nvSpPr>
         <p:spPr>
           <a:xfrm>
-            <a:off x="4784616" y="1447800"/>
-            <a:ext cx="5195997" cy="4572000"/>
+            <a:off x="5103812" y="609601"/>
+            <a:ext cx="5943601" cy="5181600"/>
           </a:xfrm>
         </p:spPr>
         <p:txBody>
@@ -4795,16 +4366,18 @@
         </p:nvSpPr>
         <p:spPr>
           <a:xfrm>
-            <a:off x="1154953" y="3129280"/>
-            <a:ext cx="3401063" cy="2895599"/>
+            <a:off x="1141411" y="2971800"/>
+            <a:ext cx="3549121" cy="1828800"/>
           </a:xfrm>
         </p:spPr>
         <p:txBody>
-          <a:bodyPr/>
+          <a:bodyPr>
+            <a:normAutofit/>
+          </a:bodyPr>
           <a:lstStyle>
             <a:lvl1pPr marL="0" indent="0">
               <a:buNone/>
-              <a:defRPr sz="1400"/>
+              <a:defRPr sz="1600"/>
             </a:lvl1pPr>
             <a:lvl2pPr marL="457200" indent="0">
               <a:buNone/>
@@ -4850,7 +4423,7 @@
       </p:sp>
       <p:sp>
         <p:nvSpPr>
-          <p:cNvPr id="7" name="Date Placeholder 4"/>
+          <p:cNvPr id="5" name="Date Placeholder 4"/>
           <p:cNvSpPr>
             <a:spLocks noGrp="1"/>
           </p:cNvSpPr>
@@ -4865,7 +4438,7 @@
           <a:p>
             <a:fld id="{57D76C4A-E1F9-49C1-BCE4-2E358991CE58}" type="datetimeFigureOut">
               <a:rPr lang="hu-HU" smtClean="0"/>
-              <a:t>2025. 11. 25.</a:t>
+              <a:t>2025. 12. 02.</a:t>
             </a:fld>
             <a:endParaRPr lang="hu-HU"/>
           </a:p>
@@ -4873,7 +4446,7 @@
       </p:sp>
       <p:sp>
         <p:nvSpPr>
-          <p:cNvPr id="5" name="Footer Placeholder 5"/>
+          <p:cNvPr id="6" name="Footer Placeholder 5"/>
           <p:cNvSpPr>
             <a:spLocks noGrp="1"/>
           </p:cNvSpPr>
@@ -4892,7 +4465,7 @@
       </p:sp>
       <p:sp>
         <p:nvSpPr>
-          <p:cNvPr id="6" name="Slide Number Placeholder 6"/>
+          <p:cNvPr id="7" name="Slide Number Placeholder 6"/>
           <p:cNvSpPr>
             <a:spLocks noGrp="1"/>
           </p:cNvSpPr>
@@ -4916,7 +4489,7 @@
     </p:spTree>
     <p:extLst>
       <p:ext uri="{BB962C8B-B14F-4D97-AF65-F5344CB8AC3E}">
-        <p14:creationId xmlns:p14="http://schemas.microsoft.com/office/powerpoint/2010/main" val="384292886"/>
+        <p14:creationId xmlns:p14="http://schemas.microsoft.com/office/powerpoint/2010/main" val="3510035982"/>
       </p:ext>
     </p:extLst>
   </p:cSld>
@@ -4955,8 +4528,8 @@
         </p:nvSpPr>
         <p:spPr>
           <a:xfrm>
-            <a:off x="1153907" y="1854192"/>
-            <a:ext cx="5092906" cy="1574808"/>
+            <a:off x="1141411" y="1600200"/>
+            <a:ext cx="5334001" cy="1371600"/>
           </a:xfrm>
         </p:spPr>
         <p:txBody>
@@ -4965,7 +4538,7 @@
           </a:bodyPr>
           <a:lstStyle>
             <a:lvl1pPr algn="l">
-              <a:defRPr sz="3600" b="0"/>
+              <a:defRPr sz="2800" b="0"/>
             </a:lvl1pPr>
           </a:lstStyle>
           <a:p>
@@ -4979,7 +4552,7 @@
       </p:sp>
       <p:sp>
         <p:nvSpPr>
-          <p:cNvPr id="3" name="Picture Placeholder 2"/>
+          <p:cNvPr id="14" name="Picture Placeholder 2"/>
           <p:cNvSpPr>
             <a:spLocks noGrp="1" noChangeAspect="1"/>
           </p:cNvSpPr>
@@ -4989,20 +4562,31 @@
         </p:nvSpPr>
         <p:spPr>
           <a:xfrm>
-            <a:off x="6949546" y="1143000"/>
-            <a:ext cx="3200400" cy="4572000"/>
+            <a:off x="7433733" y="-18288"/>
+            <a:ext cx="3276599" cy="6903720"/>
           </a:xfrm>
-          <a:prstGeom prst="roundRect">
-            <a:avLst>
-              <a:gd name="adj" fmla="val 1858"/>
-            </a:avLst>
-          </a:prstGeom>
+          <a:ln w="38100">
+            <a:gradFill flip="none" rotWithShape="1">
+              <a:gsLst>
+                <a:gs pos="0">
+                  <a:schemeClr val="bg2"/>
+                </a:gs>
+                <a:gs pos="100000">
+                  <a:schemeClr val="bg2">
+                    <a:lumMod val="75000"/>
+                  </a:schemeClr>
+                </a:gs>
+              </a:gsLst>
+              <a:lin ang="5400000" scaled="0"/>
+              <a:tileRect/>
+            </a:gradFill>
+          </a:ln>
           <a:effectLst>
-            <a:outerShdw blurRad="50800" dist="50800" dir="5400000" algn="tl" rotWithShape="0">
+            <a:innerShdw blurRad="57150" dist="38100" dir="10800000">
               <a:srgbClr val="000000">
-                <a:alpha val="43000"/>
+                <a:alpha val="70000"/>
               </a:srgbClr>
-            </a:outerShdw>
+            </a:innerShdw>
           </a:effectLst>
         </p:spPr>
         <p:txBody>
@@ -5068,8 +4652,8 @@
         </p:nvSpPr>
         <p:spPr>
           <a:xfrm>
-            <a:off x="1154954" y="3657600"/>
-            <a:ext cx="5084979" cy="1371600"/>
+            <a:off x="1141411" y="2971800"/>
+            <a:ext cx="5334001" cy="1828800"/>
           </a:xfrm>
         </p:spPr>
         <p:txBody>
@@ -5079,7 +4663,7 @@
           <a:lstStyle>
             <a:lvl1pPr marL="0" indent="0">
               <a:buNone/>
-              <a:defRPr sz="1400"/>
+              <a:defRPr sz="1800"/>
             </a:lvl1pPr>
             <a:lvl2pPr marL="457200" indent="0">
               <a:buNone/>
@@ -5133,14 +4717,19 @@
             <p:ph type="dt" sz="half" idx="10"/>
           </p:nvPr>
         </p:nvSpPr>
-        <p:spPr/>
+        <p:spPr>
+          <a:xfrm>
+            <a:off x="6399212" y="5883275"/>
+            <a:ext cx="914400" cy="365125"/>
+          </a:xfrm>
+        </p:spPr>
         <p:txBody>
           <a:bodyPr/>
           <a:lstStyle/>
           <a:p>
             <a:fld id="{57D76C4A-E1F9-49C1-BCE4-2E358991CE58}" type="datetimeFigureOut">
               <a:rPr lang="hu-HU" smtClean="0"/>
-              <a:t>2025. 11. 25.</a:t>
+              <a:t>2025. 12. 02.</a:t>
             </a:fld>
             <a:endParaRPr lang="hu-HU"/>
           </a:p>
@@ -5156,7 +4745,12 @@
             <p:ph type="ftr" sz="quarter" idx="11"/>
           </p:nvPr>
         </p:nvSpPr>
-        <p:spPr/>
+        <p:spPr>
+          <a:xfrm>
+            <a:off x="1141412" y="5883275"/>
+            <a:ext cx="5105400" cy="365125"/>
+          </a:xfrm>
+        </p:spPr>
         <p:txBody>
           <a:bodyPr/>
           <a:lstStyle/>
@@ -5175,7 +4769,12 @@
             <p:ph type="sldNum" sz="quarter" idx="12"/>
           </p:nvPr>
         </p:nvSpPr>
-        <p:spPr/>
+        <p:spPr>
+          <a:xfrm>
+            <a:off x="10742612" y="5883275"/>
+            <a:ext cx="322567" cy="365125"/>
+          </a:xfrm>
+        </p:spPr>
         <p:txBody>
           <a:bodyPr/>
           <a:lstStyle/>
@@ -5191,7 +4790,7 @@
     </p:spTree>
     <p:extLst>
       <p:ext uri="{BB962C8B-B14F-4D97-AF65-F5344CB8AC3E}">
-        <p14:creationId xmlns:p14="http://schemas.microsoft.com/office/powerpoint/2010/main" val="1217950583"/>
+        <p14:creationId xmlns:p14="http://schemas.microsoft.com/office/powerpoint/2010/main" val="3031921078"/>
       </p:ext>
     </p:extLst>
   </p:cSld>
@@ -5223,425 +4822,232 @@
           <a:chExt cx="0" cy="0"/>
         </a:xfrm>
       </p:grpSpPr>
-      <p:pic>
-        <p:nvPicPr>
-          <p:cNvPr id="8" name="Picture 7"/>
-          <p:cNvPicPr>
-            <a:picLocks noChangeAspect="1"/>
-          </p:cNvPicPr>
-          <p:nvPr/>
-        </p:nvPicPr>
-        <p:blipFill rotWithShape="1">
-          <a:blip r:embed="rId19">
-            <a:extLst>
-              <a:ext uri="{28A0092B-C50C-407E-A947-70E740481C1C}">
-                <a14:useLocalDpi xmlns:a14="http://schemas.microsoft.com/office/drawing/2010/main" val="0"/>
-              </a:ext>
-            </a:extLst>
-          </a:blip>
-          <a:srcRect l="3613"/>
-          <a:stretch/>
-        </p:blipFill>
+      <p:sp>
+        <p:nvSpPr>
+          <p:cNvPr id="2" name="Title Placeholder 1"/>
+          <p:cNvSpPr>
+            <a:spLocks noGrp="1"/>
+          </p:cNvSpPr>
+          <p:nvPr>
+            <p:ph type="title"/>
+          </p:nvPr>
+        </p:nvSpPr>
         <p:spPr>
           <a:xfrm>
-            <a:off x="0" y="2669685"/>
-            <a:ext cx="4037012" cy="4188315"/>
+            <a:off x="1141413" y="609600"/>
+            <a:ext cx="9905998" cy="1905000"/>
           </a:xfrm>
           <a:prstGeom prst="rect">
             <a:avLst/>
           </a:prstGeom>
         </p:spPr>
-      </p:pic>
-      <p:pic>
-        <p:nvPicPr>
-          <p:cNvPr id="7" name="Picture 6"/>
-          <p:cNvPicPr>
-            <a:picLocks noChangeAspect="1"/>
-          </p:cNvPicPr>
-          <p:nvPr/>
-        </p:nvPicPr>
-        <p:blipFill rotWithShape="1">
-          <a:blip r:embed="rId20">
-            <a:extLst>
-              <a:ext uri="{28A0092B-C50C-407E-A947-70E740481C1C}">
-                <a14:useLocalDpi xmlns:a14="http://schemas.microsoft.com/office/drawing/2010/main" val="0"/>
-              </a:ext>
-            </a:extLst>
-          </a:blip>
-          <a:srcRect l="35640"/>
-          <a:stretch/>
-        </p:blipFill>
+        <p:txBody>
+          <a:bodyPr vert="horz" lIns="91440" tIns="45720" rIns="91440" bIns="45720" rtlCol="0" anchor="ctr">
+            <a:normAutofit/>
+          </a:bodyPr>
+          <a:lstStyle/>
+          <a:p>
+            <a:r>
+              <a:rPr lang="hu-HU"/>
+              <a:t>Mintacím szerkesztése</a:t>
+            </a:r>
+            <a:endParaRPr lang="en-US" dirty="0"/>
+          </a:p>
+        </p:txBody>
+      </p:sp>
+      <p:sp>
+        <p:nvSpPr>
+          <p:cNvPr id="3" name="Text Placeholder 2"/>
+          <p:cNvSpPr>
+            <a:spLocks noGrp="1"/>
+          </p:cNvSpPr>
+          <p:nvPr>
+            <p:ph type="body" idx="1"/>
+          </p:nvPr>
+        </p:nvSpPr>
         <p:spPr>
           <a:xfrm>
-            <a:off x="0" y="2892347"/>
-            <a:ext cx="1522412" cy="2365453"/>
+            <a:off x="1141413" y="2666999"/>
+            <a:ext cx="9905998" cy="3124201"/>
           </a:xfrm>
           <a:prstGeom prst="rect">
             <a:avLst/>
           </a:prstGeom>
         </p:spPr>
-      </p:pic>
-      <p:sp>
-        <p:nvSpPr>
-          <p:cNvPr id="16" name="Oval 15"/>
-          <p:cNvSpPr/>
-          <p:nvPr/>
+        <p:txBody>
+          <a:bodyPr vert="horz" lIns="91440" tIns="45720" rIns="91440" bIns="45720" rtlCol="0" anchor="ctr">
+            <a:normAutofit/>
+          </a:bodyPr>
+          <a:lstStyle/>
+          <a:p>
+            <a:pPr lvl="0"/>
+            <a:r>
+              <a:rPr lang="hu-HU"/>
+              <a:t>Mintaszöveg szerkesztése</a:t>
+            </a:r>
+          </a:p>
+          <a:p>
+            <a:pPr lvl="1"/>
+            <a:r>
+              <a:rPr lang="hu-HU"/>
+              <a:t>Második szint</a:t>
+            </a:r>
+          </a:p>
+          <a:p>
+            <a:pPr lvl="2"/>
+            <a:r>
+              <a:rPr lang="hu-HU"/>
+              <a:t>Harmadik szint</a:t>
+            </a:r>
+          </a:p>
+          <a:p>
+            <a:pPr lvl="3"/>
+            <a:r>
+              <a:rPr lang="hu-HU"/>
+              <a:t>Negyedik szint</a:t>
+            </a:r>
+          </a:p>
+          <a:p>
+            <a:pPr lvl="4"/>
+            <a:r>
+              <a:rPr lang="hu-HU"/>
+              <a:t>Ötödik szint</a:t>
+            </a:r>
+            <a:endParaRPr lang="en-US" dirty="0"/>
+          </a:p>
+        </p:txBody>
+      </p:sp>
+      <p:sp>
+        <p:nvSpPr>
+          <p:cNvPr id="4" name="Date Placeholder 3"/>
+          <p:cNvSpPr>
+            <a:spLocks noGrp="1"/>
+          </p:cNvSpPr>
+          <p:nvPr>
+            <p:ph type="dt" sz="half" idx="2"/>
+          </p:nvPr>
         </p:nvSpPr>
         <p:spPr>
           <a:xfrm>
-            <a:off x="8609012" y="1676400"/>
-            <a:ext cx="2819400" cy="2819400"/>
-          </a:xfrm>
-          <a:prstGeom prst="ellipse">
-            <a:avLst/>
-          </a:prstGeom>
-          <a:gradFill flip="none" rotWithShape="1">
-            <a:gsLst>
-              <a:gs pos="0">
-                <a:schemeClr val="bg2">
-                  <a:lumMod val="60000"/>
-                  <a:lumOff val="40000"/>
-                  <a:alpha val="7000"/>
-                </a:schemeClr>
-              </a:gs>
-              <a:gs pos="69000">
-                <a:schemeClr val="bg2">
-                  <a:lumMod val="60000"/>
-                  <a:lumOff val="40000"/>
-                  <a:alpha val="0"/>
-                </a:schemeClr>
-              </a:gs>
-              <a:gs pos="36000">
-                <a:schemeClr val="bg2">
-                  <a:lumMod val="60000"/>
-                  <a:lumOff val="40000"/>
-                  <a:alpha val="6000"/>
-                </a:schemeClr>
-              </a:gs>
-            </a:gsLst>
-            <a:path path="circle">
-              <a:fillToRect l="50000" t="50000" r="50000" b="50000"/>
-            </a:path>
-            <a:tileRect/>
-          </a:gradFill>
-          <a:ln>
-            <a:noFill/>
-          </a:ln>
-          <a:effectLst/>
-        </p:spPr>
-        <p:style>
-          <a:lnRef idx="1">
-            <a:schemeClr val="accent1"/>
-          </a:lnRef>
-          <a:fillRef idx="3">
-            <a:schemeClr val="accent1"/>
-          </a:fillRef>
-          <a:effectRef idx="2">
-            <a:schemeClr val="accent1"/>
-          </a:effectRef>
-          <a:fontRef idx="minor">
-            <a:schemeClr val="lt1"/>
-          </a:fontRef>
-        </p:style>
-      </p:sp>
-      <p:pic>
-        <p:nvPicPr>
-          <p:cNvPr id="9" name="Picture 8"/>
-          <p:cNvPicPr>
-            <a:picLocks noChangeAspect="1"/>
-          </p:cNvPicPr>
-          <p:nvPr/>
-        </p:nvPicPr>
-        <p:blipFill rotWithShape="1">
-          <a:blip r:embed="rId21">
-            <a:extLst>
-              <a:ext uri="{28A0092B-C50C-407E-A947-70E740481C1C}">
-                <a14:useLocalDpi xmlns:a14="http://schemas.microsoft.com/office/drawing/2010/main" val="0"/>
-              </a:ext>
-            </a:extLst>
-          </a:blip>
-          <a:srcRect t="28813"/>
-          <a:stretch/>
-        </p:blipFill>
-        <p:spPr>
-          <a:xfrm>
-            <a:off x="7999412" y="0"/>
-            <a:ext cx="1603387" cy="1141407"/>
+            <a:off x="8837612" y="5883275"/>
+            <a:ext cx="1600200" cy="365125"/>
           </a:xfrm>
           <a:prstGeom prst="rect">
             <a:avLst/>
           </a:prstGeom>
         </p:spPr>
-      </p:pic>
-      <p:pic>
-        <p:nvPicPr>
-          <p:cNvPr id="10" name="Picture 9"/>
-          <p:cNvPicPr>
-            <a:picLocks noChangeAspect="1"/>
-          </p:cNvPicPr>
-          <p:nvPr/>
-        </p:nvPicPr>
-        <p:blipFill rotWithShape="1">
-          <a:blip r:embed="rId22">
-            <a:extLst>
-              <a:ext uri="{28A0092B-C50C-407E-A947-70E740481C1C}">
-                <a14:useLocalDpi xmlns:a14="http://schemas.microsoft.com/office/drawing/2010/main" val="0"/>
-              </a:ext>
-            </a:extLst>
-          </a:blip>
-          <a:srcRect b="23320"/>
-          <a:stretch/>
-        </p:blipFill>
+        <p:txBody>
+          <a:bodyPr vert="horz" lIns="91440" tIns="45720" rIns="91440" bIns="45720" rtlCol="0" anchor="ctr"/>
+          <a:lstStyle>
+            <a:lvl1pPr algn="r">
+              <a:defRPr sz="900" b="1" i="0">
+                <a:solidFill>
+                  <a:schemeClr val="tx1">
+                    <a:lumMod val="75000"/>
+                  </a:schemeClr>
+                </a:solidFill>
+                <a:effectLst>
+                  <a:outerShdw blurRad="50800" dist="38100" dir="2700000" algn="tl" rotWithShape="0">
+                    <a:srgbClr val="000000">
+                      <a:alpha val="43000"/>
+                    </a:srgbClr>
+                  </a:outerShdw>
+                </a:effectLst>
+                <a:latin typeface="+mn-lt"/>
+              </a:defRPr>
+            </a:lvl1pPr>
+          </a:lstStyle>
+          <a:p>
+            <a:fld id="{57D76C4A-E1F9-49C1-BCE4-2E358991CE58}" type="datetimeFigureOut">
+              <a:rPr lang="hu-HU" smtClean="0"/>
+              <a:t>2025. 12. 02.</a:t>
+            </a:fld>
+            <a:endParaRPr lang="hu-HU"/>
+          </a:p>
+        </p:txBody>
+      </p:sp>
+      <p:sp>
+        <p:nvSpPr>
+          <p:cNvPr id="5" name="Footer Placeholder 4"/>
+          <p:cNvSpPr>
+            <a:spLocks noGrp="1"/>
+          </p:cNvSpPr>
+          <p:nvPr>
+            <p:ph type="ftr" sz="quarter" idx="3"/>
+          </p:nvPr>
+        </p:nvSpPr>
         <p:spPr>
           <a:xfrm>
-            <a:off x="8605878" y="6096000"/>
-            <a:ext cx="993734" cy="762000"/>
+            <a:off x="1141412" y="5883275"/>
+            <a:ext cx="7543800" cy="365125"/>
           </a:xfrm>
           <a:prstGeom prst="rect">
             <a:avLst/>
           </a:prstGeom>
         </p:spPr>
-      </p:pic>
-      <p:sp>
-        <p:nvSpPr>
-          <p:cNvPr id="14" name="Rectangle 13"/>
-          <p:cNvSpPr/>
-          <p:nvPr/>
+        <p:txBody>
+          <a:bodyPr vert="horz" lIns="91440" tIns="45720" rIns="91440" bIns="45720" rtlCol="0" anchor="ctr"/>
+          <a:lstStyle>
+            <a:lvl1pPr algn="l">
+              <a:defRPr sz="900" b="1" i="0">
+                <a:solidFill>
+                  <a:schemeClr val="tx1">
+                    <a:lumMod val="75000"/>
+                  </a:schemeClr>
+                </a:solidFill>
+                <a:effectLst>
+                  <a:outerShdw blurRad="50800" dist="38100" dir="2700000" algn="tl" rotWithShape="0">
+                    <a:srgbClr val="000000">
+                      <a:alpha val="43000"/>
+                    </a:srgbClr>
+                  </a:outerShdw>
+                </a:effectLst>
+                <a:latin typeface="+mn-lt"/>
+              </a:defRPr>
+            </a:lvl1pPr>
+          </a:lstStyle>
+          <a:p>
+            <a:endParaRPr lang="hu-HU"/>
+          </a:p>
+        </p:txBody>
+      </p:sp>
+      <p:sp>
+        <p:nvSpPr>
+          <p:cNvPr id="6" name="Slide Number Placeholder 5"/>
+          <p:cNvSpPr>
+            <a:spLocks noGrp="1"/>
+          </p:cNvSpPr>
+          <p:nvPr>
+            <p:ph type="sldNum" sz="quarter" idx="4"/>
+          </p:nvPr>
         </p:nvSpPr>
         <p:spPr>
           <a:xfrm>
-            <a:off x="10437812" y="0"/>
-            <a:ext cx="685800" cy="1143000"/>
-          </a:xfrm>
-          <a:prstGeom prst="rect">
-            <a:avLst/>
-          </a:prstGeom>
-          <a:solidFill>
-            <a:schemeClr val="accent1"/>
-          </a:solidFill>
-          <a:ln>
-            <a:noFill/>
-          </a:ln>
-        </p:spPr>
-        <p:style>
-          <a:lnRef idx="1">
-            <a:schemeClr val="accent1"/>
-          </a:lnRef>
-          <a:fillRef idx="3">
-            <a:schemeClr val="accent1"/>
-          </a:fillRef>
-          <a:effectRef idx="2">
-            <a:schemeClr val="accent1"/>
-          </a:effectRef>
-          <a:fontRef idx="minor">
-            <a:schemeClr val="lt1"/>
-          </a:fontRef>
-        </p:style>
-      </p:sp>
-      <p:sp>
-        <p:nvSpPr>
-          <p:cNvPr id="2" name="Title Placeholder 1"/>
-          <p:cNvSpPr>
-            <a:spLocks noGrp="1"/>
-          </p:cNvSpPr>
-          <p:nvPr>
-            <p:ph type="title"/>
-          </p:nvPr>
-        </p:nvSpPr>
-        <p:spPr>
-          <a:xfrm>
-            <a:off x="646111" y="452718"/>
-            <a:ext cx="9404723" cy="1400530"/>
+            <a:off x="10514012" y="5883275"/>
+            <a:ext cx="551167" cy="365125"/>
           </a:xfrm>
           <a:prstGeom prst="rect">
             <a:avLst/>
           </a:prstGeom>
         </p:spPr>
         <p:txBody>
-          <a:bodyPr vert="horz" lIns="91440" tIns="45720" rIns="91440" bIns="45720" rtlCol="0" anchor="t">
-            <a:noAutofit/>
-          </a:bodyPr>
-          <a:lstStyle/>
-          <a:p>
-            <a:r>
-              <a:rPr lang="hu-HU"/>
-              <a:t>Mintacím szerkesztése</a:t>
-            </a:r>
-            <a:endParaRPr lang="en-US" dirty="0"/>
-          </a:p>
-        </p:txBody>
-      </p:sp>
-      <p:sp>
-        <p:nvSpPr>
-          <p:cNvPr id="3" name="Text Placeholder 2"/>
-          <p:cNvSpPr>
-            <a:spLocks noGrp="1"/>
-          </p:cNvSpPr>
-          <p:nvPr>
-            <p:ph type="body" idx="1"/>
-          </p:nvPr>
-        </p:nvSpPr>
-        <p:spPr>
-          <a:xfrm>
-            <a:off x="1103312" y="2052918"/>
-            <a:ext cx="8946541" cy="4195481"/>
-          </a:xfrm>
-          <a:prstGeom prst="rect">
-            <a:avLst/>
-          </a:prstGeom>
-        </p:spPr>
-        <p:txBody>
-          <a:bodyPr vert="horz" lIns="91440" tIns="45720" rIns="91440" bIns="45720" rtlCol="0">
-            <a:normAutofit/>
-          </a:bodyPr>
-          <a:lstStyle/>
-          <a:p>
-            <a:pPr lvl="0"/>
-            <a:r>
-              <a:rPr lang="hu-HU"/>
-              <a:t>Mintaszöveg szerkesztése</a:t>
-            </a:r>
-          </a:p>
-          <a:p>
-            <a:pPr lvl="1"/>
-            <a:r>
-              <a:rPr lang="hu-HU"/>
-              <a:t>Második szint</a:t>
-            </a:r>
-          </a:p>
-          <a:p>
-            <a:pPr lvl="2"/>
-            <a:r>
-              <a:rPr lang="hu-HU"/>
-              <a:t>Harmadik szint</a:t>
-            </a:r>
-          </a:p>
-          <a:p>
-            <a:pPr lvl="3"/>
-            <a:r>
-              <a:rPr lang="hu-HU"/>
-              <a:t>Negyedik szint</a:t>
-            </a:r>
-          </a:p>
-          <a:p>
-            <a:pPr lvl="4"/>
-            <a:r>
-              <a:rPr lang="hu-HU"/>
-              <a:t>Ötödik szint</a:t>
-            </a:r>
-            <a:endParaRPr lang="en-US" dirty="0"/>
-          </a:p>
-        </p:txBody>
-      </p:sp>
-      <p:sp>
-        <p:nvSpPr>
-          <p:cNvPr id="4" name="Date Placeholder 3"/>
-          <p:cNvSpPr>
-            <a:spLocks noGrp="1"/>
-          </p:cNvSpPr>
-          <p:nvPr>
-            <p:ph type="dt" sz="half" idx="2"/>
-          </p:nvPr>
-        </p:nvSpPr>
-        <p:spPr>
-          <a:xfrm rot="5400000">
-            <a:off x="10155639" y="1790701"/>
-            <a:ext cx="990599" cy="304799"/>
-          </a:xfrm>
-          <a:prstGeom prst="rect">
-            <a:avLst/>
-          </a:prstGeom>
-        </p:spPr>
-        <p:txBody>
-          <a:bodyPr vert="horz" lIns="91440" tIns="45720" rIns="91440" bIns="45720" rtlCol="0" anchor="t"/>
+          <a:bodyPr vert="horz" lIns="91440" tIns="45720" rIns="91440" bIns="45720" rtlCol="0" anchor="ctr"/>
           <a:lstStyle>
-            <a:lvl1pPr algn="l">
-              <a:defRPr sz="1100" b="0" i="0">
+            <a:lvl1pPr algn="r">
+              <a:defRPr sz="900" b="1" i="0">
                 <a:solidFill>
                   <a:schemeClr val="tx1">
-                    <a:tint val="75000"/>
-                    <a:alpha val="60000"/>
+                    <a:lumMod val="75000"/>
                   </a:schemeClr>
                 </a:solidFill>
-              </a:defRPr>
-            </a:lvl1pPr>
-          </a:lstStyle>
-          <a:p>
-            <a:fld id="{57D76C4A-E1F9-49C1-BCE4-2E358991CE58}" type="datetimeFigureOut">
-              <a:rPr lang="hu-HU" smtClean="0"/>
-              <a:t>2025. 11. 25.</a:t>
-            </a:fld>
-            <a:endParaRPr lang="hu-HU"/>
-          </a:p>
-        </p:txBody>
-      </p:sp>
-      <p:sp>
-        <p:nvSpPr>
-          <p:cNvPr id="5" name="Footer Placeholder 4"/>
-          <p:cNvSpPr>
-            <a:spLocks noGrp="1"/>
-          </p:cNvSpPr>
-          <p:nvPr>
-            <p:ph type="ftr" sz="quarter" idx="3"/>
-          </p:nvPr>
-        </p:nvSpPr>
-        <p:spPr>
-          <a:xfrm rot="5400000">
-            <a:off x="8951573" y="3225297"/>
-            <a:ext cx="3859795" cy="304801"/>
-          </a:xfrm>
-          <a:prstGeom prst="rect">
-            <a:avLst/>
-          </a:prstGeom>
-        </p:spPr>
-        <p:txBody>
-          <a:bodyPr vert="horz" lIns="91440" tIns="45720" rIns="91440" bIns="45720" rtlCol="0" anchor="b"/>
-          <a:lstStyle>
-            <a:lvl1pPr algn="l">
-              <a:defRPr sz="1100" b="0" i="0">
-                <a:solidFill>
-                  <a:schemeClr val="tx1">
-                    <a:tint val="75000"/>
-                    <a:alpha val="60000"/>
-                  </a:schemeClr>
-                </a:solidFill>
-              </a:defRPr>
-            </a:lvl1pPr>
-          </a:lstStyle>
-          <a:p>
-            <a:endParaRPr lang="hu-HU"/>
-          </a:p>
-        </p:txBody>
-      </p:sp>
-      <p:sp>
-        <p:nvSpPr>
-          <p:cNvPr id="6" name="Slide Number Placeholder 5"/>
-          <p:cNvSpPr>
-            <a:spLocks noGrp="1"/>
-          </p:cNvSpPr>
-          <p:nvPr>
-            <p:ph type="sldNum" sz="quarter" idx="4"/>
-          </p:nvPr>
-        </p:nvSpPr>
-        <p:spPr bwMode="gray">
-          <a:xfrm>
-            <a:off x="10352540" y="295729"/>
-            <a:ext cx="838199" cy="767687"/>
-          </a:xfrm>
-          <a:prstGeom prst="rect">
-            <a:avLst/>
-          </a:prstGeom>
-        </p:spPr>
-        <p:txBody>
-          <a:bodyPr vert="horz" lIns="91440" tIns="45720" rIns="91440" bIns="45720" rtlCol="0" anchor="b"/>
-          <a:lstStyle>
-            <a:lvl1pPr algn="ctr">
-              <a:defRPr sz="2800" b="0" i="0">
-                <a:solidFill>
-                  <a:schemeClr val="tx1">
-                    <a:tint val="75000"/>
-                  </a:schemeClr>
-                </a:solidFill>
+                <a:effectLst>
+                  <a:outerShdw blurRad="50800" dist="38100" dir="2700000" algn="tl" rotWithShape="0">
+                    <a:srgbClr val="000000">
+                      <a:alpha val="43000"/>
+                    </a:srgbClr>
+                  </a:outerShdw>
+                </a:effectLst>
+                <a:latin typeface="+mn-lt"/>
               </a:defRPr>
             </a:lvl1pPr>
           </a:lstStyle>
@@ -5657,29 +5063,29 @@
     </p:spTree>
     <p:extLst>
       <p:ext uri="{BB962C8B-B14F-4D97-AF65-F5344CB8AC3E}">
-        <p14:creationId xmlns:p14="http://schemas.microsoft.com/office/powerpoint/2010/main" val="37039383"/>
+        <p14:creationId xmlns:p14="http://schemas.microsoft.com/office/powerpoint/2010/main" val="3094202884"/>
       </p:ext>
     </p:extLst>
   </p:cSld>
   <p:clrMap bg1="dk1" tx1="lt1" bg2="dk2" tx2="lt2" accent1="accent1" accent2="accent2" accent3="accent3" accent4="accent4" accent5="accent5" accent6="accent6" hlink="hlink" folHlink="folHlink"/>
   <p:sldLayoutIdLst>
-    <p:sldLayoutId id="2147483804" r:id="rId1"/>
-    <p:sldLayoutId id="2147483805" r:id="rId2"/>
-    <p:sldLayoutId id="2147483806" r:id="rId3"/>
-    <p:sldLayoutId id="2147483807" r:id="rId4"/>
-    <p:sldLayoutId id="2147483808" r:id="rId5"/>
-    <p:sldLayoutId id="2147483809" r:id="rId6"/>
-    <p:sldLayoutId id="2147483810" r:id="rId7"/>
-    <p:sldLayoutId id="2147483811" r:id="rId8"/>
-    <p:sldLayoutId id="2147483812" r:id="rId9"/>
-    <p:sldLayoutId id="2147483813" r:id="rId10"/>
-    <p:sldLayoutId id="2147483814" r:id="rId11"/>
-    <p:sldLayoutId id="2147483815" r:id="rId12"/>
-    <p:sldLayoutId id="2147483816" r:id="rId13"/>
-    <p:sldLayoutId id="2147483817" r:id="rId14"/>
-    <p:sldLayoutId id="2147483818" r:id="rId15"/>
-    <p:sldLayoutId id="2147483819" r:id="rId16"/>
-    <p:sldLayoutId id="2147483820" r:id="rId17"/>
+    <p:sldLayoutId id="2147483942" r:id="rId1"/>
+    <p:sldLayoutId id="2147483943" r:id="rId2"/>
+    <p:sldLayoutId id="2147483944" r:id="rId3"/>
+    <p:sldLayoutId id="2147483945" r:id="rId4"/>
+    <p:sldLayoutId id="2147483946" r:id="rId5"/>
+    <p:sldLayoutId id="2147483947" r:id="rId6"/>
+    <p:sldLayoutId id="2147483948" r:id="rId7"/>
+    <p:sldLayoutId id="2147483949" r:id="rId8"/>
+    <p:sldLayoutId id="2147483950" r:id="rId9"/>
+    <p:sldLayoutId id="2147483951" r:id="rId10"/>
+    <p:sldLayoutId id="2147483952" r:id="rId11"/>
+    <p:sldLayoutId id="2147483953" r:id="rId12"/>
+    <p:sldLayoutId id="2147483954" r:id="rId13"/>
+    <p:sldLayoutId id="2147483955" r:id="rId14"/>
+    <p:sldLayoutId id="2147483956" r:id="rId15"/>
+    <p:sldLayoutId id="2147483957" r:id="rId16"/>
+    <p:sldLayoutId id="2147483958" r:id="rId17"/>
   </p:sldLayoutIdLst>
   <p:txStyles>
     <p:titleStyle>
@@ -5688,10 +5094,38 @@
           <a:spcPct val="0"/>
         </a:spcBef>
         <a:buNone/>
-        <a:defRPr sz="4200" b="0" i="0" kern="1200">
-          <a:solidFill>
-            <a:schemeClr val="tx2"/>
-          </a:solidFill>
+        <a:defRPr sz="3200" kern="1200" cap="all">
+          <a:ln w="3175" cmpd="sng">
+            <a:noFill/>
+          </a:ln>
+          <a:gradFill flip="none" rotWithShape="1">
+            <a:gsLst>
+              <a:gs pos="0">
+                <a:schemeClr val="tx1"/>
+              </a:gs>
+              <a:gs pos="100000">
+                <a:schemeClr val="tx1">
+                  <a:lumMod val="65000"/>
+                </a:schemeClr>
+              </a:gs>
+            </a:gsLst>
+            <a:lin ang="5580000" scaled="0"/>
+            <a:tileRect/>
+          </a:gradFill>
+          <a:effectLst>
+            <a:glow rad="38100">
+              <a:schemeClr val="bg1">
+                <a:lumMod val="65000"/>
+                <a:lumOff val="35000"/>
+                <a:alpha val="40000"/>
+              </a:schemeClr>
+            </a:glow>
+            <a:outerShdw blurRad="28575" dist="38100" dir="14040000" algn="tl" rotWithShape="0">
+              <a:srgbClr val="000000">
+                <a:alpha val="25000"/>
+              </a:srgbClr>
+            </a:outerShdw>
+          </a:effectLst>
           <a:latin typeface="+mj-lt"/>
           <a:ea typeface="+mj-ea"/>
           <a:cs typeface="+mj-cs"/>
@@ -5755,229 +5189,427 @@
       </a:lvl9pPr>
     </p:titleStyle>
     <p:bodyStyle>
-      <a:lvl1pPr marL="342900" indent="-342900" algn="l" defTabSz="457200" rtl="0" eaLnBrk="1" latinLnBrk="0" hangingPunct="1">
+      <a:lvl1pPr marL="285750" indent="-285750" algn="l" defTabSz="457200" rtl="0" eaLnBrk="1" latinLnBrk="0" hangingPunct="1">
         <a:spcBef>
-          <a:spcPts val="1000"/>
+          <a:spcPct val="20000"/>
         </a:spcBef>
         <a:spcAft>
-          <a:spcPts val="0"/>
+          <a:spcPts val="600"/>
         </a:spcAft>
         <a:buClr>
-          <a:schemeClr val="bg2">
-            <a:lumMod val="40000"/>
-            <a:lumOff val="60000"/>
-          </a:schemeClr>
+          <a:schemeClr val="tx1"/>
         </a:buClr>
-        <a:buSzPct val="80000"/>
-        <a:buFont typeface="Wingdings 3" charset="2"/>
-        <a:buChar char=""/>
-        <a:defRPr sz="2000" b="0" i="0" kern="1200">
-          <a:solidFill>
-            <a:schemeClr val="tx1"/>
-          </a:solidFill>
-          <a:latin typeface="+mj-lt"/>
-          <a:ea typeface="+mj-ea"/>
-          <a:cs typeface="+mj-cs"/>
+        <a:buSzPct val="100000"/>
+        <a:buFont typeface="Arial"/>
+        <a:buChar char="•"/>
+        <a:defRPr sz="2000" kern="1200" cap="small">
+          <a:gradFill flip="none" rotWithShape="1">
+            <a:gsLst>
+              <a:gs pos="0">
+                <a:schemeClr val="tx1"/>
+              </a:gs>
+              <a:gs pos="100000">
+                <a:schemeClr val="tx1">
+                  <a:lumMod val="75000"/>
+                </a:schemeClr>
+              </a:gs>
+            </a:gsLst>
+            <a:lin ang="5580000" scaled="0"/>
+            <a:tileRect/>
+          </a:gradFill>
+          <a:effectLst>
+            <a:glow rad="38100">
+              <a:schemeClr val="bg1">
+                <a:lumMod val="50000"/>
+                <a:lumOff val="50000"/>
+                <a:alpha val="20000"/>
+              </a:schemeClr>
+            </a:glow>
+            <a:outerShdw blurRad="44450" dist="12700" dir="13860000" algn="tl" rotWithShape="0">
+              <a:srgbClr val="000000">
+                <a:alpha val="20000"/>
+              </a:srgbClr>
+            </a:outerShdw>
+          </a:effectLst>
+          <a:latin typeface="+mn-lt"/>
+          <a:ea typeface="+mn-ea"/>
+          <a:cs typeface="+mn-cs"/>
         </a:defRPr>
       </a:lvl1pPr>
       <a:lvl2pPr marL="742950" indent="-285750" algn="l" defTabSz="457200" rtl="0" eaLnBrk="1" latinLnBrk="0" hangingPunct="1">
         <a:spcBef>
-          <a:spcPts val="1000"/>
+          <a:spcPct val="20000"/>
         </a:spcBef>
         <a:spcAft>
-          <a:spcPts val="0"/>
+          <a:spcPts val="600"/>
         </a:spcAft>
         <a:buClr>
-          <a:schemeClr val="bg2">
-            <a:lumMod val="40000"/>
-            <a:lumOff val="60000"/>
-          </a:schemeClr>
+          <a:schemeClr val="tx1"/>
         </a:buClr>
-        <a:buSzPct val="80000"/>
-        <a:buFont typeface="Wingdings 3" charset="2"/>
-        <a:buChar char=""/>
-        <a:defRPr sz="1800" b="0" i="0" kern="1200">
-          <a:solidFill>
-            <a:schemeClr val="tx1"/>
-          </a:solidFill>
-          <a:latin typeface="+mj-lt"/>
-          <a:ea typeface="+mj-ea"/>
-          <a:cs typeface="+mj-cs"/>
+        <a:buSzPct val="100000"/>
+        <a:buFont typeface="Arial"/>
+        <a:buChar char="•"/>
+        <a:defRPr sz="1800" kern="1200" cap="small">
+          <a:gradFill flip="none" rotWithShape="1">
+            <a:gsLst>
+              <a:gs pos="0">
+                <a:schemeClr val="tx1"/>
+              </a:gs>
+              <a:gs pos="100000">
+                <a:schemeClr val="tx1">
+                  <a:lumMod val="75000"/>
+                </a:schemeClr>
+              </a:gs>
+            </a:gsLst>
+            <a:lin ang="5580000" scaled="0"/>
+            <a:tileRect/>
+          </a:gradFill>
+          <a:effectLst>
+            <a:glow rad="38100">
+              <a:schemeClr val="bg1">
+                <a:lumMod val="50000"/>
+                <a:lumOff val="50000"/>
+                <a:alpha val="20000"/>
+              </a:schemeClr>
+            </a:glow>
+            <a:outerShdw blurRad="44450" dist="12700" dir="13860000" algn="tl" rotWithShape="0">
+              <a:srgbClr val="000000">
+                <a:alpha val="20000"/>
+              </a:srgbClr>
+            </a:outerShdw>
+          </a:effectLst>
+          <a:latin typeface="+mn-lt"/>
+          <a:ea typeface="+mn-ea"/>
+          <a:cs typeface="+mn-cs"/>
         </a:defRPr>
       </a:lvl2pPr>
-      <a:lvl3pPr marL="1143000" indent="-228600" algn="l" defTabSz="457200" rtl="0" eaLnBrk="1" latinLnBrk="0" hangingPunct="1">
+      <a:lvl3pPr marL="1200150" indent="-285750" algn="l" defTabSz="457200" rtl="0" eaLnBrk="1" latinLnBrk="0" hangingPunct="1">
         <a:spcBef>
-          <a:spcPts val="1000"/>
+          <a:spcPct val="20000"/>
         </a:spcBef>
         <a:spcAft>
-          <a:spcPts val="0"/>
+          <a:spcPts val="600"/>
         </a:spcAft>
         <a:buClr>
-          <a:schemeClr val="bg2">
-            <a:lumMod val="40000"/>
-            <a:lumOff val="60000"/>
-          </a:schemeClr>
+          <a:schemeClr val="tx1"/>
         </a:buClr>
-        <a:buSzPct val="80000"/>
-        <a:buFont typeface="Wingdings 3" charset="2"/>
-        <a:buChar char=""/>
-        <a:defRPr sz="1600" b="0" i="0" kern="1200">
-          <a:solidFill>
-            <a:schemeClr val="tx1"/>
-          </a:solidFill>
-          <a:latin typeface="+mj-lt"/>
-          <a:ea typeface="+mj-ea"/>
-          <a:cs typeface="+mj-cs"/>
+        <a:buSzPct val="100000"/>
+        <a:buFont typeface="Arial"/>
+        <a:buChar char="•"/>
+        <a:defRPr sz="1600" kern="1200" cap="small">
+          <a:gradFill flip="none" rotWithShape="1">
+            <a:gsLst>
+              <a:gs pos="0">
+                <a:schemeClr val="tx1"/>
+              </a:gs>
+              <a:gs pos="100000">
+                <a:schemeClr val="tx1">
+                  <a:lumMod val="75000"/>
+                </a:schemeClr>
+              </a:gs>
+            </a:gsLst>
+            <a:lin ang="5580000" scaled="0"/>
+            <a:tileRect/>
+          </a:gradFill>
+          <a:effectLst>
+            <a:glow rad="38100">
+              <a:schemeClr val="bg1">
+                <a:lumMod val="50000"/>
+                <a:lumOff val="50000"/>
+                <a:alpha val="20000"/>
+              </a:schemeClr>
+            </a:glow>
+            <a:outerShdw blurRad="44450" dist="12700" dir="13860000" algn="tl" rotWithShape="0">
+              <a:srgbClr val="000000">
+                <a:alpha val="20000"/>
+              </a:srgbClr>
+            </a:outerShdw>
+          </a:effectLst>
+          <a:latin typeface="+mn-lt"/>
+          <a:ea typeface="+mn-ea"/>
+          <a:cs typeface="+mn-cs"/>
         </a:defRPr>
       </a:lvl3pPr>
-      <a:lvl4pPr marL="1600200" indent="-228600" algn="l" defTabSz="457200" rtl="0" eaLnBrk="1" latinLnBrk="0" hangingPunct="1">
+      <a:lvl4pPr marL="1543050" indent="-171450" algn="l" defTabSz="457200" rtl="0" eaLnBrk="1" latinLnBrk="0" hangingPunct="1">
         <a:spcBef>
-          <a:spcPts val="1000"/>
+          <a:spcPct val="20000"/>
         </a:spcBef>
         <a:spcAft>
-          <a:spcPts val="0"/>
+          <a:spcPts val="600"/>
         </a:spcAft>
         <a:buClr>
-          <a:schemeClr val="bg2">
-            <a:lumMod val="40000"/>
-            <a:lumOff val="60000"/>
-          </a:schemeClr>
+          <a:schemeClr val="tx1"/>
         </a:buClr>
-        <a:buSzPct val="80000"/>
-        <a:buFont typeface="Wingdings 3" charset="2"/>
-        <a:buChar char=""/>
-        <a:defRPr sz="1400" b="0" i="0" kern="1200">
-          <a:solidFill>
-            <a:schemeClr val="tx1"/>
-          </a:solidFill>
-          <a:latin typeface="+mj-lt"/>
-          <a:ea typeface="+mj-ea"/>
-          <a:cs typeface="+mj-cs"/>
+        <a:buSzPct val="100000"/>
+        <a:buFont typeface="Arial"/>
+        <a:buChar char="•"/>
+        <a:defRPr sz="1400" kern="1200" cap="small">
+          <a:gradFill flip="none" rotWithShape="1">
+            <a:gsLst>
+              <a:gs pos="0">
+                <a:schemeClr val="tx1"/>
+              </a:gs>
+              <a:gs pos="100000">
+                <a:schemeClr val="tx1">
+                  <a:lumMod val="75000"/>
+                </a:schemeClr>
+              </a:gs>
+            </a:gsLst>
+            <a:lin ang="5580000" scaled="0"/>
+            <a:tileRect/>
+          </a:gradFill>
+          <a:effectLst>
+            <a:glow rad="38100">
+              <a:schemeClr val="bg1">
+                <a:lumMod val="50000"/>
+                <a:lumOff val="50000"/>
+                <a:alpha val="20000"/>
+              </a:schemeClr>
+            </a:glow>
+            <a:outerShdw blurRad="44450" dist="12700" dir="13860000" algn="tl" rotWithShape="0">
+              <a:srgbClr val="000000">
+                <a:alpha val="20000"/>
+              </a:srgbClr>
+            </a:outerShdw>
+          </a:effectLst>
+          <a:latin typeface="+mn-lt"/>
+          <a:ea typeface="+mn-ea"/>
+          <a:cs typeface="+mn-cs"/>
         </a:defRPr>
       </a:lvl4pPr>
-      <a:lvl5pPr marL="2057400" indent="-228600" algn="l" defTabSz="457200" rtl="0" eaLnBrk="1" latinLnBrk="0" hangingPunct="1">
+      <a:lvl5pPr marL="2000250" indent="-171450" algn="l" defTabSz="457200" rtl="0" eaLnBrk="1" latinLnBrk="0" hangingPunct="1">
         <a:spcBef>
-          <a:spcPts val="1000"/>
+          <a:spcPct val="20000"/>
         </a:spcBef>
         <a:spcAft>
-          <a:spcPts val="0"/>
+          <a:spcPts val="600"/>
         </a:spcAft>
         <a:buClr>
-          <a:schemeClr val="bg2">
-            <a:lumMod val="40000"/>
-            <a:lumOff val="60000"/>
-          </a:schemeClr>
+          <a:schemeClr val="tx1"/>
         </a:buClr>
-        <a:buSzPct val="80000"/>
-        <a:buFont typeface="Wingdings 3" charset="2"/>
-        <a:buChar char=""/>
-        <a:defRPr sz="1400" b="0" i="0" kern="1200">
-          <a:solidFill>
-            <a:schemeClr val="tx1"/>
-          </a:solidFill>
-          <a:latin typeface="+mj-lt"/>
-          <a:ea typeface="+mj-ea"/>
-          <a:cs typeface="+mj-cs"/>
+        <a:buSzPct val="100000"/>
+        <a:buFont typeface="Arial"/>
+        <a:buChar char="•"/>
+        <a:defRPr sz="1400" kern="1200" cap="small">
+          <a:gradFill flip="none" rotWithShape="1">
+            <a:gsLst>
+              <a:gs pos="0">
+                <a:schemeClr val="tx1"/>
+              </a:gs>
+              <a:gs pos="100000">
+                <a:schemeClr val="tx1">
+                  <a:lumMod val="75000"/>
+                </a:schemeClr>
+              </a:gs>
+            </a:gsLst>
+            <a:lin ang="5580000" scaled="0"/>
+            <a:tileRect/>
+          </a:gradFill>
+          <a:effectLst>
+            <a:glow rad="38100">
+              <a:schemeClr val="bg1">
+                <a:lumMod val="50000"/>
+                <a:lumOff val="50000"/>
+                <a:alpha val="20000"/>
+              </a:schemeClr>
+            </a:glow>
+            <a:outerShdw blurRad="44450" dist="12700" dir="13860000" algn="tl" rotWithShape="0">
+              <a:srgbClr val="000000">
+                <a:alpha val="20000"/>
+              </a:srgbClr>
+            </a:outerShdw>
+          </a:effectLst>
+          <a:latin typeface="+mn-lt"/>
+          <a:ea typeface="+mn-ea"/>
+          <a:cs typeface="+mn-cs"/>
         </a:defRPr>
       </a:lvl5pPr>
-      <a:lvl6pPr marL="2506000" indent="-228600" algn="l" defTabSz="457200" rtl="0" eaLnBrk="1" latinLnBrk="0" hangingPunct="1">
+      <a:lvl6pPr marL="2514600" indent="-228600" algn="l" defTabSz="457200" rtl="0" eaLnBrk="1" latinLnBrk="0" hangingPunct="1">
         <a:spcBef>
-          <a:spcPts val="1000"/>
+          <a:spcPct val="20000"/>
         </a:spcBef>
         <a:spcAft>
-          <a:spcPts val="0"/>
+          <a:spcPts val="600"/>
         </a:spcAft>
         <a:buClr>
-          <a:schemeClr val="bg2">
-            <a:lumMod val="40000"/>
-            <a:lumOff val="60000"/>
-          </a:schemeClr>
+          <a:schemeClr val="tx1"/>
         </a:buClr>
-        <a:buSzPct val="80000"/>
-        <a:buFont typeface="Wingdings 3" charset="2"/>
-        <a:buChar char=""/>
-        <a:defRPr sz="1400" b="0" i="0" kern="1200">
-          <a:solidFill>
-            <a:schemeClr val="tx1"/>
-          </a:solidFill>
-          <a:latin typeface="+mj-lt"/>
-          <a:ea typeface="+mj-ea"/>
-          <a:cs typeface="+mj-cs"/>
+        <a:buSzPct val="100000"/>
+        <a:buFont typeface="Arial"/>
+        <a:buChar char="•"/>
+        <a:defRPr sz="1200" kern="1200" cap="small">
+          <a:gradFill flip="none" rotWithShape="1">
+            <a:gsLst>
+              <a:gs pos="0">
+                <a:schemeClr val="tx1"/>
+              </a:gs>
+              <a:gs pos="100000">
+                <a:schemeClr val="tx1">
+                  <a:lumMod val="75000"/>
+                </a:schemeClr>
+              </a:gs>
+            </a:gsLst>
+            <a:lin ang="5580000" scaled="0"/>
+            <a:tileRect/>
+          </a:gradFill>
+          <a:effectLst>
+            <a:glow rad="38100">
+              <a:schemeClr val="bg1">
+                <a:lumMod val="50000"/>
+                <a:lumOff val="50000"/>
+                <a:alpha val="20000"/>
+              </a:schemeClr>
+            </a:glow>
+            <a:outerShdw blurRad="44450" dist="12700" dir="13860000" algn="tl" rotWithShape="0">
+              <a:srgbClr val="000000">
+                <a:alpha val="20000"/>
+              </a:srgbClr>
+            </a:outerShdw>
+          </a:effectLst>
+          <a:latin typeface="+mn-lt"/>
+          <a:ea typeface="+mn-ea"/>
+          <a:cs typeface="+mn-cs"/>
         </a:defRPr>
       </a:lvl6pPr>
       <a:lvl7pPr marL="2971800" indent="-228600" algn="l" defTabSz="457200" rtl="0" eaLnBrk="1" latinLnBrk="0" hangingPunct="1">
         <a:spcBef>
-          <a:spcPts val="1000"/>
+          <a:spcPct val="20000"/>
         </a:spcBef>
         <a:spcAft>
-          <a:spcPts val="0"/>
+          <a:spcPts val="600"/>
         </a:spcAft>
         <a:buClr>
-          <a:schemeClr val="bg2">
-            <a:lumMod val="40000"/>
-            <a:lumOff val="60000"/>
-          </a:schemeClr>
+          <a:schemeClr val="tx1"/>
         </a:buClr>
-        <a:buSzPct val="80000"/>
-        <a:buFont typeface="Wingdings 3" charset="2"/>
-        <a:buChar char=""/>
-        <a:defRPr sz="1400" b="0" i="0" kern="1200">
-          <a:solidFill>
-            <a:schemeClr val="tx1"/>
-          </a:solidFill>
-          <a:latin typeface="+mj-lt"/>
-          <a:ea typeface="+mj-ea"/>
-          <a:cs typeface="+mj-cs"/>
+        <a:buSzPct val="100000"/>
+        <a:buFont typeface="Arial"/>
+        <a:buChar char="•"/>
+        <a:defRPr sz="1200" kern="1200" cap="small">
+          <a:gradFill flip="none" rotWithShape="1">
+            <a:gsLst>
+              <a:gs pos="0">
+                <a:schemeClr val="tx1"/>
+              </a:gs>
+              <a:gs pos="100000">
+                <a:schemeClr val="tx1">
+                  <a:lumMod val="75000"/>
+                </a:schemeClr>
+              </a:gs>
+            </a:gsLst>
+            <a:lin ang="5580000" scaled="0"/>
+            <a:tileRect/>
+          </a:gradFill>
+          <a:effectLst>
+            <a:glow rad="38100">
+              <a:schemeClr val="bg1">
+                <a:lumMod val="50000"/>
+                <a:lumOff val="50000"/>
+                <a:alpha val="20000"/>
+              </a:schemeClr>
+            </a:glow>
+            <a:outerShdw blurRad="44450" dist="12700" dir="13860000" algn="tl" rotWithShape="0">
+              <a:srgbClr val="000000">
+                <a:alpha val="20000"/>
+              </a:srgbClr>
+            </a:outerShdw>
+          </a:effectLst>
+          <a:latin typeface="+mn-lt"/>
+          <a:ea typeface="+mn-ea"/>
+          <a:cs typeface="+mn-cs"/>
         </a:defRPr>
       </a:lvl7pPr>
       <a:lvl8pPr marL="3429000" indent="-228600" algn="l" defTabSz="457200" rtl="0" eaLnBrk="1" latinLnBrk="0" hangingPunct="1">
         <a:spcBef>
-          <a:spcPts val="1000"/>
+          <a:spcPct val="20000"/>
         </a:spcBef>
         <a:spcAft>
-          <a:spcPts val="0"/>
+          <a:spcPts val="600"/>
         </a:spcAft>
         <a:buClr>
-          <a:schemeClr val="bg2">
-            <a:lumMod val="40000"/>
-            <a:lumOff val="60000"/>
-          </a:schemeClr>
+          <a:schemeClr val="tx1"/>
         </a:buClr>
-        <a:buSzPct val="80000"/>
-        <a:buFont typeface="Wingdings 3" charset="2"/>
-        <a:buChar char=""/>
-        <a:defRPr sz="1400" b="0" i="0" kern="1200">
-          <a:solidFill>
-            <a:schemeClr val="tx1"/>
-          </a:solidFill>
-          <a:latin typeface="+mj-lt"/>
-          <a:ea typeface="+mj-ea"/>
-          <a:cs typeface="+mj-cs"/>
+        <a:buSzPct val="100000"/>
+        <a:buFont typeface="Arial"/>
+        <a:buChar char="•"/>
+        <a:defRPr sz="1200" kern="1200" cap="small">
+          <a:gradFill flip="none" rotWithShape="1">
+            <a:gsLst>
+              <a:gs pos="0">
+                <a:schemeClr val="tx1"/>
+              </a:gs>
+              <a:gs pos="100000">
+                <a:schemeClr val="tx1">
+                  <a:lumMod val="75000"/>
+                </a:schemeClr>
+              </a:gs>
+            </a:gsLst>
+            <a:lin ang="5580000" scaled="0"/>
+            <a:tileRect/>
+          </a:gradFill>
+          <a:effectLst>
+            <a:glow rad="38100">
+              <a:schemeClr val="bg1">
+                <a:lumMod val="50000"/>
+                <a:lumOff val="50000"/>
+                <a:alpha val="20000"/>
+              </a:schemeClr>
+            </a:glow>
+            <a:outerShdw blurRad="44450" dist="12700" dir="13860000" algn="tl" rotWithShape="0">
+              <a:srgbClr val="000000">
+                <a:alpha val="20000"/>
+              </a:srgbClr>
+            </a:outerShdw>
+          </a:effectLst>
+          <a:latin typeface="+mn-lt"/>
+          <a:ea typeface="+mn-ea"/>
+          <a:cs typeface="+mn-cs"/>
         </a:defRPr>
       </a:lvl8pPr>
       <a:lvl9pPr marL="3886200" indent="-228600" algn="l" defTabSz="457200" rtl="0" eaLnBrk="1" latinLnBrk="0" hangingPunct="1">
         <a:spcBef>
-          <a:spcPts val="1000"/>
+          <a:spcPct val="20000"/>
         </a:spcBef>
         <a:spcAft>
-          <a:spcPts val="0"/>
+          <a:spcPts val="600"/>
         </a:spcAft>
         <a:buClr>
-          <a:schemeClr val="bg2">
-            <a:lumMod val="40000"/>
-            <a:lumOff val="60000"/>
-          </a:schemeClr>
+          <a:schemeClr val="tx1"/>
         </a:buClr>
-        <a:buSzPct val="80000"/>
-        <a:buFont typeface="Wingdings 3" charset="2"/>
-        <a:buChar char=""/>
-        <a:defRPr sz="1400" b="0" i="0" kern="1200">
-          <a:solidFill>
-            <a:schemeClr val="tx1"/>
-          </a:solidFill>
-          <a:latin typeface="+mj-lt"/>
-          <a:ea typeface="+mj-ea"/>
-          <a:cs typeface="+mj-cs"/>
+        <a:buSzPct val="100000"/>
+        <a:buFont typeface="Arial"/>
+        <a:buChar char="•"/>
+        <a:defRPr sz="1200" kern="1200" cap="small">
+          <a:gradFill flip="none" rotWithShape="1">
+            <a:gsLst>
+              <a:gs pos="0">
+                <a:schemeClr val="tx1"/>
+              </a:gs>
+              <a:gs pos="100000">
+                <a:schemeClr val="tx1">
+                  <a:lumMod val="75000"/>
+                </a:schemeClr>
+              </a:gs>
+            </a:gsLst>
+            <a:lin ang="5580000" scaled="0"/>
+            <a:tileRect/>
+          </a:gradFill>
+          <a:effectLst>
+            <a:glow rad="38100">
+              <a:schemeClr val="bg1">
+                <a:lumMod val="50000"/>
+                <a:lumOff val="50000"/>
+                <a:alpha val="20000"/>
+              </a:schemeClr>
+            </a:glow>
+            <a:outerShdw blurRad="44450" dist="12700" dir="13860000" algn="tl" rotWithShape="0">
+              <a:srgbClr val="000000">
+                <a:alpha val="20000"/>
+              </a:srgbClr>
+            </a:outerShdw>
+          </a:effectLst>
+          <a:latin typeface="+mn-lt"/>
+          <a:ea typeface="+mn-ea"/>
+          <a:cs typeface="+mn-cs"/>
         </a:defRPr>
       </a:lvl9pPr>
     </p:bodyStyle>
@@ -6143,7 +5775,7 @@
         </p:nvSpPr>
         <p:spPr>
           <a:xfrm>
-            <a:off x="7779171" y="4896363"/>
+            <a:off x="1984012" y="3905711"/>
             <a:ext cx="8825658" cy="861420"/>
           </a:xfrm>
         </p:spPr>
@@ -6168,9 +5800,6 @@
   <p:clrMapOvr>
     <a:masterClrMapping/>
   </p:clrMapOvr>
-  <p:transition spd="slow">
-    <p:push dir="u"/>
-  </p:transition>
   <p:timing>
     <p:tnLst>
       <p:par>
@@ -6183,6 +5812,9 @@
                     <p:cTn id="3" fill="hold">
                       <p:stCondLst>
                         <p:cond delay="indefinite"/>
+                        <p:cond evt="onBegin" delay="0">
+                          <p:tn val="2"/>
+                        </p:cond>
                       </p:stCondLst>
                       <p:childTnLst>
                         <p:par>
@@ -6192,7 +5824,7 @@
                             </p:stCondLst>
                             <p:childTnLst>
                               <p:par>
-                                <p:cTn id="5" presetID="2" presetClass="entr" presetSubtype="4" fill="hold" grpId="0" nodeType="clickEffect">
+                                <p:cTn id="5" presetID="2" presetClass="entr" presetSubtype="4" fill="hold" grpId="0" nodeType="withEffect">
                                   <p:stCondLst>
                                     <p:cond delay="0"/>
                                   </p:stCondLst>
@@ -6264,24 +5896,15 @@
                                   </p:childTnLst>
                                 </p:cTn>
                               </p:par>
-                            </p:childTnLst>
-                          </p:cTn>
-                        </p:par>
-                        <p:par>
-                          <p:cTn id="9" fill="hold">
-                            <p:stCondLst>
-                              <p:cond delay="500"/>
-                            </p:stCondLst>
-                            <p:childTnLst>
                               <p:par>
-                                <p:cTn id="10" presetID="6" presetClass="entr" presetSubtype="16" fill="hold" nodeType="afterEffect">
+                                <p:cTn id="9" presetID="6" presetClass="entr" presetSubtype="16" fill="hold" nodeType="withEffect">
                                   <p:stCondLst>
                                     <p:cond delay="0"/>
                                   </p:stCondLst>
                                   <p:childTnLst>
                                     <p:set>
                                       <p:cBhvr>
-                                        <p:cTn id="11" dur="1" fill="hold">
+                                        <p:cTn id="10" dur="1" fill="hold">
                                           <p:stCondLst>
                                             <p:cond delay="0"/>
                                           </p:stCondLst>
@@ -6303,7 +5926,7 @@
                                     </p:set>
                                     <p:animEffect transition="in" filter="circle(in)">
                                       <p:cBhvr>
-                                        <p:cTn id="12" dur="2000"/>
+                                        <p:cTn id="11" dur="2000"/>
                                         <p:tgtEl>
                                           <p:spTgt spid="3">
                                             <p:txEl>
@@ -6383,7 +6006,12 @@
             <p:ph type="title"/>
           </p:nvPr>
         </p:nvSpPr>
-        <p:spPr/>
+        <p:spPr>
+          <a:xfrm>
+            <a:off x="770803" y="120238"/>
+            <a:ext cx="9905998" cy="1905000"/>
+          </a:xfrm>
+        </p:spPr>
         <p:txBody>
           <a:bodyPr/>
           <a:lstStyle/>
@@ -6419,150 +6047,103 @@
             <p:ph idx="1"/>
           </p:nvPr>
         </p:nvSpPr>
-        <p:spPr/>
+        <p:spPr>
+          <a:xfrm>
+            <a:off x="770803" y="1589781"/>
+            <a:ext cx="8946541" cy="4195481"/>
+          </a:xfrm>
+        </p:spPr>
         <p:txBody>
           <a:bodyPr>
-            <a:normAutofit fontScale="92500" lnSpcReduction="10000"/>
+            <a:normAutofit lnSpcReduction="10000"/>
           </a:bodyPr>
           <a:lstStyle/>
           <a:p>
-            <a:pPr lvl="0"/>
-            <a:r>
-              <a:rPr lang="hu-HU" sz="2000" b="1" dirty="0"/>
-              <a:t>OFDMA (</a:t>
-            </a:r>
-            <a:r>
-              <a:rPr lang="hu-HU" sz="2000" b="1" dirty="0" err="1"/>
-              <a:t>Orthogonal</a:t>
-            </a:r>
-            <a:r>
-              <a:rPr lang="hu-HU" sz="2000" b="1" dirty="0"/>
-              <a:t> </a:t>
-            </a:r>
-            <a:r>
-              <a:rPr lang="hu-HU" sz="2000" b="1" dirty="0" err="1"/>
-              <a:t>Frequency</a:t>
-            </a:r>
-            <a:r>
-              <a:rPr lang="hu-HU" sz="2000" b="1" dirty="0"/>
-              <a:t> </a:t>
-            </a:r>
-            <a:r>
-              <a:rPr lang="hu-HU" sz="2000" b="1" dirty="0" err="1"/>
-              <a:t>Division</a:t>
-            </a:r>
-            <a:r>
-              <a:rPr lang="hu-HU" sz="2000" b="1" dirty="0"/>
-              <a:t> </a:t>
-            </a:r>
-            <a:r>
-              <a:rPr lang="hu-HU" sz="2000" b="1" dirty="0" err="1"/>
-              <a:t>Multiple</a:t>
-            </a:r>
-            <a:r>
-              <a:rPr lang="hu-HU" sz="2000" b="1" dirty="0"/>
-              <a:t> Access):</a:t>
-            </a:r>
-            <a:r>
-              <a:rPr lang="hu-HU" sz="2000" dirty="0"/>
-              <a:t> Ez a technológia lehetővé teszi, hogy egyetlen adatcsatornán egyszerre több eszköz kommunikáljon. Így csökken a késleltetés, és hatékonyabb lesz az adatforgalom kezelése.</a:t>
-            </a:r>
-          </a:p>
-          <a:p>
-            <a:pPr lvl="0"/>
-            <a:r>
-              <a:rPr lang="hu-HU" sz="2000" b="1" dirty="0"/>
-              <a:t>MU-MIMO (Multi-</a:t>
-            </a:r>
-            <a:r>
-              <a:rPr lang="hu-HU" sz="2000" b="1" dirty="0" err="1"/>
-              <a:t>User</a:t>
-            </a:r>
-            <a:r>
-              <a:rPr lang="hu-HU" sz="2000" b="1" dirty="0"/>
-              <a:t>, </a:t>
-            </a:r>
-            <a:r>
-              <a:rPr lang="hu-HU" sz="2000" b="1" dirty="0" err="1"/>
-              <a:t>Multiple</a:t>
-            </a:r>
-            <a:r>
-              <a:rPr lang="hu-HU" sz="2000" b="1" dirty="0"/>
-              <a:t> Input </a:t>
-            </a:r>
-            <a:r>
-              <a:rPr lang="hu-HU" sz="2000" b="1" dirty="0" err="1"/>
-              <a:t>Multiple</a:t>
-            </a:r>
-            <a:r>
-              <a:rPr lang="hu-HU" sz="2000" b="1" dirty="0"/>
-              <a:t> Output):</a:t>
-            </a:r>
-            <a:r>
-              <a:rPr lang="hu-HU" sz="2000" dirty="0"/>
-              <a:t> Már a </a:t>
-            </a:r>
-            <a:r>
-              <a:rPr lang="hu-HU" sz="2000" dirty="0" err="1"/>
-              <a:t>Wi</a:t>
-            </a:r>
-            <a:r>
-              <a:rPr lang="hu-HU" sz="2000" dirty="0"/>
-              <a:t>-Fi 5 is használta, de a </a:t>
-            </a:r>
-            <a:r>
-              <a:rPr lang="hu-HU" sz="2000" dirty="0" err="1"/>
-              <a:t>Wi</a:t>
-            </a:r>
-            <a:r>
-              <a:rPr lang="hu-HU" sz="2000" dirty="0"/>
-              <a:t>-Fi 6 továbbfejlesztette. Most már nemcsak letöltés, hanem feltöltés közben is egyszerre több eszköz kommunikálhat.</a:t>
-            </a:r>
-          </a:p>
-          <a:p>
-            <a:pPr lvl="0"/>
-            <a:r>
-              <a:rPr lang="hu-HU" sz="2000" b="1" dirty="0"/>
-              <a:t>TWT (</a:t>
-            </a:r>
-            <a:r>
-              <a:rPr lang="hu-HU" sz="2000" b="1" dirty="0" err="1"/>
-              <a:t>Target</a:t>
-            </a:r>
-            <a:r>
-              <a:rPr lang="hu-HU" sz="2000" b="1" dirty="0"/>
-              <a:t> </a:t>
-            </a:r>
-            <a:r>
-              <a:rPr lang="hu-HU" sz="2000" b="1" dirty="0" err="1"/>
-              <a:t>Wake</a:t>
-            </a:r>
-            <a:r>
-              <a:rPr lang="hu-HU" sz="2000" b="1" dirty="0"/>
-              <a:t> Time):</a:t>
-            </a:r>
-            <a:r>
-              <a:rPr lang="hu-HU" sz="2000" dirty="0"/>
-              <a:t> Ez az új funkció az energiatakarékosságot szolgálja. Az eszközök „alvó” üzemmódban maradhatnak, amíg nincs szükség adatforgalomra, így például az okosotthon-eszközök akkumulátora sokkal tovább bírja.</a:t>
-            </a:r>
-          </a:p>
-          <a:p>
-            <a:pPr lvl="0"/>
-            <a:r>
-              <a:rPr lang="hu-HU" sz="2000" b="1" dirty="0"/>
-              <a:t>1024-QAM moduláció:</a:t>
-            </a:r>
-            <a:r>
-              <a:rPr lang="hu-HU" sz="2000" dirty="0"/>
-              <a:t> A nagyobb modulációs sűrűségnek köszönhetően nő az adatátvitel sebessége – ideális körülmények között akár 9,6 </a:t>
-            </a:r>
-            <a:r>
-              <a:rPr lang="hu-HU" sz="2000" dirty="0" err="1"/>
+            <a:r>
+              <a:rPr lang="hu-HU" sz="2800" b="1" dirty="0"/>
+              <a:t>OFDMA:</a:t>
+            </a:r>
+            <a:r>
+              <a:rPr lang="hu-HU" sz="2800" dirty="0"/>
+              <a:t> Több eszköz egyszerre kommunikál egy csatornán → </a:t>
+            </a:r>
+            <a:r>
+              <a:rPr lang="hu-HU" sz="2800" b="1" dirty="0"/>
+              <a:t>kisebb késés, hatékonyabb adatforgalom</a:t>
+            </a:r>
+            <a:r>
+              <a:rPr lang="hu-HU" sz="2800" dirty="0"/>
+              <a:t>.</a:t>
+            </a:r>
+          </a:p>
+          <a:p>
+            <a:r>
+              <a:rPr lang="hu-HU" sz="2800" b="1" dirty="0"/>
+              <a:t>MU-MIMO:</a:t>
+            </a:r>
+            <a:r>
+              <a:rPr lang="hu-HU" sz="2800" dirty="0"/>
+              <a:t> Több eszköz egyszerre tölthet le </a:t>
+            </a:r>
+            <a:r>
+              <a:rPr lang="hu-HU" sz="2800" b="1" dirty="0"/>
+              <a:t>és</a:t>
+            </a:r>
+            <a:r>
+              <a:rPr lang="hu-HU" sz="2800" dirty="0"/>
+              <a:t> fel → </a:t>
+            </a:r>
+            <a:r>
+              <a:rPr lang="hu-HU" sz="2800" b="1" dirty="0"/>
+              <a:t>gyorsabb többfelhasználós működés</a:t>
+            </a:r>
+            <a:r>
+              <a:rPr lang="hu-HU" sz="2800" dirty="0"/>
+              <a:t>.</a:t>
+            </a:r>
+          </a:p>
+          <a:p>
+            <a:r>
+              <a:rPr lang="hu-HU" sz="2800" b="1" dirty="0"/>
+              <a:t>TWT:</a:t>
+            </a:r>
+            <a:r>
+              <a:rPr lang="hu-HU" sz="2800" dirty="0"/>
+              <a:t> Eszközök csak szükség esetén ébrednek → </a:t>
+            </a:r>
+            <a:r>
+              <a:rPr lang="hu-HU" sz="2800" b="1" dirty="0"/>
+              <a:t>jobb energiatakarékosság</a:t>
+            </a:r>
+            <a:r>
+              <a:rPr lang="hu-HU" sz="2800" dirty="0"/>
+              <a:t>.</a:t>
+            </a:r>
+          </a:p>
+          <a:p>
+            <a:r>
+              <a:rPr lang="hu-HU" sz="2800" b="1" dirty="0"/>
+              <a:t>1024-QAM:</a:t>
+            </a:r>
+            <a:r>
+              <a:rPr lang="hu-HU" sz="2800" dirty="0"/>
+              <a:t> Sűrűbb jelmoduláció → </a:t>
+            </a:r>
+            <a:r>
+              <a:rPr lang="hu-HU" sz="2800" b="1" dirty="0"/>
+              <a:t>nagyobb sebesség (akár 9,6 </a:t>
+            </a:r>
+            <a:r>
+              <a:rPr lang="hu-HU" sz="2800" b="1" dirty="0" err="1"/>
               <a:t>Gb</a:t>
             </a:r>
             <a:r>
-              <a:rPr lang="hu-HU" sz="2000" dirty="0"/>
-              <a:t>/s is elérhető.</a:t>
+              <a:rPr lang="hu-HU" sz="2800" b="1" dirty="0"/>
+              <a:t>/s)</a:t>
+            </a:r>
+            <a:r>
+              <a:rPr lang="hu-HU" sz="2800" dirty="0"/>
+              <a:t>.</a:t>
             </a:r>
           </a:p>
           <a:p>
@@ -6580,18 +6161,6 @@
   <p:clrMapOvr>
     <a:masterClrMapping/>
   </p:clrMapOvr>
-  <mc:AlternateContent xmlns:mc="http://schemas.openxmlformats.org/markup-compatibility/2006" xmlns:p14="http://schemas.microsoft.com/office/powerpoint/2010/main">
-    <mc:Choice Requires="p14">
-      <p:transition spd="slow" p14:dur="1500">
-        <p:split orient="vert"/>
-      </p:transition>
-    </mc:Choice>
-    <mc:Fallback xmlns="">
-      <p:transition spd="slow">
-        <p:split orient="vert"/>
-      </p:transition>
-    </mc:Fallback>
-  </mc:AlternateContent>
   <p:timing>
     <p:tnLst>
       <p:par>
@@ -7095,7 +6664,9 @@
         </p:nvSpPr>
         <p:spPr/>
         <p:txBody>
-          <a:bodyPr/>
+          <a:bodyPr>
+            <a:normAutofit/>
+          </a:bodyPr>
           <a:lstStyle/>
           <a:p>
             <a:r>
@@ -7121,7 +6692,7 @@
             <p:ph idx="1"/>
             <p:extLst>
               <p:ext uri="{D42A27DB-BD31-4B8C-83A1-F6EECF244321}">
-                <p14:modId xmlns:p14="http://schemas.microsoft.com/office/powerpoint/2010/main" val="539739223"/>
+                <p14:modId xmlns:p14="http://schemas.microsoft.com/office/powerpoint/2010/main" val="1847503753"/>
               </p:ext>
             </p:extLst>
           </p:nvPr>
@@ -7134,7 +6705,7 @@
           <a:graphicData uri="http://schemas.openxmlformats.org/drawingml/2006/table">
             <a:tbl>
               <a:tblPr firstRow="1" firstCol="1" bandRow="1">
-                <a:tableStyleId>{5C22544A-7EE6-4342-B048-85BDC9FD1C3A}</a:tableStyleId>
+                <a:tableStyleId>{8EC20E35-A176-4012-BC5E-935CFFF8708E}</a:tableStyleId>
               </a:tblPr>
               <a:tblGrid>
                 <a:gridCol w="2765740">
@@ -7245,12 +6816,18 @@
                         </a:spcAft>
                       </a:pPr>
                       <a:r>
-                        <a:rPr lang="hu-HU" sz="1400">
+                        <a:rPr lang="hu-HU" sz="1400" dirty="0" err="1">
                           <a:effectLst/>
                         </a:rPr>
-                        <a:t>Wi-Fi 5</a:t>
+                        <a:t>Wi</a:t>
                       </a:r>
-                      <a:endParaRPr lang="hu-HU" sz="1400">
+                      <a:r>
+                        <a:rPr lang="hu-HU" sz="1400" dirty="0">
+                          <a:effectLst/>
+                        </a:rPr>
+                        <a:t>-Fi 5</a:t>
+                      </a:r>
+                      <a:endParaRPr lang="hu-HU" sz="1400" dirty="0">
                         <a:effectLst/>
                         <a:latin typeface="Calibri" panose="020F0502020204030204" pitchFamily="34" charset="0"/>
                         <a:ea typeface="Calibri" panose="020F0502020204030204" pitchFamily="34" charset="0"/>
@@ -7867,9 +7444,6 @@
   <p:clrMapOvr>
     <a:masterClrMapping/>
   </p:clrMapOvr>
-  <p:transition spd="med">
-    <p:pull/>
-  </p:transition>
   <p:timing>
     <p:tnLst>
       <p:par>
@@ -7969,21 +7543,30 @@
                             </p:childTnLst>
                           </p:cTn>
                         </p:par>
+                      </p:childTnLst>
+                    </p:cTn>
+                  </p:par>
+                  <p:par>
+                    <p:cTn id="9" fill="hold">
+                      <p:stCondLst>
+                        <p:cond delay="indefinite"/>
+                      </p:stCondLst>
+                      <p:childTnLst>
                         <p:par>
-                          <p:cTn id="9" fill="hold">
+                          <p:cTn id="10" fill="hold">
                             <p:stCondLst>
-                              <p:cond delay="500"/>
+                              <p:cond delay="0"/>
                             </p:stCondLst>
                             <p:childTnLst>
                               <p:par>
-                                <p:cTn id="10" presetID="31" presetClass="entr" presetSubtype="0" fill="hold" nodeType="afterEffect">
+                                <p:cTn id="11" presetID="2" presetClass="entr" presetSubtype="4" fill="hold" nodeType="clickEffect">
                                   <p:stCondLst>
                                     <p:cond delay="0"/>
                                   </p:stCondLst>
                                   <p:childTnLst>
                                     <p:set>
                                       <p:cBhvr>
-                                        <p:cTn id="11" dur="1" fill="hold">
+                                        <p:cTn id="12" dur="1" fill="hold">
                                           <p:stCondLst>
                                             <p:cond delay="0"/>
                                           </p:stCondLst>
@@ -8000,82 +7583,51 @@
                                       </p:to>
                                     </p:set>
                                     <p:anim calcmode="lin" valueType="num">
-                                      <p:cBhvr>
-                                        <p:cTn id="12" dur="1000" fill="hold"/>
+                                      <p:cBhvr additive="base">
+                                        <p:cTn id="13" dur="500" fill="hold"/>
                                         <p:tgtEl>
                                           <p:spTgt spid="4"/>
                                         </p:tgtEl>
                                         <p:attrNameLst>
-                                          <p:attrName>ppt_w</p:attrName>
+                                          <p:attrName>ppt_x</p:attrName>
                                         </p:attrNameLst>
                                       </p:cBhvr>
                                       <p:tavLst>
                                         <p:tav tm="0">
                                           <p:val>
-                                            <p:fltVal val="0"/>
+                                            <p:strVal val="#ppt_x"/>
                                           </p:val>
                                         </p:tav>
                                         <p:tav tm="100000">
                                           <p:val>
-                                            <p:strVal val="#ppt_w"/>
+                                            <p:strVal val="#ppt_x"/>
                                           </p:val>
                                         </p:tav>
                                       </p:tavLst>
                                     </p:anim>
                                     <p:anim calcmode="lin" valueType="num">
-                                      <p:cBhvr>
-                                        <p:cTn id="13" dur="1000" fill="hold"/>
+                                      <p:cBhvr additive="base">
+                                        <p:cTn id="14" dur="500" fill="hold"/>
                                         <p:tgtEl>
                                           <p:spTgt spid="4"/>
                                         </p:tgtEl>
                                         <p:attrNameLst>
-                                          <p:attrName>ppt_h</p:attrName>
+                                          <p:attrName>ppt_y</p:attrName>
                                         </p:attrNameLst>
                                       </p:cBhvr>
                                       <p:tavLst>
                                         <p:tav tm="0">
                                           <p:val>
-                                            <p:fltVal val="0"/>
+                                            <p:strVal val="1+#ppt_h/2"/>
                                           </p:val>
                                         </p:tav>
                                         <p:tav tm="100000">
                                           <p:val>
-                                            <p:strVal val="#ppt_h"/>
+                                            <p:strVal val="#ppt_y"/>
                                           </p:val>
                                         </p:tav>
                                       </p:tavLst>
                                     </p:anim>
-                                    <p:anim calcmode="lin" valueType="num">
-                                      <p:cBhvr>
-                                        <p:cTn id="14" dur="1000" fill="hold"/>
-                                        <p:tgtEl>
-                                          <p:spTgt spid="4"/>
-                                        </p:tgtEl>
-                                        <p:attrNameLst>
-                                          <p:attrName>style.rotation</p:attrName>
-                                        </p:attrNameLst>
-                                      </p:cBhvr>
-                                      <p:tavLst>
-                                        <p:tav tm="0">
-                                          <p:val>
-                                            <p:fltVal val="90"/>
-                                          </p:val>
-                                        </p:tav>
-                                        <p:tav tm="100000">
-                                          <p:val>
-                                            <p:fltVal val="0"/>
-                                          </p:val>
-                                        </p:tav>
-                                      </p:tavLst>
-                                    </p:anim>
-                                    <p:animEffect transition="in" filter="fade">
-                                      <p:cBhvr>
-                                        <p:cTn id="15" dur="1000"/>
-                                        <p:tgtEl>
-                                          <p:spTgt spid="4"/>
-                                        </p:tgtEl>
-                                      </p:cBhvr>
-                                    </p:animEffect>
                                   </p:childTnLst>
                                 </p:cTn>
                               </p:par>
@@ -8132,99 +7684,6 @@
       </p:grpSpPr>
       <p:sp>
         <p:nvSpPr>
-          <p:cNvPr id="3" name="Tartalom helye 2">
-            <a:extLst>
-              <a:ext uri="{FF2B5EF4-FFF2-40B4-BE49-F238E27FC236}">
-                <a16:creationId xmlns:a16="http://schemas.microsoft.com/office/drawing/2014/main" id="{519886A0-E1C6-4155-AA35-85941804097A}"/>
-              </a:ext>
-            </a:extLst>
-          </p:cNvPr>
-          <p:cNvSpPr>
-            <a:spLocks noGrp="1"/>
-          </p:cNvSpPr>
-          <p:nvPr>
-            <p:ph idx="1"/>
-          </p:nvPr>
-        </p:nvSpPr>
-        <p:spPr/>
-        <p:txBody>
-          <a:bodyPr/>
-          <a:lstStyle/>
-          <a:p>
-            <a:pPr lvl="0"/>
-            <a:r>
-              <a:rPr lang="hu-HU" b="1" dirty="0"/>
-              <a:t>Oktatás:</a:t>
-            </a:r>
-            <a:r>
-              <a:rPr lang="hu-HU" dirty="0"/>
-              <a:t> A távoktatás és a digitális tananyagok miatt az iskolákban megbízható, nagy sávszélességű hálózatokra van szükség. A </a:t>
-            </a:r>
-            <a:r>
-              <a:rPr lang="hu-HU" dirty="0" err="1"/>
-              <a:t>Wi</a:t>
-            </a:r>
-            <a:r>
-              <a:rPr lang="hu-HU" dirty="0"/>
-              <a:t>-Fi 6 képes egyszerre sok diákot kiszolgálni.</a:t>
-            </a:r>
-          </a:p>
-          <a:p>
-            <a:pPr lvl="0"/>
-            <a:r>
-              <a:rPr lang="hu-HU" b="1" dirty="0"/>
-              <a:t>Okosotthonok:</a:t>
-            </a:r>
-            <a:r>
-              <a:rPr lang="hu-HU" dirty="0"/>
-              <a:t> A háztartásokban egyre több okoseszköz működik (lámpák, kamerák, termosztátok). A </a:t>
-            </a:r>
-            <a:r>
-              <a:rPr lang="hu-HU" dirty="0" err="1"/>
-              <a:t>Wi</a:t>
-            </a:r>
-            <a:r>
-              <a:rPr lang="hu-HU" dirty="0"/>
-              <a:t>-Fi 6 képes ezeket egyszerre, hatékonyan kezelni.</a:t>
-            </a:r>
-          </a:p>
-          <a:p>
-            <a:pPr lvl="0"/>
-            <a:r>
-              <a:rPr lang="hu-HU" b="1" dirty="0"/>
-              <a:t>Ipar 4.0 és munkahelyek:</a:t>
-            </a:r>
-            <a:r>
-              <a:rPr lang="hu-HU" dirty="0"/>
-              <a:t> A gyárakban és irodákban a gyors és stabil vezeték nélküli kapcsolat kulcsfontosságú a termelékenységhez.</a:t>
-            </a:r>
-          </a:p>
-          <a:p>
-            <a:pPr lvl="0"/>
-            <a:r>
-              <a:rPr lang="hu-HU" b="1" dirty="0"/>
-              <a:t>Szórakozás és média:</a:t>
-            </a:r>
-            <a:r>
-              <a:rPr lang="hu-HU" dirty="0"/>
-              <a:t> A 4K/8K videók és online játékok esetében a </a:t>
-            </a:r>
-            <a:r>
-              <a:rPr lang="hu-HU" dirty="0" err="1"/>
-              <a:t>Wi</a:t>
-            </a:r>
-            <a:r>
-              <a:rPr lang="hu-HU" dirty="0"/>
-              <a:t>-Fi 6 alacsonyabb késleltetést és megszakításmentes adatátvitelt biztosít.</a:t>
-            </a:r>
-          </a:p>
-          <a:p>
-            <a:endParaRPr lang="hu-HU" dirty="0"/>
-          </a:p>
-        </p:txBody>
-      </p:sp>
-      <p:sp>
-        <p:nvSpPr>
           <p:cNvPr id="4" name="Rectangle 1">
             <a:extLst>
               <a:ext uri="{FF2B5EF4-FFF2-40B4-BE49-F238E27FC236}">
@@ -8462,6 +7921,113 @@
           </a:p>
         </p:txBody>
       </p:sp>
+      <p:sp>
+        <p:nvSpPr>
+          <p:cNvPr id="3" name="Tartalom helye 2">
+            <a:extLst>
+              <a:ext uri="{FF2B5EF4-FFF2-40B4-BE49-F238E27FC236}">
+                <a16:creationId xmlns:a16="http://schemas.microsoft.com/office/drawing/2014/main" id="{519886A0-E1C6-4155-AA35-85941804097A}"/>
+              </a:ext>
+            </a:extLst>
+          </p:cNvPr>
+          <p:cNvSpPr>
+            <a:spLocks noGrp="1"/>
+          </p:cNvSpPr>
+          <p:nvPr>
+            <p:ph idx="1"/>
+          </p:nvPr>
+        </p:nvSpPr>
+        <p:spPr/>
+        <p:txBody>
+          <a:bodyPr>
+            <a:normAutofit/>
+          </a:bodyPr>
+          <a:lstStyle/>
+          <a:p>
+            <a:r>
+              <a:rPr lang="hu-HU" sz="2800" b="1" dirty="0"/>
+              <a:t>Oktatás:</a:t>
+            </a:r>
+            <a:r>
+              <a:rPr lang="hu-HU" sz="2800" dirty="0"/>
+              <a:t> Sok diák egyszerre → </a:t>
+            </a:r>
+            <a:r>
+              <a:rPr lang="hu-HU" sz="2800" b="1" dirty="0"/>
+              <a:t>megbízható, nagy sávszél</a:t>
+            </a:r>
+            <a:r>
+              <a:rPr lang="hu-HU" sz="2800" dirty="0"/>
+              <a:t>.</a:t>
+            </a:r>
+          </a:p>
+          <a:p>
+            <a:r>
+              <a:rPr lang="hu-HU" sz="2800" b="1" dirty="0"/>
+              <a:t>Okosotthon:</a:t>
+            </a:r>
+            <a:r>
+              <a:rPr lang="hu-HU" sz="2800" dirty="0"/>
+              <a:t> Sok eszköz együtt → </a:t>
+            </a:r>
+            <a:r>
+              <a:rPr lang="hu-HU" sz="2800" b="1" dirty="0"/>
+              <a:t>hatékony kezelés</a:t>
+            </a:r>
+            <a:r>
+              <a:rPr lang="hu-HU" sz="2800" dirty="0"/>
+              <a:t>.</a:t>
+            </a:r>
+          </a:p>
+          <a:p>
+            <a:r>
+              <a:rPr lang="hu-HU" sz="2800" b="1" dirty="0"/>
+              <a:t>Ipar 4.0 / munkahely:</a:t>
+            </a:r>
+            <a:r>
+              <a:rPr lang="hu-HU" sz="2800" dirty="0"/>
+              <a:t> Gyors, stabil kapcsolat → </a:t>
+            </a:r>
+            <a:r>
+              <a:rPr lang="hu-HU" sz="2800" b="1" dirty="0"/>
+              <a:t>nagyobb termelékenység</a:t>
+            </a:r>
+            <a:r>
+              <a:rPr lang="hu-HU" sz="2800" dirty="0"/>
+              <a:t>.</a:t>
+            </a:r>
+          </a:p>
+          <a:p>
+            <a:r>
+              <a:rPr lang="hu-HU" sz="2800" b="1" dirty="0"/>
+              <a:t>Szórakozás:</a:t>
+            </a:r>
+            <a:r>
+              <a:rPr lang="hu-HU" sz="2800" dirty="0"/>
+              <a:t> 4K/8K, játék → </a:t>
+            </a:r>
+            <a:r>
+              <a:rPr lang="hu-HU" sz="2800" b="1" dirty="0"/>
+              <a:t>alacsony késés, stabil </a:t>
+            </a:r>
+            <a:r>
+              <a:rPr lang="hu-HU" sz="2800" b="1" dirty="0" err="1"/>
+              <a:t>stream</a:t>
+            </a:r>
+            <a:r>
+              <a:rPr lang="hu-HU" sz="2800" dirty="0"/>
+              <a:t>.</a:t>
+            </a:r>
+          </a:p>
+          <a:p>
+            <a:pPr lvl="0"/>
+            <a:endParaRPr lang="hu-HU" dirty="0"/>
+          </a:p>
+          <a:p>
+            <a:endParaRPr lang="hu-HU" dirty="0"/>
+          </a:p>
+        </p:txBody>
+      </p:sp>
     </p:spTree>
     <p:extLst>
       <p:ext uri="{BB962C8B-B14F-4D97-AF65-F5344CB8AC3E}">
@@ -8472,18 +8038,6 @@
   <p:clrMapOvr>
     <a:masterClrMapping/>
   </p:clrMapOvr>
-  <mc:AlternateContent xmlns:mc="http://schemas.openxmlformats.org/markup-compatibility/2006" xmlns:p14="http://schemas.microsoft.com/office/powerpoint/2010/main">
-    <mc:Choice Requires="p14">
-      <p:transition spd="slow">
-        <p14:flash/>
-      </p:transition>
-    </mc:Choice>
-    <mc:Fallback xmlns="">
-      <p:transition spd="slow">
-        <p:fade/>
-      </p:transition>
-    </mc:Fallback>
-  </mc:AlternateContent>
   <p:timing>
     <p:tnLst>
       <p:par>
@@ -9052,68 +8606,318 @@
       </p:sp>
       <p:sp>
         <p:nvSpPr>
-          <p:cNvPr id="3" name="Tartalom helye 2">
+          <p:cNvPr id="4" name="Rectangle 1">
             <a:extLst>
               <a:ext uri="{FF2B5EF4-FFF2-40B4-BE49-F238E27FC236}">
-                <a16:creationId xmlns:a16="http://schemas.microsoft.com/office/drawing/2014/main" id="{173DD602-11D4-488E-9D49-2AAEC503E05C}"/>
+                <a16:creationId xmlns:a16="http://schemas.microsoft.com/office/drawing/2014/main" id="{F93801CA-E49F-40F3-B201-8DD756A60B16}"/>
               </a:ext>
             </a:extLst>
           </p:cNvPr>
           <p:cNvSpPr>
-            <a:spLocks noGrp="1"/>
+            <a:spLocks noGrp="1" noChangeArrowheads="1"/>
           </p:cNvSpPr>
           <p:nvPr>
             <p:ph idx="1"/>
           </p:nvPr>
         </p:nvSpPr>
-        <p:spPr/>
-        <p:txBody>
-          <a:bodyPr/>
+        <p:spPr bwMode="auto">
+          <a:xfrm>
+            <a:off x="527357" y="1984148"/>
+            <a:ext cx="8022877" cy="2677656"/>
+          </a:xfrm>
+          <a:prstGeom prst="rect">
+            <a:avLst/>
+          </a:prstGeom>
+          <a:noFill/>
+          <a:ln>
+            <a:noFill/>
+          </a:ln>
+          <a:effectLst/>
+          <a:extLst>
+            <a:ext uri="{909E8E84-426E-40DD-AFC4-6F175D3DCCD1}">
+              <a14:hiddenFill xmlns:a14="http://schemas.microsoft.com/office/drawing/2010/main">
+                <a:solidFill>
+                  <a:schemeClr val="accent1"/>
+                </a:solidFill>
+              </a14:hiddenFill>
+            </a:ext>
+            <a:ext uri="{91240B29-F687-4F45-9708-019B960494DF}">
+              <a14:hiddenLine xmlns:a14="http://schemas.microsoft.com/office/drawing/2010/main" w="9525">
+                <a:solidFill>
+                  <a:schemeClr val="tx1"/>
+                </a:solidFill>
+                <a:miter lim="800000"/>
+                <a:headEnd/>
+                <a:tailEnd/>
+              </a14:hiddenLine>
+            </a:ext>
+            <a:ext uri="{AF507438-7753-43E0-B8FC-AC1667EBCBE1}">
+              <a14:hiddenEffects xmlns:a14="http://schemas.microsoft.com/office/drawing/2010/main">
+                <a:effectLst>
+                  <a:outerShdw dist="35921" dir="2700000" algn="ctr" rotWithShape="0">
+                    <a:schemeClr val="bg2"/>
+                  </a:outerShdw>
+                </a:effectLst>
+              </a14:hiddenEffects>
+            </a:ext>
+          </a:extLst>
+        </p:spPr>
+        <p:txBody>
+          <a:bodyPr vert="horz" wrap="square" lIns="91440" tIns="45720" rIns="91440" bIns="45720" numCol="1" anchor="ctr" anchorCtr="0" compatLnSpc="1">
+            <a:prstTxWarp prst="textNoShape">
+              <a:avLst/>
+            </a:prstTxWarp>
+            <a:spAutoFit/>
+          </a:bodyPr>
           <a:lstStyle/>
           <a:p>
-            <a:r>
-              <a:rPr lang="hu-HU" sz="2400" dirty="0"/>
-              <a:t>A </a:t>
-            </a:r>
-            <a:r>
-              <a:rPr lang="hu-HU" sz="2400" dirty="0" err="1"/>
+            <a:pPr marL="0" marR="0" lvl="0" indent="0" defTabSz="914400" rtl="0" eaLnBrk="0" fontAlgn="base" latinLnBrk="0" hangingPunct="0">
+              <a:lnSpc>
+                <a:spcPct val="100000"/>
+              </a:lnSpc>
+              <a:spcBef>
+                <a:spcPct val="0"/>
+              </a:spcBef>
+              <a:spcAft>
+                <a:spcPct val="0"/>
+              </a:spcAft>
+              <a:buClrTx/>
+              <a:buSzTx/>
+              <a:buFontTx/>
+              <a:buChar char="•"/>
+              <a:tabLst/>
+            </a:pPr>
+            <a:r>
+              <a:rPr kumimoji="0" lang="hu-HU" altLang="hu-HU" sz="2800" b="1" i="0" u="none" strike="noStrike" cap="none" normalizeH="0" baseline="0" dirty="0" err="1">
+                <a:ln>
+                  <a:noFill/>
+                </a:ln>
+                <a:solidFill>
+                  <a:schemeClr val="tx1"/>
+                </a:solidFill>
+                <a:effectLst/>
+                <a:latin typeface="Arial" panose="020B0604020202020204" pitchFamily="34" charset="0"/>
+              </a:rPr>
               <a:t>Wi</a:t>
             </a:r>
             <a:r>
-              <a:rPr lang="hu-HU" sz="2400" dirty="0"/>
-              <a:t>-Fi 6 a vezeték nélküli hálózatok fejlődésének következő fontos lépcsője. </a:t>
-            </a:r>
-          </a:p>
-          <a:p>
-            <a:r>
-              <a:rPr lang="hu-HU" sz="2400" dirty="0"/>
-              <a:t>A korábbi generációkhoz képest gyorsabb, stabilabb és energiahatékonyabb megoldást kínál, ami elengedhetetlen a modern, digitálisan összekapcsolt világban.</a:t>
-            </a:r>
-          </a:p>
-          <a:p>
-            <a:r>
-              <a:rPr lang="hu-HU" sz="2400" dirty="0"/>
-              <a:t>Ahogy egyre több eszköz csatlakozik az internetre, a </a:t>
-            </a:r>
-            <a:r>
-              <a:rPr lang="hu-HU" sz="2400" dirty="0" err="1"/>
+              <a:rPr kumimoji="0" lang="hu-HU" altLang="hu-HU" sz="2800" b="1" i="0" u="none" strike="noStrike" cap="none" normalizeH="0" baseline="0" dirty="0">
+                <a:ln>
+                  <a:noFill/>
+                </a:ln>
+                <a:solidFill>
+                  <a:schemeClr val="tx1"/>
+                </a:solidFill>
+                <a:effectLst/>
+                <a:latin typeface="Arial" panose="020B0604020202020204" pitchFamily="34" charset="0"/>
+              </a:rPr>
+              <a:t>-Fi 6:</a:t>
+            </a:r>
+            <a:r>
+              <a:rPr kumimoji="0" lang="hu-HU" altLang="hu-HU" sz="2800" b="0" i="0" u="none" strike="noStrike" cap="none" normalizeH="0" baseline="0" dirty="0">
+                <a:ln>
+                  <a:noFill/>
+                </a:ln>
+                <a:solidFill>
+                  <a:schemeClr val="tx1"/>
+                </a:solidFill>
+                <a:effectLst/>
+                <a:latin typeface="Arial" panose="020B0604020202020204" pitchFamily="34" charset="0"/>
+              </a:rPr>
+              <a:t> A vezeték nélküli hálózatok új, fejlettebb lépcsője.</a:t>
+            </a:r>
+          </a:p>
+          <a:p>
+            <a:pPr marL="0" marR="0" lvl="0" indent="0" defTabSz="914400" rtl="0" eaLnBrk="0" fontAlgn="base" latinLnBrk="0" hangingPunct="0">
+              <a:lnSpc>
+                <a:spcPct val="100000"/>
+              </a:lnSpc>
+              <a:spcBef>
+                <a:spcPct val="0"/>
+              </a:spcBef>
+              <a:spcAft>
+                <a:spcPct val="0"/>
+              </a:spcAft>
+              <a:buClrTx/>
+              <a:buSzTx/>
+              <a:buFontTx/>
+              <a:buChar char="•"/>
+              <a:tabLst/>
+            </a:pPr>
+            <a:r>
+              <a:rPr kumimoji="0" lang="hu-HU" altLang="hu-HU" sz="2800" b="1" i="0" u="none" strike="noStrike" cap="none" normalizeH="0" baseline="0" dirty="0">
+                <a:ln>
+                  <a:noFill/>
+                </a:ln>
+                <a:solidFill>
+                  <a:schemeClr val="tx1"/>
+                </a:solidFill>
+                <a:effectLst/>
+                <a:latin typeface="Arial" panose="020B0604020202020204" pitchFamily="34" charset="0"/>
+              </a:rPr>
+              <a:t>Előnyök:</a:t>
+            </a:r>
+            <a:r>
+              <a:rPr kumimoji="0" lang="hu-HU" altLang="hu-HU" sz="2800" b="0" i="0" u="none" strike="noStrike" cap="none" normalizeH="0" baseline="0" dirty="0">
+                <a:ln>
+                  <a:noFill/>
+                </a:ln>
+                <a:solidFill>
+                  <a:schemeClr val="tx1"/>
+                </a:solidFill>
+                <a:effectLst/>
+                <a:latin typeface="Arial" panose="020B0604020202020204" pitchFamily="34" charset="0"/>
+              </a:rPr>
+              <a:t> </a:t>
+            </a:r>
+            <a:r>
+              <a:rPr kumimoji="0" lang="hu-HU" altLang="hu-HU" sz="2800" b="1" i="0" u="none" strike="noStrike" cap="none" normalizeH="0" baseline="0" dirty="0">
+                <a:ln>
+                  <a:noFill/>
+                </a:ln>
+                <a:solidFill>
+                  <a:schemeClr val="tx1"/>
+                </a:solidFill>
+                <a:effectLst/>
+                <a:latin typeface="Arial" panose="020B0604020202020204" pitchFamily="34" charset="0"/>
+              </a:rPr>
+              <a:t>Gyorsabb, stabilabb, energiahatékonyabb</a:t>
+            </a:r>
+            <a:r>
+              <a:rPr kumimoji="0" lang="hu-HU" altLang="hu-HU" sz="2800" b="0" i="0" u="none" strike="noStrike" cap="none" normalizeH="0" baseline="0" dirty="0">
+                <a:ln>
+                  <a:noFill/>
+                </a:ln>
+                <a:solidFill>
+                  <a:schemeClr val="tx1"/>
+                </a:solidFill>
+                <a:effectLst/>
+                <a:latin typeface="Arial" panose="020B0604020202020204" pitchFamily="34" charset="0"/>
+              </a:rPr>
+              <a:t> működés.</a:t>
+            </a:r>
+          </a:p>
+          <a:p>
+            <a:pPr marL="0" marR="0" lvl="0" indent="0" defTabSz="914400" rtl="0" eaLnBrk="0" fontAlgn="base" latinLnBrk="0" hangingPunct="0">
+              <a:lnSpc>
+                <a:spcPct val="100000"/>
+              </a:lnSpc>
+              <a:spcBef>
+                <a:spcPct val="0"/>
+              </a:spcBef>
+              <a:spcAft>
+                <a:spcPct val="0"/>
+              </a:spcAft>
+              <a:buClrTx/>
+              <a:buSzTx/>
+              <a:buFontTx/>
+              <a:buChar char="•"/>
+              <a:tabLst/>
+            </a:pPr>
+            <a:r>
+              <a:rPr kumimoji="0" lang="hu-HU" altLang="hu-HU" sz="2800" b="1" i="0" u="none" strike="noStrike" cap="none" normalizeH="0" baseline="0" dirty="0">
+                <a:ln>
+                  <a:noFill/>
+                </a:ln>
+                <a:solidFill>
+                  <a:schemeClr val="tx1"/>
+                </a:solidFill>
+                <a:effectLst/>
+                <a:latin typeface="Arial" panose="020B0604020202020204" pitchFamily="34" charset="0"/>
+              </a:rPr>
+              <a:t>Jövő:</a:t>
+            </a:r>
+            <a:r>
+              <a:rPr kumimoji="0" lang="hu-HU" altLang="hu-HU" sz="2800" b="0" i="0" u="none" strike="noStrike" cap="none" normalizeH="0" baseline="0" dirty="0">
+                <a:ln>
+                  <a:noFill/>
+                </a:ln>
+                <a:solidFill>
+                  <a:schemeClr val="tx1"/>
+                </a:solidFill>
+                <a:effectLst/>
+                <a:latin typeface="Arial" panose="020B0604020202020204" pitchFamily="34" charset="0"/>
+              </a:rPr>
+              <a:t> Sok eszköz kiszolgálására kész → </a:t>
+            </a:r>
+            <a:r>
+              <a:rPr kumimoji="0" lang="hu-HU" altLang="hu-HU" sz="2800" b="1" i="0" u="none" strike="noStrike" cap="none" normalizeH="0" baseline="0" dirty="0">
+                <a:ln>
+                  <a:noFill/>
+                </a:ln>
+                <a:solidFill>
+                  <a:schemeClr val="tx1"/>
+                </a:solidFill>
+                <a:effectLst/>
+                <a:latin typeface="Arial" panose="020B0604020202020204" pitchFamily="34" charset="0"/>
+              </a:rPr>
+              <a:t>alaptechnológia</a:t>
+            </a:r>
+            <a:r>
+              <a:rPr kumimoji="0" lang="hu-HU" altLang="hu-HU" sz="2800" b="0" i="0" u="none" strike="noStrike" cap="none" normalizeH="0" baseline="0" dirty="0">
+                <a:ln>
+                  <a:noFill/>
+                </a:ln>
+                <a:solidFill>
+                  <a:schemeClr val="tx1"/>
+                </a:solidFill>
+                <a:effectLst/>
+                <a:latin typeface="Arial" panose="020B0604020202020204" pitchFamily="34" charset="0"/>
+              </a:rPr>
+              <a:t>, a </a:t>
+            </a:r>
+            <a:r>
+              <a:rPr kumimoji="0" lang="hu-HU" altLang="hu-HU" sz="2800" b="0" i="0" u="none" strike="noStrike" cap="none" normalizeH="0" baseline="0" dirty="0" err="1">
+                <a:ln>
+                  <a:noFill/>
+                </a:ln>
+                <a:solidFill>
+                  <a:schemeClr val="tx1"/>
+                </a:solidFill>
+                <a:effectLst/>
+                <a:latin typeface="Arial" panose="020B0604020202020204" pitchFamily="34" charset="0"/>
+              </a:rPr>
               <a:t>Wi</a:t>
             </a:r>
             <a:r>
-              <a:rPr lang="hu-HU" sz="2400" dirty="0"/>
-              <a:t>-Fi 6 alaptechnológiává válik, és előkészíti az utat a jövő szabványa, a </a:t>
-            </a:r>
-            <a:r>
-              <a:rPr lang="hu-HU" sz="2400" dirty="0" err="1"/>
-              <a:t>Wi</a:t>
-            </a:r>
-            <a:r>
-              <a:rPr lang="hu-HU" sz="2400" dirty="0"/>
-              <a:t>-Fi 7 előtt.</a:t>
-            </a:r>
-          </a:p>
-          <a:p>
-            <a:endParaRPr lang="hu-HU" dirty="0"/>
+              <a:rPr kumimoji="0" lang="hu-HU" altLang="hu-HU" sz="2800" b="0" i="0" u="none" strike="noStrike" cap="none" normalizeH="0" baseline="0" dirty="0">
+                <a:ln>
+                  <a:noFill/>
+                </a:ln>
+                <a:solidFill>
+                  <a:schemeClr val="tx1"/>
+                </a:solidFill>
+                <a:effectLst/>
+                <a:latin typeface="Arial" panose="020B0604020202020204" pitchFamily="34" charset="0"/>
+              </a:rPr>
+              <a:t>-Fi 7 </a:t>
+            </a:r>
+            <a:r>
+              <a:rPr kumimoji="0" lang="hu-HU" altLang="hu-HU" sz="2800" b="0" i="0" u="none" strike="noStrike" cap="none" normalizeH="0" baseline="0" dirty="0" err="1">
+                <a:ln>
+                  <a:noFill/>
+                </a:ln>
+                <a:solidFill>
+                  <a:schemeClr val="tx1"/>
+                </a:solidFill>
+                <a:effectLst/>
+                <a:latin typeface="Arial" panose="020B0604020202020204" pitchFamily="34" charset="0"/>
+              </a:rPr>
+              <a:t>előfutára</a:t>
+            </a:r>
+            <a:r>
+              <a:rPr kumimoji="0" lang="hu-HU" altLang="hu-HU" sz="2800" b="0" i="0" u="none" strike="noStrike" cap="none" normalizeH="0" baseline="0" dirty="0">
+                <a:ln>
+                  <a:noFill/>
+                </a:ln>
+                <a:solidFill>
+                  <a:schemeClr val="tx1"/>
+                </a:solidFill>
+                <a:effectLst/>
+                <a:latin typeface="Arial" panose="020B0604020202020204" pitchFamily="34" charset="0"/>
+              </a:rPr>
+              <a:t>.</a:t>
+            </a:r>
           </a:p>
         </p:txBody>
       </p:sp>
@@ -9127,18 +8931,6 @@
   <p:clrMapOvr>
     <a:masterClrMapping/>
   </p:clrMapOvr>
-  <mc:AlternateContent xmlns:mc="http://schemas.openxmlformats.org/markup-compatibility/2006" xmlns:p15="http://schemas.microsoft.com/office/powerpoint/2012/main">
-    <mc:Choice Requires="p15">
-      <p:transition xmlns:p14="http://schemas.microsoft.com/office/powerpoint/2010/main" spd="slow" p14:dur="2000">
-        <p15:prstTrans prst="drape"/>
-      </p:transition>
-    </mc:Choice>
-    <mc:Fallback xmlns="">
-      <p:transition spd="slow">
-        <p:fade/>
-      </p:transition>
-    </mc:Fallback>
-  </mc:AlternateContent>
   <p:timing>
     <p:tnLst>
       <p:par>
@@ -9200,1047 +8992,6 @@
                             </p:childTnLst>
                           </p:cTn>
                         </p:par>
-                        <p:par>
-                          <p:cTn id="8" fill="hold">
-                            <p:stCondLst>
-                              <p:cond delay="2000"/>
-                            </p:stCondLst>
-                            <p:childTnLst>
-                              <p:par>
-                                <p:cTn id="9" presetID="26" presetClass="entr" presetSubtype="0" fill="hold" nodeType="afterEffect">
-                                  <p:stCondLst>
-                                    <p:cond delay="0"/>
-                                  </p:stCondLst>
-                                  <p:childTnLst>
-                                    <p:set>
-                                      <p:cBhvr>
-                                        <p:cTn id="10" dur="1" fill="hold">
-                                          <p:stCondLst>
-                                            <p:cond delay="0"/>
-                                          </p:stCondLst>
-                                        </p:cTn>
-                                        <p:tgtEl>
-                                          <p:spTgt spid="3">
-                                            <p:txEl>
-                                              <p:pRg st="0" end="0"/>
-                                            </p:txEl>
-                                          </p:spTgt>
-                                        </p:tgtEl>
-                                        <p:attrNameLst>
-                                          <p:attrName>style.visibility</p:attrName>
-                                        </p:attrNameLst>
-                                      </p:cBhvr>
-                                      <p:to>
-                                        <p:strVal val="visible"/>
-                                      </p:to>
-                                    </p:set>
-                                    <p:animEffect transition="in" filter="wipe(down)">
-                                      <p:cBhvr>
-                                        <p:cTn id="11" dur="580">
-                                          <p:stCondLst>
-                                            <p:cond delay="0"/>
-                                          </p:stCondLst>
-                                        </p:cTn>
-                                        <p:tgtEl>
-                                          <p:spTgt spid="3">
-                                            <p:txEl>
-                                              <p:pRg st="0" end="0"/>
-                                            </p:txEl>
-                                          </p:spTgt>
-                                        </p:tgtEl>
-                                      </p:cBhvr>
-                                    </p:animEffect>
-                                    <p:anim calcmode="lin" valueType="num">
-                                      <p:cBhvr>
-                                        <p:cTn id="12" dur="1822" tmFilter="0,0; 0.14,0.36; 0.43,0.73; 0.71,0.91; 1.0,1.0">
-                                          <p:stCondLst>
-                                            <p:cond delay="0"/>
-                                          </p:stCondLst>
-                                        </p:cTn>
-                                        <p:tgtEl>
-                                          <p:spTgt spid="3">
-                                            <p:txEl>
-                                              <p:pRg st="0" end="0"/>
-                                            </p:txEl>
-                                          </p:spTgt>
-                                        </p:tgtEl>
-                                        <p:attrNameLst>
-                                          <p:attrName>ppt_x</p:attrName>
-                                        </p:attrNameLst>
-                                      </p:cBhvr>
-                                      <p:tavLst>
-                                        <p:tav tm="0">
-                                          <p:val>
-                                            <p:strVal val="#ppt_x-0.25"/>
-                                          </p:val>
-                                        </p:tav>
-                                        <p:tav tm="100000">
-                                          <p:val>
-                                            <p:strVal val="#ppt_x"/>
-                                          </p:val>
-                                        </p:tav>
-                                      </p:tavLst>
-                                    </p:anim>
-                                    <p:anim calcmode="lin" valueType="num">
-                                      <p:cBhvr>
-                                        <p:cTn id="13" dur="664" tmFilter="0.0,0.0; 0.25,0.07; 0.50,0.2; 0.75,0.467; 1.0,1.0">
-                                          <p:stCondLst>
-                                            <p:cond delay="0"/>
-                                          </p:stCondLst>
-                                        </p:cTn>
-                                        <p:tgtEl>
-                                          <p:spTgt spid="3">
-                                            <p:txEl>
-                                              <p:pRg st="0" end="0"/>
-                                            </p:txEl>
-                                          </p:spTgt>
-                                        </p:tgtEl>
-                                        <p:attrNameLst>
-                                          <p:attrName>ppt_y</p:attrName>
-                                        </p:attrNameLst>
-                                      </p:cBhvr>
-                                      <p:tavLst>
-                                        <p:tav tm="0" fmla="#ppt_y-sin(pi*$)/3">
-                                          <p:val>
-                                            <p:fltVal val="0.5"/>
-                                          </p:val>
-                                        </p:tav>
-                                        <p:tav tm="100000">
-                                          <p:val>
-                                            <p:fltVal val="1"/>
-                                          </p:val>
-                                        </p:tav>
-                                      </p:tavLst>
-                                    </p:anim>
-                                    <p:anim calcmode="lin" valueType="num">
-                                      <p:cBhvr>
-                                        <p:cTn id="14" dur="664" tmFilter="0, 0; 0.125,0.2665; 0.25,0.4; 0.375,0.465; 0.5,0.5;  0.625,0.535; 0.75,0.6; 0.875,0.7335; 1,1">
-                                          <p:stCondLst>
-                                            <p:cond delay="664"/>
-                                          </p:stCondLst>
-                                        </p:cTn>
-                                        <p:tgtEl>
-                                          <p:spTgt spid="3">
-                                            <p:txEl>
-                                              <p:pRg st="0" end="0"/>
-                                            </p:txEl>
-                                          </p:spTgt>
-                                        </p:tgtEl>
-                                        <p:attrNameLst>
-                                          <p:attrName>ppt_y</p:attrName>
-                                        </p:attrNameLst>
-                                      </p:cBhvr>
-                                      <p:tavLst>
-                                        <p:tav tm="0" fmla="#ppt_y-sin(pi*$)/9">
-                                          <p:val>
-                                            <p:fltVal val="0"/>
-                                          </p:val>
-                                        </p:tav>
-                                        <p:tav tm="100000">
-                                          <p:val>
-                                            <p:fltVal val="1"/>
-                                          </p:val>
-                                        </p:tav>
-                                      </p:tavLst>
-                                    </p:anim>
-                                    <p:anim calcmode="lin" valueType="num">
-                                      <p:cBhvr>
-                                        <p:cTn id="15" dur="332" tmFilter="0, 0; 0.125,0.2665; 0.25,0.4; 0.375,0.465; 0.5,0.5;  0.625,0.535; 0.75,0.6; 0.875,0.7335; 1,1">
-                                          <p:stCondLst>
-                                            <p:cond delay="1324"/>
-                                          </p:stCondLst>
-                                        </p:cTn>
-                                        <p:tgtEl>
-                                          <p:spTgt spid="3">
-                                            <p:txEl>
-                                              <p:pRg st="0" end="0"/>
-                                            </p:txEl>
-                                          </p:spTgt>
-                                        </p:tgtEl>
-                                        <p:attrNameLst>
-                                          <p:attrName>ppt_y</p:attrName>
-                                        </p:attrNameLst>
-                                      </p:cBhvr>
-                                      <p:tavLst>
-                                        <p:tav tm="0" fmla="#ppt_y-sin(pi*$)/27">
-                                          <p:val>
-                                            <p:fltVal val="0"/>
-                                          </p:val>
-                                        </p:tav>
-                                        <p:tav tm="100000">
-                                          <p:val>
-                                            <p:fltVal val="1"/>
-                                          </p:val>
-                                        </p:tav>
-                                      </p:tavLst>
-                                    </p:anim>
-                                    <p:anim calcmode="lin" valueType="num">
-                                      <p:cBhvr>
-                                        <p:cTn id="16" dur="164" tmFilter="0, 0; 0.125,0.2665; 0.25,0.4; 0.375,0.465; 0.5,0.5;  0.625,0.535; 0.75,0.6; 0.875,0.7335; 1,1">
-                                          <p:stCondLst>
-                                            <p:cond delay="1656"/>
-                                          </p:stCondLst>
-                                        </p:cTn>
-                                        <p:tgtEl>
-                                          <p:spTgt spid="3">
-                                            <p:txEl>
-                                              <p:pRg st="0" end="0"/>
-                                            </p:txEl>
-                                          </p:spTgt>
-                                        </p:tgtEl>
-                                        <p:attrNameLst>
-                                          <p:attrName>ppt_y</p:attrName>
-                                        </p:attrNameLst>
-                                      </p:cBhvr>
-                                      <p:tavLst>
-                                        <p:tav tm="0" fmla="#ppt_y-sin(pi*$)/81">
-                                          <p:val>
-                                            <p:fltVal val="0"/>
-                                          </p:val>
-                                        </p:tav>
-                                        <p:tav tm="100000">
-                                          <p:val>
-                                            <p:fltVal val="1"/>
-                                          </p:val>
-                                        </p:tav>
-                                      </p:tavLst>
-                                    </p:anim>
-                                    <p:animScale>
-                                      <p:cBhvr>
-                                        <p:cTn id="17" dur="26">
-                                          <p:stCondLst>
-                                            <p:cond delay="650"/>
-                                          </p:stCondLst>
-                                        </p:cTn>
-                                        <p:tgtEl>
-                                          <p:spTgt spid="3">
-                                            <p:txEl>
-                                              <p:pRg st="0" end="0"/>
-                                            </p:txEl>
-                                          </p:spTgt>
-                                        </p:tgtEl>
-                                      </p:cBhvr>
-                                      <p:to x="100000" y="60000"/>
-                                    </p:animScale>
-                                    <p:animScale>
-                                      <p:cBhvr>
-                                        <p:cTn id="18" dur="166" decel="50000">
-                                          <p:stCondLst>
-                                            <p:cond delay="676"/>
-                                          </p:stCondLst>
-                                        </p:cTn>
-                                        <p:tgtEl>
-                                          <p:spTgt spid="3">
-                                            <p:txEl>
-                                              <p:pRg st="0" end="0"/>
-                                            </p:txEl>
-                                          </p:spTgt>
-                                        </p:tgtEl>
-                                      </p:cBhvr>
-                                      <p:to x="100000" y="100000"/>
-                                    </p:animScale>
-                                    <p:animScale>
-                                      <p:cBhvr>
-                                        <p:cTn id="19" dur="26">
-                                          <p:stCondLst>
-                                            <p:cond delay="1312"/>
-                                          </p:stCondLst>
-                                        </p:cTn>
-                                        <p:tgtEl>
-                                          <p:spTgt spid="3">
-                                            <p:txEl>
-                                              <p:pRg st="0" end="0"/>
-                                            </p:txEl>
-                                          </p:spTgt>
-                                        </p:tgtEl>
-                                      </p:cBhvr>
-                                      <p:to x="100000" y="80000"/>
-                                    </p:animScale>
-                                    <p:animScale>
-                                      <p:cBhvr>
-                                        <p:cTn id="20" dur="166" decel="50000">
-                                          <p:stCondLst>
-                                            <p:cond delay="1338"/>
-                                          </p:stCondLst>
-                                        </p:cTn>
-                                        <p:tgtEl>
-                                          <p:spTgt spid="3">
-                                            <p:txEl>
-                                              <p:pRg st="0" end="0"/>
-                                            </p:txEl>
-                                          </p:spTgt>
-                                        </p:tgtEl>
-                                      </p:cBhvr>
-                                      <p:to x="100000" y="100000"/>
-                                    </p:animScale>
-                                    <p:animScale>
-                                      <p:cBhvr>
-                                        <p:cTn id="21" dur="26">
-                                          <p:stCondLst>
-                                            <p:cond delay="1642"/>
-                                          </p:stCondLst>
-                                        </p:cTn>
-                                        <p:tgtEl>
-                                          <p:spTgt spid="3">
-                                            <p:txEl>
-                                              <p:pRg st="0" end="0"/>
-                                            </p:txEl>
-                                          </p:spTgt>
-                                        </p:tgtEl>
-                                      </p:cBhvr>
-                                      <p:to x="100000" y="90000"/>
-                                    </p:animScale>
-                                    <p:animScale>
-                                      <p:cBhvr>
-                                        <p:cTn id="22" dur="166" decel="50000">
-                                          <p:stCondLst>
-                                            <p:cond delay="1668"/>
-                                          </p:stCondLst>
-                                        </p:cTn>
-                                        <p:tgtEl>
-                                          <p:spTgt spid="3">
-                                            <p:txEl>
-                                              <p:pRg st="0" end="0"/>
-                                            </p:txEl>
-                                          </p:spTgt>
-                                        </p:tgtEl>
-                                      </p:cBhvr>
-                                      <p:to x="100000" y="100000"/>
-                                    </p:animScale>
-                                    <p:animScale>
-                                      <p:cBhvr>
-                                        <p:cTn id="23" dur="26">
-                                          <p:stCondLst>
-                                            <p:cond delay="1808"/>
-                                          </p:stCondLst>
-                                        </p:cTn>
-                                        <p:tgtEl>
-                                          <p:spTgt spid="3">
-                                            <p:txEl>
-                                              <p:pRg st="0" end="0"/>
-                                            </p:txEl>
-                                          </p:spTgt>
-                                        </p:tgtEl>
-                                      </p:cBhvr>
-                                      <p:to x="100000" y="95000"/>
-                                    </p:animScale>
-                                    <p:animScale>
-                                      <p:cBhvr>
-                                        <p:cTn id="24" dur="166" decel="50000">
-                                          <p:stCondLst>
-                                            <p:cond delay="1834"/>
-                                          </p:stCondLst>
-                                        </p:cTn>
-                                        <p:tgtEl>
-                                          <p:spTgt spid="3">
-                                            <p:txEl>
-                                              <p:pRg st="0" end="0"/>
-                                            </p:txEl>
-                                          </p:spTgt>
-                                        </p:tgtEl>
-                                      </p:cBhvr>
-                                      <p:to x="100000" y="100000"/>
-                                    </p:animScale>
-                                  </p:childTnLst>
-                                </p:cTn>
-                              </p:par>
-                            </p:childTnLst>
-                          </p:cTn>
-                        </p:par>
-                        <p:par>
-                          <p:cTn id="25" fill="hold">
-                            <p:stCondLst>
-                              <p:cond delay="4000"/>
-                            </p:stCondLst>
-                            <p:childTnLst>
-                              <p:par>
-                                <p:cTn id="26" presetID="26" presetClass="entr" presetSubtype="0" fill="hold" nodeType="afterEffect">
-                                  <p:stCondLst>
-                                    <p:cond delay="0"/>
-                                  </p:stCondLst>
-                                  <p:childTnLst>
-                                    <p:set>
-                                      <p:cBhvr>
-                                        <p:cTn id="27" dur="1" fill="hold">
-                                          <p:stCondLst>
-                                            <p:cond delay="0"/>
-                                          </p:stCondLst>
-                                        </p:cTn>
-                                        <p:tgtEl>
-                                          <p:spTgt spid="3">
-                                            <p:txEl>
-                                              <p:pRg st="1" end="1"/>
-                                            </p:txEl>
-                                          </p:spTgt>
-                                        </p:tgtEl>
-                                        <p:attrNameLst>
-                                          <p:attrName>style.visibility</p:attrName>
-                                        </p:attrNameLst>
-                                      </p:cBhvr>
-                                      <p:to>
-                                        <p:strVal val="visible"/>
-                                      </p:to>
-                                    </p:set>
-                                    <p:animEffect transition="in" filter="wipe(down)">
-                                      <p:cBhvr>
-                                        <p:cTn id="28" dur="580">
-                                          <p:stCondLst>
-                                            <p:cond delay="0"/>
-                                          </p:stCondLst>
-                                        </p:cTn>
-                                        <p:tgtEl>
-                                          <p:spTgt spid="3">
-                                            <p:txEl>
-                                              <p:pRg st="1" end="1"/>
-                                            </p:txEl>
-                                          </p:spTgt>
-                                        </p:tgtEl>
-                                      </p:cBhvr>
-                                    </p:animEffect>
-                                    <p:anim calcmode="lin" valueType="num">
-                                      <p:cBhvr>
-                                        <p:cTn id="29" dur="1822" tmFilter="0,0; 0.14,0.36; 0.43,0.73; 0.71,0.91; 1.0,1.0">
-                                          <p:stCondLst>
-                                            <p:cond delay="0"/>
-                                          </p:stCondLst>
-                                        </p:cTn>
-                                        <p:tgtEl>
-                                          <p:spTgt spid="3">
-                                            <p:txEl>
-                                              <p:pRg st="1" end="1"/>
-                                            </p:txEl>
-                                          </p:spTgt>
-                                        </p:tgtEl>
-                                        <p:attrNameLst>
-                                          <p:attrName>ppt_x</p:attrName>
-                                        </p:attrNameLst>
-                                      </p:cBhvr>
-                                      <p:tavLst>
-                                        <p:tav tm="0">
-                                          <p:val>
-                                            <p:strVal val="#ppt_x-0.25"/>
-                                          </p:val>
-                                        </p:tav>
-                                        <p:tav tm="100000">
-                                          <p:val>
-                                            <p:strVal val="#ppt_x"/>
-                                          </p:val>
-                                        </p:tav>
-                                      </p:tavLst>
-                                    </p:anim>
-                                    <p:anim calcmode="lin" valueType="num">
-                                      <p:cBhvr>
-                                        <p:cTn id="30" dur="664" tmFilter="0.0,0.0; 0.25,0.07; 0.50,0.2; 0.75,0.467; 1.0,1.0">
-                                          <p:stCondLst>
-                                            <p:cond delay="0"/>
-                                          </p:stCondLst>
-                                        </p:cTn>
-                                        <p:tgtEl>
-                                          <p:spTgt spid="3">
-                                            <p:txEl>
-                                              <p:pRg st="1" end="1"/>
-                                            </p:txEl>
-                                          </p:spTgt>
-                                        </p:tgtEl>
-                                        <p:attrNameLst>
-                                          <p:attrName>ppt_y</p:attrName>
-                                        </p:attrNameLst>
-                                      </p:cBhvr>
-                                      <p:tavLst>
-                                        <p:tav tm="0" fmla="#ppt_y-sin(pi*$)/3">
-                                          <p:val>
-                                            <p:fltVal val="0.5"/>
-                                          </p:val>
-                                        </p:tav>
-                                        <p:tav tm="100000">
-                                          <p:val>
-                                            <p:fltVal val="1"/>
-                                          </p:val>
-                                        </p:tav>
-                                      </p:tavLst>
-                                    </p:anim>
-                                    <p:anim calcmode="lin" valueType="num">
-                                      <p:cBhvr>
-                                        <p:cTn id="31" dur="664" tmFilter="0, 0; 0.125,0.2665; 0.25,0.4; 0.375,0.465; 0.5,0.5;  0.625,0.535; 0.75,0.6; 0.875,0.7335; 1,1">
-                                          <p:stCondLst>
-                                            <p:cond delay="664"/>
-                                          </p:stCondLst>
-                                        </p:cTn>
-                                        <p:tgtEl>
-                                          <p:spTgt spid="3">
-                                            <p:txEl>
-                                              <p:pRg st="1" end="1"/>
-                                            </p:txEl>
-                                          </p:spTgt>
-                                        </p:tgtEl>
-                                        <p:attrNameLst>
-                                          <p:attrName>ppt_y</p:attrName>
-                                        </p:attrNameLst>
-                                      </p:cBhvr>
-                                      <p:tavLst>
-                                        <p:tav tm="0" fmla="#ppt_y-sin(pi*$)/9">
-                                          <p:val>
-                                            <p:fltVal val="0"/>
-                                          </p:val>
-                                        </p:tav>
-                                        <p:tav tm="100000">
-                                          <p:val>
-                                            <p:fltVal val="1"/>
-                                          </p:val>
-                                        </p:tav>
-                                      </p:tavLst>
-                                    </p:anim>
-                                    <p:anim calcmode="lin" valueType="num">
-                                      <p:cBhvr>
-                                        <p:cTn id="32" dur="332" tmFilter="0, 0; 0.125,0.2665; 0.25,0.4; 0.375,0.465; 0.5,0.5;  0.625,0.535; 0.75,0.6; 0.875,0.7335; 1,1">
-                                          <p:stCondLst>
-                                            <p:cond delay="1324"/>
-                                          </p:stCondLst>
-                                        </p:cTn>
-                                        <p:tgtEl>
-                                          <p:spTgt spid="3">
-                                            <p:txEl>
-                                              <p:pRg st="1" end="1"/>
-                                            </p:txEl>
-                                          </p:spTgt>
-                                        </p:tgtEl>
-                                        <p:attrNameLst>
-                                          <p:attrName>ppt_y</p:attrName>
-                                        </p:attrNameLst>
-                                      </p:cBhvr>
-                                      <p:tavLst>
-                                        <p:tav tm="0" fmla="#ppt_y-sin(pi*$)/27">
-                                          <p:val>
-                                            <p:fltVal val="0"/>
-                                          </p:val>
-                                        </p:tav>
-                                        <p:tav tm="100000">
-                                          <p:val>
-                                            <p:fltVal val="1"/>
-                                          </p:val>
-                                        </p:tav>
-                                      </p:tavLst>
-                                    </p:anim>
-                                    <p:anim calcmode="lin" valueType="num">
-                                      <p:cBhvr>
-                                        <p:cTn id="33" dur="164" tmFilter="0, 0; 0.125,0.2665; 0.25,0.4; 0.375,0.465; 0.5,0.5;  0.625,0.535; 0.75,0.6; 0.875,0.7335; 1,1">
-                                          <p:stCondLst>
-                                            <p:cond delay="1656"/>
-                                          </p:stCondLst>
-                                        </p:cTn>
-                                        <p:tgtEl>
-                                          <p:spTgt spid="3">
-                                            <p:txEl>
-                                              <p:pRg st="1" end="1"/>
-                                            </p:txEl>
-                                          </p:spTgt>
-                                        </p:tgtEl>
-                                        <p:attrNameLst>
-                                          <p:attrName>ppt_y</p:attrName>
-                                        </p:attrNameLst>
-                                      </p:cBhvr>
-                                      <p:tavLst>
-                                        <p:tav tm="0" fmla="#ppt_y-sin(pi*$)/81">
-                                          <p:val>
-                                            <p:fltVal val="0"/>
-                                          </p:val>
-                                        </p:tav>
-                                        <p:tav tm="100000">
-                                          <p:val>
-                                            <p:fltVal val="1"/>
-                                          </p:val>
-                                        </p:tav>
-                                      </p:tavLst>
-                                    </p:anim>
-                                    <p:animScale>
-                                      <p:cBhvr>
-                                        <p:cTn id="34" dur="26">
-                                          <p:stCondLst>
-                                            <p:cond delay="650"/>
-                                          </p:stCondLst>
-                                        </p:cTn>
-                                        <p:tgtEl>
-                                          <p:spTgt spid="3">
-                                            <p:txEl>
-                                              <p:pRg st="1" end="1"/>
-                                            </p:txEl>
-                                          </p:spTgt>
-                                        </p:tgtEl>
-                                      </p:cBhvr>
-                                      <p:to x="100000" y="60000"/>
-                                    </p:animScale>
-                                    <p:animScale>
-                                      <p:cBhvr>
-                                        <p:cTn id="35" dur="166" decel="50000">
-                                          <p:stCondLst>
-                                            <p:cond delay="676"/>
-                                          </p:stCondLst>
-                                        </p:cTn>
-                                        <p:tgtEl>
-                                          <p:spTgt spid="3">
-                                            <p:txEl>
-                                              <p:pRg st="1" end="1"/>
-                                            </p:txEl>
-                                          </p:spTgt>
-                                        </p:tgtEl>
-                                      </p:cBhvr>
-                                      <p:to x="100000" y="100000"/>
-                                    </p:animScale>
-                                    <p:animScale>
-                                      <p:cBhvr>
-                                        <p:cTn id="36" dur="26">
-                                          <p:stCondLst>
-                                            <p:cond delay="1312"/>
-                                          </p:stCondLst>
-                                        </p:cTn>
-                                        <p:tgtEl>
-                                          <p:spTgt spid="3">
-                                            <p:txEl>
-                                              <p:pRg st="1" end="1"/>
-                                            </p:txEl>
-                                          </p:spTgt>
-                                        </p:tgtEl>
-                                      </p:cBhvr>
-                                      <p:to x="100000" y="80000"/>
-                                    </p:animScale>
-                                    <p:animScale>
-                                      <p:cBhvr>
-                                        <p:cTn id="37" dur="166" decel="50000">
-                                          <p:stCondLst>
-                                            <p:cond delay="1338"/>
-                                          </p:stCondLst>
-                                        </p:cTn>
-                                        <p:tgtEl>
-                                          <p:spTgt spid="3">
-                                            <p:txEl>
-                                              <p:pRg st="1" end="1"/>
-                                            </p:txEl>
-                                          </p:spTgt>
-                                        </p:tgtEl>
-                                      </p:cBhvr>
-                                      <p:to x="100000" y="100000"/>
-                                    </p:animScale>
-                                    <p:animScale>
-                                      <p:cBhvr>
-                                        <p:cTn id="38" dur="26">
-                                          <p:stCondLst>
-                                            <p:cond delay="1642"/>
-                                          </p:stCondLst>
-                                        </p:cTn>
-                                        <p:tgtEl>
-                                          <p:spTgt spid="3">
-                                            <p:txEl>
-                                              <p:pRg st="1" end="1"/>
-                                            </p:txEl>
-                                          </p:spTgt>
-                                        </p:tgtEl>
-                                      </p:cBhvr>
-                                      <p:to x="100000" y="90000"/>
-                                    </p:animScale>
-                                    <p:animScale>
-                                      <p:cBhvr>
-                                        <p:cTn id="39" dur="166" decel="50000">
-                                          <p:stCondLst>
-                                            <p:cond delay="1668"/>
-                                          </p:stCondLst>
-                                        </p:cTn>
-                                        <p:tgtEl>
-                                          <p:spTgt spid="3">
-                                            <p:txEl>
-                                              <p:pRg st="1" end="1"/>
-                                            </p:txEl>
-                                          </p:spTgt>
-                                        </p:tgtEl>
-                                      </p:cBhvr>
-                                      <p:to x="100000" y="100000"/>
-                                    </p:animScale>
-                                    <p:animScale>
-                                      <p:cBhvr>
-                                        <p:cTn id="40" dur="26">
-                                          <p:stCondLst>
-                                            <p:cond delay="1808"/>
-                                          </p:stCondLst>
-                                        </p:cTn>
-                                        <p:tgtEl>
-                                          <p:spTgt spid="3">
-                                            <p:txEl>
-                                              <p:pRg st="1" end="1"/>
-                                            </p:txEl>
-                                          </p:spTgt>
-                                        </p:tgtEl>
-                                      </p:cBhvr>
-                                      <p:to x="100000" y="95000"/>
-                                    </p:animScale>
-                                    <p:animScale>
-                                      <p:cBhvr>
-                                        <p:cTn id="41" dur="166" decel="50000">
-                                          <p:stCondLst>
-                                            <p:cond delay="1834"/>
-                                          </p:stCondLst>
-                                        </p:cTn>
-                                        <p:tgtEl>
-                                          <p:spTgt spid="3">
-                                            <p:txEl>
-                                              <p:pRg st="1" end="1"/>
-                                            </p:txEl>
-                                          </p:spTgt>
-                                        </p:tgtEl>
-                                      </p:cBhvr>
-                                      <p:to x="100000" y="100000"/>
-                                    </p:animScale>
-                                  </p:childTnLst>
-                                </p:cTn>
-                              </p:par>
-                            </p:childTnLst>
-                          </p:cTn>
-                        </p:par>
-                        <p:par>
-                          <p:cTn id="42" fill="hold">
-                            <p:stCondLst>
-                              <p:cond delay="6000"/>
-                            </p:stCondLst>
-                            <p:childTnLst>
-                              <p:par>
-                                <p:cTn id="43" presetID="26" presetClass="entr" presetSubtype="0" fill="hold" nodeType="afterEffect">
-                                  <p:stCondLst>
-                                    <p:cond delay="0"/>
-                                  </p:stCondLst>
-                                  <p:childTnLst>
-                                    <p:set>
-                                      <p:cBhvr>
-                                        <p:cTn id="44" dur="1" fill="hold">
-                                          <p:stCondLst>
-                                            <p:cond delay="0"/>
-                                          </p:stCondLst>
-                                        </p:cTn>
-                                        <p:tgtEl>
-                                          <p:spTgt spid="3">
-                                            <p:txEl>
-                                              <p:pRg st="2" end="2"/>
-                                            </p:txEl>
-                                          </p:spTgt>
-                                        </p:tgtEl>
-                                        <p:attrNameLst>
-                                          <p:attrName>style.visibility</p:attrName>
-                                        </p:attrNameLst>
-                                      </p:cBhvr>
-                                      <p:to>
-                                        <p:strVal val="visible"/>
-                                      </p:to>
-                                    </p:set>
-                                    <p:animEffect transition="in" filter="wipe(down)">
-                                      <p:cBhvr>
-                                        <p:cTn id="45" dur="580">
-                                          <p:stCondLst>
-                                            <p:cond delay="0"/>
-                                          </p:stCondLst>
-                                        </p:cTn>
-                                        <p:tgtEl>
-                                          <p:spTgt spid="3">
-                                            <p:txEl>
-                                              <p:pRg st="2" end="2"/>
-                                            </p:txEl>
-                                          </p:spTgt>
-                                        </p:tgtEl>
-                                      </p:cBhvr>
-                                    </p:animEffect>
-                                    <p:anim calcmode="lin" valueType="num">
-                                      <p:cBhvr>
-                                        <p:cTn id="46" dur="1822" tmFilter="0,0; 0.14,0.36; 0.43,0.73; 0.71,0.91; 1.0,1.0">
-                                          <p:stCondLst>
-                                            <p:cond delay="0"/>
-                                          </p:stCondLst>
-                                        </p:cTn>
-                                        <p:tgtEl>
-                                          <p:spTgt spid="3">
-                                            <p:txEl>
-                                              <p:pRg st="2" end="2"/>
-                                            </p:txEl>
-                                          </p:spTgt>
-                                        </p:tgtEl>
-                                        <p:attrNameLst>
-                                          <p:attrName>ppt_x</p:attrName>
-                                        </p:attrNameLst>
-                                      </p:cBhvr>
-                                      <p:tavLst>
-                                        <p:tav tm="0">
-                                          <p:val>
-                                            <p:strVal val="#ppt_x-0.25"/>
-                                          </p:val>
-                                        </p:tav>
-                                        <p:tav tm="100000">
-                                          <p:val>
-                                            <p:strVal val="#ppt_x"/>
-                                          </p:val>
-                                        </p:tav>
-                                      </p:tavLst>
-                                    </p:anim>
-                                    <p:anim calcmode="lin" valueType="num">
-                                      <p:cBhvr>
-                                        <p:cTn id="47" dur="664" tmFilter="0.0,0.0; 0.25,0.07; 0.50,0.2; 0.75,0.467; 1.0,1.0">
-                                          <p:stCondLst>
-                                            <p:cond delay="0"/>
-                                          </p:stCondLst>
-                                        </p:cTn>
-                                        <p:tgtEl>
-                                          <p:spTgt spid="3">
-                                            <p:txEl>
-                                              <p:pRg st="2" end="2"/>
-                                            </p:txEl>
-                                          </p:spTgt>
-                                        </p:tgtEl>
-                                        <p:attrNameLst>
-                                          <p:attrName>ppt_y</p:attrName>
-                                        </p:attrNameLst>
-                                      </p:cBhvr>
-                                      <p:tavLst>
-                                        <p:tav tm="0" fmla="#ppt_y-sin(pi*$)/3">
-                                          <p:val>
-                                            <p:fltVal val="0.5"/>
-                                          </p:val>
-                                        </p:tav>
-                                        <p:tav tm="100000">
-                                          <p:val>
-                                            <p:fltVal val="1"/>
-                                          </p:val>
-                                        </p:tav>
-                                      </p:tavLst>
-                                    </p:anim>
-                                    <p:anim calcmode="lin" valueType="num">
-                                      <p:cBhvr>
-                                        <p:cTn id="48" dur="664" tmFilter="0, 0; 0.125,0.2665; 0.25,0.4; 0.375,0.465; 0.5,0.5;  0.625,0.535; 0.75,0.6; 0.875,0.7335; 1,1">
-                                          <p:stCondLst>
-                                            <p:cond delay="664"/>
-                                          </p:stCondLst>
-                                        </p:cTn>
-                                        <p:tgtEl>
-                                          <p:spTgt spid="3">
-                                            <p:txEl>
-                                              <p:pRg st="2" end="2"/>
-                                            </p:txEl>
-                                          </p:spTgt>
-                                        </p:tgtEl>
-                                        <p:attrNameLst>
-                                          <p:attrName>ppt_y</p:attrName>
-                                        </p:attrNameLst>
-                                      </p:cBhvr>
-                                      <p:tavLst>
-                                        <p:tav tm="0" fmla="#ppt_y-sin(pi*$)/9">
-                                          <p:val>
-                                            <p:fltVal val="0"/>
-                                          </p:val>
-                                        </p:tav>
-                                        <p:tav tm="100000">
-                                          <p:val>
-                                            <p:fltVal val="1"/>
-                                          </p:val>
-                                        </p:tav>
-                                      </p:tavLst>
-                                    </p:anim>
-                                    <p:anim calcmode="lin" valueType="num">
-                                      <p:cBhvr>
-                                        <p:cTn id="49" dur="332" tmFilter="0, 0; 0.125,0.2665; 0.25,0.4; 0.375,0.465; 0.5,0.5;  0.625,0.535; 0.75,0.6; 0.875,0.7335; 1,1">
-                                          <p:stCondLst>
-                                            <p:cond delay="1324"/>
-                                          </p:stCondLst>
-                                        </p:cTn>
-                                        <p:tgtEl>
-                                          <p:spTgt spid="3">
-                                            <p:txEl>
-                                              <p:pRg st="2" end="2"/>
-                                            </p:txEl>
-                                          </p:spTgt>
-                                        </p:tgtEl>
-                                        <p:attrNameLst>
-                                          <p:attrName>ppt_y</p:attrName>
-                                        </p:attrNameLst>
-                                      </p:cBhvr>
-                                      <p:tavLst>
-                                        <p:tav tm="0" fmla="#ppt_y-sin(pi*$)/27">
-                                          <p:val>
-                                            <p:fltVal val="0"/>
-                                          </p:val>
-                                        </p:tav>
-                                        <p:tav tm="100000">
-                                          <p:val>
-                                            <p:fltVal val="1"/>
-                                          </p:val>
-                                        </p:tav>
-                                      </p:tavLst>
-                                    </p:anim>
-                                    <p:anim calcmode="lin" valueType="num">
-                                      <p:cBhvr>
-                                        <p:cTn id="50" dur="164" tmFilter="0, 0; 0.125,0.2665; 0.25,0.4; 0.375,0.465; 0.5,0.5;  0.625,0.535; 0.75,0.6; 0.875,0.7335; 1,1">
-                                          <p:stCondLst>
-                                            <p:cond delay="1656"/>
-                                          </p:stCondLst>
-                                        </p:cTn>
-                                        <p:tgtEl>
-                                          <p:spTgt spid="3">
-                                            <p:txEl>
-                                              <p:pRg st="2" end="2"/>
-                                            </p:txEl>
-                                          </p:spTgt>
-                                        </p:tgtEl>
-                                        <p:attrNameLst>
-                                          <p:attrName>ppt_y</p:attrName>
-                                        </p:attrNameLst>
-                                      </p:cBhvr>
-                                      <p:tavLst>
-                                        <p:tav tm="0" fmla="#ppt_y-sin(pi*$)/81">
-                                          <p:val>
-                                            <p:fltVal val="0"/>
-                                          </p:val>
-                                        </p:tav>
-                                        <p:tav tm="100000">
-                                          <p:val>
-                                            <p:fltVal val="1"/>
-                                          </p:val>
-                                        </p:tav>
-                                      </p:tavLst>
-                                    </p:anim>
-                                    <p:animScale>
-                                      <p:cBhvr>
-                                        <p:cTn id="51" dur="26">
-                                          <p:stCondLst>
-                                            <p:cond delay="650"/>
-                                          </p:stCondLst>
-                                        </p:cTn>
-                                        <p:tgtEl>
-                                          <p:spTgt spid="3">
-                                            <p:txEl>
-                                              <p:pRg st="2" end="2"/>
-                                            </p:txEl>
-                                          </p:spTgt>
-                                        </p:tgtEl>
-                                      </p:cBhvr>
-                                      <p:to x="100000" y="60000"/>
-                                    </p:animScale>
-                                    <p:animScale>
-                                      <p:cBhvr>
-                                        <p:cTn id="52" dur="166" decel="50000">
-                                          <p:stCondLst>
-                                            <p:cond delay="676"/>
-                                          </p:stCondLst>
-                                        </p:cTn>
-                                        <p:tgtEl>
-                                          <p:spTgt spid="3">
-                                            <p:txEl>
-                                              <p:pRg st="2" end="2"/>
-                                            </p:txEl>
-                                          </p:spTgt>
-                                        </p:tgtEl>
-                                      </p:cBhvr>
-                                      <p:to x="100000" y="100000"/>
-                                    </p:animScale>
-                                    <p:animScale>
-                                      <p:cBhvr>
-                                        <p:cTn id="53" dur="26">
-                                          <p:stCondLst>
-                                            <p:cond delay="1312"/>
-                                          </p:stCondLst>
-                                        </p:cTn>
-                                        <p:tgtEl>
-                                          <p:spTgt spid="3">
-                                            <p:txEl>
-                                              <p:pRg st="2" end="2"/>
-                                            </p:txEl>
-                                          </p:spTgt>
-                                        </p:tgtEl>
-                                      </p:cBhvr>
-                                      <p:to x="100000" y="80000"/>
-                                    </p:animScale>
-                                    <p:animScale>
-                                      <p:cBhvr>
-                                        <p:cTn id="54" dur="166" decel="50000">
-                                          <p:stCondLst>
-                                            <p:cond delay="1338"/>
-                                          </p:stCondLst>
-                                        </p:cTn>
-                                        <p:tgtEl>
-                                          <p:spTgt spid="3">
-                                            <p:txEl>
-                                              <p:pRg st="2" end="2"/>
-                                            </p:txEl>
-                                          </p:spTgt>
-                                        </p:tgtEl>
-                                      </p:cBhvr>
-                                      <p:to x="100000" y="100000"/>
-                                    </p:animScale>
-                                    <p:animScale>
-                                      <p:cBhvr>
-                                        <p:cTn id="55" dur="26">
-                                          <p:stCondLst>
-                                            <p:cond delay="1642"/>
-                                          </p:stCondLst>
-                                        </p:cTn>
-                                        <p:tgtEl>
-                                          <p:spTgt spid="3">
-                                            <p:txEl>
-                                              <p:pRg st="2" end="2"/>
-                                            </p:txEl>
-                                          </p:spTgt>
-                                        </p:tgtEl>
-                                      </p:cBhvr>
-                                      <p:to x="100000" y="90000"/>
-                                    </p:animScale>
-                                    <p:animScale>
-                                      <p:cBhvr>
-                                        <p:cTn id="56" dur="166" decel="50000">
-                                          <p:stCondLst>
-                                            <p:cond delay="1668"/>
-                                          </p:stCondLst>
-                                        </p:cTn>
-                                        <p:tgtEl>
-                                          <p:spTgt spid="3">
-                                            <p:txEl>
-                                              <p:pRg st="2" end="2"/>
-                                            </p:txEl>
-                                          </p:spTgt>
-                                        </p:tgtEl>
-                                      </p:cBhvr>
-                                      <p:to x="100000" y="100000"/>
-                                    </p:animScale>
-                                    <p:animScale>
-                                      <p:cBhvr>
-                                        <p:cTn id="57" dur="26">
-                                          <p:stCondLst>
-                                            <p:cond delay="1808"/>
-                                          </p:stCondLst>
-                                        </p:cTn>
-                                        <p:tgtEl>
-                                          <p:spTgt spid="3">
-                                            <p:txEl>
-                                              <p:pRg st="2" end="2"/>
-                                            </p:txEl>
-                                          </p:spTgt>
-                                        </p:tgtEl>
-                                      </p:cBhvr>
-                                      <p:to x="100000" y="95000"/>
-                                    </p:animScale>
-                                    <p:animScale>
-                                      <p:cBhvr>
-                                        <p:cTn id="58" dur="166" decel="50000">
-                                          <p:stCondLst>
-                                            <p:cond delay="1834"/>
-                                          </p:stCondLst>
-                                        </p:cTn>
-                                        <p:tgtEl>
-                                          <p:spTgt spid="3">
-                                            <p:txEl>
-                                              <p:pRg st="2" end="2"/>
-                                            </p:txEl>
-                                          </p:spTgt>
-                                        </p:tgtEl>
-                                      </p:cBhvr>
-                                      <p:to x="100000" y="100000"/>
-                                    </p:animScale>
-                                  </p:childTnLst>
-                                </p:cTn>
-                              </p:par>
-                            </p:childTnLst>
-                          </p:cTn>
-                        </p:par>
                       </p:childTnLst>
                     </p:cTn>
                   </p:par>
@@ -10340,7 +9091,9 @@
         </p:nvSpPr>
         <p:spPr/>
         <p:txBody>
-          <a:bodyPr/>
+          <a:bodyPr>
+            <a:normAutofit fontScale="92500" lnSpcReduction="20000"/>
+          </a:bodyPr>
           <a:lstStyle/>
           <a:p>
             <a:pPr lvl="0"/>
@@ -10497,18 +9250,6 @@
   <p:clrMapOvr>
     <a:masterClrMapping/>
   </p:clrMapOvr>
-  <mc:AlternateContent xmlns:mc="http://schemas.openxmlformats.org/markup-compatibility/2006" xmlns:p15="http://schemas.microsoft.com/office/powerpoint/2012/main">
-    <mc:Choice Requires="p15">
-      <p:transition xmlns:p14="http://schemas.microsoft.com/office/powerpoint/2010/main" spd="slow" p14:dur="2000">
-        <p15:prstTrans prst="fracture"/>
-      </p:transition>
-    </mc:Choice>
-    <mc:Fallback xmlns="">
-      <p:transition spd="slow">
-        <p:fade/>
-      </p:transition>
-    </mc:Fallback>
-  </mc:AlternateContent>
   <p:timing>
     <p:tnLst>
       <p:par>
@@ -10888,13 +9629,25 @@
             <p:ph type="title"/>
           </p:nvPr>
         </p:nvSpPr>
-        <p:spPr/>
-        <p:txBody>
-          <a:bodyPr/>
+        <p:spPr>
+          <a:xfrm>
+            <a:off x="1555667" y="1828800"/>
+            <a:ext cx="9322130" cy="2244436"/>
+          </a:xfrm>
+        </p:spPr>
+        <p:txBody>
+          <a:bodyPr>
+            <a:normAutofit/>
+          </a:bodyPr>
           <a:lstStyle/>
           <a:p>
-            <a:r>
-              <a:rPr lang="hu-HU" dirty="0"/>
+            <a:pPr algn="ctr"/>
+            <a:r>
+              <a:rPr lang="hu-HU" sz="5400" b="1" i="1" u="sng" dirty="0">
+                <a:solidFill>
+                  <a:schemeClr val="tx1"/>
+                </a:solidFill>
+              </a:rPr>
               <a:t>Köszönöm a figyelmet!</a:t>
             </a:r>
           </a:p>
@@ -10910,9 +9663,6 @@
   <p:clrMapOvr>
     <a:masterClrMapping/>
   </p:clrMapOvr>
-  <p:transition spd="slow">
-    <p:push dir="u"/>
-  </p:transition>
   <p:timing>
     <p:tnLst>
       <p:par>
@@ -11052,9 +9802,9 @@
 </file>
 
 <file path=ppt/theme/theme1.xml><?xml version="1.0" encoding="utf-8"?>
-<a:theme xmlns:a="http://schemas.openxmlformats.org/drawingml/2006/main" name="Ion">
+<a:theme xmlns:a="http://schemas.openxmlformats.org/drawingml/2006/main" name="Szita">
   <a:themeElements>
-    <a:clrScheme name="Ion">
+    <a:clrScheme name="Szita">
       <a:dk1>
         <a:sysClr val="windowText" lastClr="000000"/>
       </a:dk1>
@@ -11062,83 +9812,48 @@
         <a:sysClr val="window" lastClr="FFFFFF"/>
       </a:lt1>
       <a:dk2>
-        <a:srgbClr val="1E5155"/>
+        <a:srgbClr val="363D46"/>
       </a:dk2>
       <a:lt2>
         <a:srgbClr val="EBEBEB"/>
       </a:lt2>
       <a:accent1>
-        <a:srgbClr val="B01513"/>
+        <a:srgbClr val="6F6F6F"/>
       </a:accent1>
       <a:accent2>
-        <a:srgbClr val="EA6312"/>
+        <a:srgbClr val="BFBFA5"/>
       </a:accent2>
       <a:accent3>
-        <a:srgbClr val="E6B729"/>
+        <a:srgbClr val="DCD084"/>
       </a:accent3>
       <a:accent4>
-        <a:srgbClr val="6AAC90"/>
+        <a:srgbClr val="E7BF5F"/>
       </a:accent4>
       <a:accent5>
-        <a:srgbClr val="54849A"/>
+        <a:srgbClr val="E9A039"/>
       </a:accent5>
       <a:accent6>
-        <a:srgbClr val="9E5E9B"/>
+        <a:srgbClr val="CF7133"/>
       </a:accent6>
       <a:hlink>
-        <a:srgbClr val="58C1BA"/>
+        <a:srgbClr val="F28943"/>
       </a:hlink>
       <a:folHlink>
-        <a:srgbClr val="9DFFCB"/>
+        <a:srgbClr val="F1B76C"/>
       </a:folHlink>
     </a:clrScheme>
-    <a:fontScheme name="Ion">
+    <a:fontScheme name="Szita">
       <a:majorFont>
         <a:latin typeface="Century Gothic" panose="020B0502020202020204"/>
         <a:ea typeface=""/>
         <a:cs typeface=""/>
-        <a:font script="Jpan" typeface="メイリオ"/>
+        <a:font script="Jpan" typeface="ＭＳ ゴシック"/>
         <a:font script="Hang" typeface="맑은 고딕"/>
         <a:font script="Hans" typeface="宋体"/>
         <a:font script="Hant" typeface="新細明體"/>
-        <a:font script="Arab" typeface="Times New Roman"/>
-        <a:font script="Hebr" typeface="Times New Roman"/>
-        <a:font script="Thai" typeface="Angsana New"/>
-        <a:font script="Ethi" typeface="Nyala"/>
-        <a:font script="Beng" typeface="Vrinda"/>
-        <a:font script="Gujr" typeface="Shruti"/>
-        <a:font script="Khmr" typeface="MoolBoran"/>
-        <a:font script="Knda" typeface="Tunga"/>
-        <a:font script="Guru" typeface="Raavi"/>
-        <a:font script="Cans" typeface="Euphemia"/>
-        <a:font script="Cher" typeface="Plantagenet Cherokee"/>
-        <a:font script="Yiii" typeface="Microsoft Yi Baiti"/>
-        <a:font script="Tibt" typeface="Microsoft Himalaya"/>
-        <a:font script="Thaa" typeface="MV Boli"/>
-        <a:font script="Deva" typeface="Mangal"/>
-        <a:font script="Telu" typeface="Gautami"/>
-        <a:font script="Taml" typeface="Latha"/>
-        <a:font script="Syrc" typeface="Estrangelo Edessa"/>
-        <a:font script="Orya" typeface="Kalinga"/>
-        <a:font script="Mlym" typeface="Kartika"/>
-        <a:font script="Laoo" typeface="DokChampa"/>
-        <a:font script="Sinh" typeface="Iskoola Pota"/>
-        <a:font script="Mong" typeface="Mongolian Baiti"/>
-        <a:font script="Viet" typeface="Times New Roman"/>
-        <a:font script="Uigh" typeface="Microsoft Uighur"/>
-        <a:font script="Geor" typeface="Sylfaen"/>
-      </a:majorFont>
-      <a:minorFont>
-        <a:latin typeface="Century Gothic" panose="020B0502020202020204"/>
-        <a:ea typeface=""/>
-        <a:cs typeface=""/>
-        <a:font script="Jpan" typeface="メイリオ"/>
-        <a:font script="Hang" typeface="맑은 고딕"/>
-        <a:font script="Hans" typeface="宋体"/>
-        <a:font script="Hant" typeface="新細明體"/>
-        <a:font script="Arab" typeface="Arial"/>
-        <a:font script="Hebr" typeface="Arial"/>
-        <a:font script="Thai" typeface="Cordia New"/>
+        <a:font script="Arab" typeface="Tahoma"/>
+        <a:font script="Hebr" typeface="Gisha"/>
+        <a:font script="Thai" typeface="DilleniaUPC"/>
         <a:font script="Ethi" typeface="Nyala"/>
         <a:font script="Beng" typeface="Vrinda"/>
         <a:font script="Gujr" typeface="Shruti"/>
@@ -11159,12 +9874,47 @@
         <a:font script="Laoo" typeface="DokChampa"/>
         <a:font script="Sinh" typeface="Iskoola Pota"/>
         <a:font script="Mong" typeface="Mongolian Baiti"/>
-        <a:font script="Viet" typeface="Arial"/>
+        <a:font script="Viet" typeface="Tahoma"/>
+        <a:font script="Uigh" typeface="Microsoft Uighur"/>
+        <a:font script="Geor" typeface="Sylfaen"/>
+      </a:majorFont>
+      <a:minorFont>
+        <a:latin typeface="Century Gothic" panose="020B0502020202020204"/>
+        <a:ea typeface=""/>
+        <a:cs typeface=""/>
+        <a:font script="Jpan" typeface="ＭＳ ゴシック"/>
+        <a:font script="Hang" typeface="맑은 고딕"/>
+        <a:font script="Hans" typeface="宋体"/>
+        <a:font script="Hant" typeface="新細明體"/>
+        <a:font script="Arab" typeface="Tahoma"/>
+        <a:font script="Hebr" typeface="Gisha"/>
+        <a:font script="Thai" typeface="DilleniaUPC"/>
+        <a:font script="Ethi" typeface="Nyala"/>
+        <a:font script="Beng" typeface="Vrinda"/>
+        <a:font script="Gujr" typeface="Shruti"/>
+        <a:font script="Khmr" typeface="DaunPenh"/>
+        <a:font script="Knda" typeface="Tunga"/>
+        <a:font script="Guru" typeface="Raavi"/>
+        <a:font script="Cans" typeface="Euphemia"/>
+        <a:font script="Cher" typeface="Plantagenet Cherokee"/>
+        <a:font script="Yiii" typeface="Microsoft Yi Baiti"/>
+        <a:font script="Tibt" typeface="Microsoft Himalaya"/>
+        <a:font script="Thaa" typeface="MV Boli"/>
+        <a:font script="Deva" typeface="Mangal"/>
+        <a:font script="Telu" typeface="Gautami"/>
+        <a:font script="Taml" typeface="Latha"/>
+        <a:font script="Syrc" typeface="Estrangelo Edessa"/>
+        <a:font script="Orya" typeface="Kalinga"/>
+        <a:font script="Mlym" typeface="Kartika"/>
+        <a:font script="Laoo" typeface="DokChampa"/>
+        <a:font script="Sinh" typeface="Iskoola Pota"/>
+        <a:font script="Mong" typeface="Mongolian Baiti"/>
+        <a:font script="Viet" typeface="Verdana"/>
         <a:font script="Uigh" typeface="Microsoft Uighur"/>
         <a:font script="Geor" typeface="Sylfaen"/>
       </a:minorFont>
     </a:fontScheme>
-    <a:fmtScheme name="Ion">
+    <a:fmtScheme name="Szita">
       <a:fillStyleLst>
         <a:solidFill>
           <a:schemeClr val="phClr"/>
@@ -11173,15 +9923,13 @@
           <a:gsLst>
             <a:gs pos="0">
               <a:schemeClr val="phClr">
-                <a:tint val="64000"/>
-                <a:lumMod val="118000"/>
+                <a:tint val="60000"/>
+                <a:lumMod val="110000"/>
               </a:schemeClr>
             </a:gs>
             <a:gs pos="100000">
               <a:schemeClr val="phClr">
-                <a:tint val="92000"/>
-                <a:alpha val="100000"/>
-                <a:lumMod val="110000"/>
+                <a:tint val="82000"/>
               </a:schemeClr>
             </a:gs>
           </a:gsLst>
@@ -11191,13 +9939,13 @@
           <a:gsLst>
             <a:gs pos="0">
               <a:schemeClr val="phClr">
-                <a:tint val="98000"/>
-                <a:lumMod val="114000"/>
+                <a:tint val="96000"/>
+                <a:lumMod val="104000"/>
               </a:schemeClr>
             </a:gs>
             <a:gs pos="100000">
               <a:schemeClr val="phClr">
-                <a:shade val="90000"/>
+                <a:shade val="84000"/>
                 <a:lumMod val="84000"/>
               </a:schemeClr>
             </a:gs>
@@ -11218,7 +9966,7 @@
           </a:solidFill>
           <a:prstDash val="solid"/>
         </a:ln>
-        <a:ln w="28575" cap="rnd" cmpd="sng" algn="ctr">
+        <a:ln w="25400" cap="rnd" cmpd="sng" algn="ctr">
           <a:solidFill>
             <a:schemeClr val="phClr"/>
           </a:solidFill>
@@ -11231,16 +9979,16 @@
         </a:effectStyle>
         <a:effectStyle>
           <a:effectLst>
-            <a:outerShdw blurRad="38100" dist="25400" dir="5400000" rotWithShape="0">
+            <a:innerShdw blurRad="50800" dist="25400" dir="13500000">
               <a:srgbClr val="000000">
-                <a:alpha val="45000"/>
+                <a:alpha val="55000"/>
               </a:srgbClr>
-            </a:outerShdw>
+            </a:innerShdw>
           </a:effectLst>
         </a:effectStyle>
         <a:effectStyle>
           <a:effectLst>
-            <a:outerShdw blurRad="63500" dist="38100" dir="5400000" rotWithShape="0">
+            <a:outerShdw blurRad="50800" dist="38100" dir="5400000" rotWithShape="0">
               <a:srgbClr val="000000">
                 <a:alpha val="60000"/>
               </a:srgbClr>
@@ -11252,8 +10000,8 @@
             </a:camera>
             <a:lightRig rig="threePt" dir="tl"/>
           </a:scene3d>
-          <a:sp3d prstMaterial="plastic">
-            <a:bevelT w="0" h="0"/>
+          <a:sp3d>
+            <a:bevelT w="25400" h="25400" prst="slope"/>
           </a:sp3d>
         </a:effectStyle>
       </a:effectStyleLst>
@@ -11265,40 +10013,32 @@
           <a:gsLst>
             <a:gs pos="0">
               <a:schemeClr val="phClr">
-                <a:tint val="97000"/>
-                <a:hueMod val="88000"/>
-                <a:satMod val="130000"/>
-                <a:lumMod val="124000"/>
+                <a:tint val="90000"/>
+                <a:lumMod val="110000"/>
               </a:schemeClr>
             </a:gs>
             <a:gs pos="100000">
               <a:schemeClr val="phClr">
-                <a:tint val="96000"/>
-                <a:shade val="88000"/>
-                <a:hueMod val="108000"/>
-                <a:satMod val="164000"/>
-                <a:lumMod val="76000"/>
+                <a:shade val="64000"/>
+                <a:lumMod val="98000"/>
               </a:schemeClr>
             </a:gs>
           </a:gsLst>
-          <a:path path="circle">
-            <a:fillToRect l="45000" t="65000" r="125000" b="100000"/>
-          </a:path>
+          <a:lin ang="5400000" scaled="0"/>
         </a:gradFill>
         <a:blipFill rotWithShape="1">
           <a:blip xmlns:r="http://schemas.openxmlformats.org/officeDocument/2006/relationships" r:embed="rId1">
             <a:duotone>
               <a:schemeClr val="phClr">
-                <a:shade val="69000"/>
-                <a:hueMod val="108000"/>
-                <a:satMod val="164000"/>
-                <a:lumMod val="74000"/>
+                <a:shade val="28000"/>
+                <a:satMod val="94000"/>
+                <a:lumMod val="20000"/>
               </a:schemeClr>
               <a:schemeClr val="phClr">
-                <a:tint val="96000"/>
-                <a:hueMod val="88000"/>
-                <a:satMod val="140000"/>
-                <a:lumMod val="132000"/>
+                <a:tint val="94000"/>
+                <a:shade val="84000"/>
+                <a:satMod val="148000"/>
+                <a:lumMod val="114000"/>
               </a:schemeClr>
             </a:duotone>
           </a:blip>
@@ -11311,7 +10051,7 @@
   <a:extraClrSchemeLst/>
   <a:extLst>
     <a:ext uri="{05A4C25C-085E-4340-85A3-A5531E510DB2}">
-      <thm15:themeFamily xmlns:thm15="http://schemas.microsoft.com/office/thememl/2012/main" name="Ion" id="{B8441ADB-2E43-4AF7-B97A-BD870242C6A8}" vid="{292E63A9-BB86-4E3D-B92A-7223C6510D2E}"/>
+      <thm15:themeFamily xmlns:thm15="http://schemas.microsoft.com/office/thememl/2012/main" name="Mesh" id="{789EC3FE-34FD-429C-9918-760025E6C145}" vid="{B8BE45C0-8141-4D58-8C71-A009BC26FBBB}"/>
     </a:ext>
   </a:extLst>
 </a:theme>
